--- a/Grizzly-The-Clay-House.pptx
+++ b/Grizzly-The-Clay-House.pptx
@@ -3362,9 +3362,57 @@
           </a:p>
         </p:txBody>
       </p:sp>
+      <p:sp>
+        <p:nvSpPr>
+          <p:cNvPr id="8" name="Rounded Rectangle 7"/>
+          <p:cNvSpPr/>
+          <p:nvPr/>
+        </p:nvSpPr>
+        <p:spPr>
+          <a:xfrm>
+            <a:off x="7388352" y="1461532"/>
+            <a:ext cx="4105655" cy="3386295"/>
+          </a:xfrm>
+          <a:prstGeom prst="roundRect">
+            <a:avLst>
+              <a:gd name="adj" fmla="val 6000"/>
+            </a:avLst>
+          </a:prstGeom>
+          <a:solidFill>
+            <a:srgbClr val="FFFFFF"/>
+          </a:solidFill>
+          <a:ln w="12700">
+            <a:solidFill>
+              <a:srgbClr val="DDCFB8"/>
+            </a:solidFill>
+          </a:ln>
+          <a:effectLst/>
+        </p:spPr>
+        <p:style>
+          <a:lnRef idx="1">
+            <a:schemeClr val="accent1"/>
+          </a:lnRef>
+          <a:fillRef idx="3">
+            <a:schemeClr val="accent1"/>
+          </a:fillRef>
+          <a:effectRef idx="2">
+            <a:schemeClr val="accent1"/>
+          </a:effectRef>
+          <a:fontRef idx="minor">
+            <a:schemeClr val="lt1"/>
+          </a:fontRef>
+        </p:style>
+        <p:txBody>
+          <a:bodyPr rtlCol="0" anchor="ctr"/>
+          <a:lstStyle/>
+          <a:p>
+            <a:pPr algn="ctr"/>
+          </a:p>
+        </p:txBody>
+      </p:sp>
       <p:pic>
         <p:nvPicPr>
-          <p:cNvPr id="8" name="Picture 7" descr="grizzly-bear.png"/>
+          <p:cNvPr id="9" name="Picture 8" descr="grizzly-bear.png"/>
           <p:cNvPicPr>
             <a:picLocks noChangeAspect="1"/>
           </p:cNvPicPr>
@@ -3381,11 +3429,6 @@
             <a:off x="7452360" y="1525540"/>
             <a:ext cx="3977639" cy="3258279"/>
           </a:xfrm>
-          <a:prstGeom prst="roundRect">
-            <a:avLst>
-              <a:gd name="adj" fmla="val 6500"/>
-            </a:avLst>
-          </a:prstGeom>
           <a:prstGeom prst="rect">
             <a:avLst/>
           </a:prstGeom>
@@ -3396,388 +3439,6 @@
   <p:clrMapOvr>
     <a:masterClrMapping/>
   </p:clrMapOvr>
-  <p:timing>
-    <p:tnLst>
-      <p:par>
-        <p:cTn id="2" dur="indefinite" restart="never" nodeType="tmRoot">
-          <p:childTnLst>
-            <p:seq concurrent="1" nextAc="seek">
-              <p:cTn id="3" dur="indefinite" nodeType="mainSeq">
-                <p:childTnLst>
-                  <p:par>
-                    <p:cTn id="4" fill="hold">
-                      <p:stCondLst>
-                        <p:cond delay="indefinite" evt="onClick"/>
-                      </p:stCondLst>
-                      <p:childTnLst>
-                        <p:par>
-                          <p:cTn id="5" fill="hold">
-                            <p:childTnLst>
-                              <p:par>
-                                <p:cTn id="6" presetID="10" presetClass="entr" presetSubtype="0" fill="hold" grpId="0" nodeType="withEffect">
-                                  <p:stCondLst>
-                                    <p:cond delay="0"/>
-                                  </p:stCondLst>
-                                  <p:childTnLst>
-                                    <p:par>
-                                      <p:cTn id="7" fill="hold">
-                                        <p:stCondLst>
-                                          <p:cond delay="0"/>
-                                        </p:stCondLst>
-                                        <p:childTnLst>
-                                          <p:par>
-                                            <p:cTn id="8" presetID="1" presetClass="entr" presetSubtype="0" fill="hold" grpId="0" nodeType="withEffect">
-                                              <p:childTnLst>
-                                                <p:set>
-                                                  <p:cBhvr>
-                                                    <p:cTn id="9" dur="1" fill="hold">
-                                                      <p:stCondLst>
-                                                        <p:cond delay="0"/>
-                                                      </p:stCondLst>
-                                                      <p:childTnLst/>
-                                                    </p:cTn>
-                                                    <p:tgtEl>
-                                                      <p:spTgt spid="4"/>
-                                                    </p:tgtEl>
-                                                    <p:attrNameLst>
-                                                      <p:attrName>style.visibility</p:attrName>
-                                                    </p:attrNameLst>
-                                                  </p:cBhvr>
-                                                  <p:to>
-                                                    <p:strVal val="visible"/>
-                                                  </p:to>
-                                                </p:set>
-                                              </p:childTnLst>
-                                            </p:cTn>
-                                          </p:par>
-                                          <p:par>
-                                            <p:cTn id="10" presetID="10" presetClass="entr" presetSubtype="0" fill="hold" grpId="0" nodeType="withEffect">
-                                              <p:childTnLst>
-                                                <p:animEffect transition="in" filter="fade">
-                                                  <p:cBhvr>
-                                                    <p:cTn id="11" dur="600"/>
-                                                    <p:tgtEl>
-                                                      <p:spTgt spid="4"/>
-                                                    </p:tgtEl>
-                                                  </p:cBhvr>
-                                                </p:animEffect>
-                                              </p:childTnLst>
-                                            </p:cTn>
-                                          </p:par>
-                                        </p:childTnLst>
-                                      </p:cTn>
-                                    </p:par>
-                                  </p:childTnLst>
-                                </p:cTn>
-                              </p:par>
-                              <p:par>
-                                <p:cTn id="12" presetID="10" presetClass="entr" presetSubtype="0" fill="hold" grpId="0" nodeType="withEffect">
-                                  <p:stCondLst>
-                                    <p:cond delay="0"/>
-                                  </p:stCondLst>
-                                  <p:childTnLst>
-                                    <p:par>
-                                      <p:cTn id="13" fill="hold">
-                                        <p:stCondLst>
-                                          <p:cond delay="0"/>
-                                        </p:stCondLst>
-                                        <p:childTnLst>
-                                          <p:par>
-                                            <p:cTn id="14" presetID="1" presetClass="entr" presetSubtype="0" fill="hold" grpId="0" nodeType="withEffect">
-                                              <p:childTnLst>
-                                                <p:set>
-                                                  <p:cBhvr>
-                                                    <p:cTn id="15" dur="1" fill="hold">
-                                                      <p:stCondLst>
-                                                        <p:cond delay="0"/>
-                                                      </p:stCondLst>
-                                                      <p:childTnLst/>
-                                                    </p:cTn>
-                                                    <p:tgtEl>
-                                                      <p:spTgt spid="5"/>
-                                                    </p:tgtEl>
-                                                    <p:attrNameLst>
-                                                      <p:attrName>style.visibility</p:attrName>
-                                                    </p:attrNameLst>
-                                                  </p:cBhvr>
-                                                  <p:to>
-                                                    <p:strVal val="visible"/>
-                                                  </p:to>
-                                                </p:set>
-                                              </p:childTnLst>
-                                            </p:cTn>
-                                          </p:par>
-                                          <p:par>
-                                            <p:cTn id="16" presetID="10" presetClass="entr" presetSubtype="0" fill="hold" grpId="0" nodeType="withEffect">
-                                              <p:childTnLst>
-                                                <p:animEffect transition="in" filter="fade">
-                                                  <p:cBhvr>
-                                                    <p:cTn id="17" dur="600"/>
-                                                    <p:tgtEl>
-                                                      <p:spTgt spid="5"/>
-                                                    </p:tgtEl>
-                                                  </p:cBhvr>
-                                                </p:animEffect>
-                                              </p:childTnLst>
-                                            </p:cTn>
-                                          </p:par>
-                                        </p:childTnLst>
-                                      </p:cTn>
-                                    </p:par>
-                                  </p:childTnLst>
-                                </p:cTn>
-                              </p:par>
-                            </p:childTnLst>
-                          </p:cTn>
-                        </p:par>
-                      </p:childTnLst>
-                    </p:cTn>
-                  </p:par>
-                  <p:par>
-                    <p:cTn id="18" fill="hold">
-                      <p:stCondLst>
-                        <p:cond delay="indefinite" evt="onClick"/>
-                      </p:stCondLst>
-                      <p:childTnLst>
-                        <p:par>
-                          <p:cTn id="19" fill="hold">
-                            <p:childTnLst>
-                              <p:par>
-                                <p:cTn id="20" presetID="10" presetClass="entr" presetSubtype="0" fill="hold" grpId="0" nodeType="withEffect">
-                                  <p:stCondLst>
-                                    <p:cond delay="0"/>
-                                  </p:stCondLst>
-                                  <p:childTnLst>
-                                    <p:par>
-                                      <p:cTn id="21" fill="hold">
-                                        <p:stCondLst>
-                                          <p:cond delay="0"/>
-                                        </p:stCondLst>
-                                        <p:childTnLst>
-                                          <p:par>
-                                            <p:cTn id="22" presetID="1" presetClass="entr" presetSubtype="0" fill="hold" grpId="0" nodeType="withEffect">
-                                              <p:childTnLst>
-                                                <p:set>
-                                                  <p:cBhvr>
-                                                    <p:cTn id="23" dur="1" fill="hold">
-                                                      <p:stCondLst>
-                                                        <p:cond delay="0"/>
-                                                      </p:stCondLst>
-                                                      <p:childTnLst/>
-                                                    </p:cTn>
-                                                    <p:tgtEl>
-                                                      <p:spTgt spid="8"/>
-                                                    </p:tgtEl>
-                                                    <p:attrNameLst>
-                                                      <p:attrName>style.visibility</p:attrName>
-                                                    </p:attrNameLst>
-                                                  </p:cBhvr>
-                                                  <p:to>
-                                                    <p:strVal val="visible"/>
-                                                  </p:to>
-                                                </p:set>
-                                              </p:childTnLst>
-                                            </p:cTn>
-                                          </p:par>
-                                          <p:par>
-                                            <p:cTn id="24" presetID="10" presetClass="entr" presetSubtype="0" fill="hold" grpId="0" nodeType="withEffect">
-                                              <p:childTnLst>
-                                                <p:animEffect transition="in" filter="fade">
-                                                  <p:cBhvr>
-                                                    <p:cTn id="25" dur="600"/>
-                                                    <p:tgtEl>
-                                                      <p:spTgt spid="8"/>
-                                                    </p:tgtEl>
-                                                  </p:cBhvr>
-                                                </p:animEffect>
-                                              </p:childTnLst>
-                                            </p:cTn>
-                                          </p:par>
-                                        </p:childTnLst>
-                                      </p:cTn>
-                                    </p:par>
-                                  </p:childTnLst>
-                                </p:cTn>
-                              </p:par>
-                            </p:childTnLst>
-                          </p:cTn>
-                        </p:par>
-                      </p:childTnLst>
-                    </p:cTn>
-                  </p:par>
-                  <p:par>
-                    <p:cTn id="26" fill="hold">
-                      <p:stCondLst>
-                        <p:cond delay="indefinite" evt="onClick"/>
-                      </p:stCondLst>
-                      <p:childTnLst>
-                        <p:par>
-                          <p:cTn id="27" fill="hold">
-                            <p:childTnLst>
-                              <p:par>
-                                <p:cTn id="28" presetID="10" presetClass="entr" presetSubtype="0" fill="hold" grpId="0" nodeType="withEffect">
-                                  <p:stCondLst>
-                                    <p:cond delay="0"/>
-                                  </p:stCondLst>
-                                  <p:childTnLst>
-                                    <p:par>
-                                      <p:cTn id="29" fill="hold">
-                                        <p:stCondLst>
-                                          <p:cond delay="0"/>
-                                        </p:stCondLst>
-                                        <p:childTnLst>
-                                          <p:par>
-                                            <p:cTn id="30" presetID="1" presetClass="entr" presetSubtype="0" fill="hold" grpId="0" nodeType="withEffect">
-                                              <p:childTnLst>
-                                                <p:set>
-                                                  <p:cBhvr>
-                                                    <p:cTn id="31" dur="1" fill="hold">
-                                                      <p:stCondLst>
-                                                        <p:cond delay="0"/>
-                                                      </p:stCondLst>
-                                                      <p:childTnLst/>
-                                                    </p:cTn>
-                                                    <p:tgtEl>
-                                                      <p:spTgt spid="6"/>
-                                                    </p:tgtEl>
-                                                    <p:attrNameLst>
-                                                      <p:attrName>style.visibility</p:attrName>
-                                                    </p:attrNameLst>
-                                                  </p:cBhvr>
-                                                  <p:to>
-                                                    <p:strVal val="visible"/>
-                                                  </p:to>
-                                                </p:set>
-                                              </p:childTnLst>
-                                            </p:cTn>
-                                          </p:par>
-                                          <p:par>
-                                            <p:cTn id="32" presetID="10" presetClass="entr" presetSubtype="0" fill="hold" grpId="0" nodeType="withEffect">
-                                              <p:childTnLst>
-                                                <p:animEffect transition="in" filter="fade">
-                                                  <p:cBhvr>
-                                                    <p:cTn id="33" dur="600"/>
-                                                    <p:tgtEl>
-                                                      <p:spTgt spid="6"/>
-                                                    </p:tgtEl>
-                                                  </p:cBhvr>
-                                                </p:animEffect>
-                                              </p:childTnLst>
-                                            </p:cTn>
-                                          </p:par>
-                                        </p:childTnLst>
-                                      </p:cTn>
-                                    </p:par>
-                                  </p:childTnLst>
-                                </p:cTn>
-                              </p:par>
-                            </p:childTnLst>
-                          </p:cTn>
-                        </p:par>
-                      </p:childTnLst>
-                    </p:cTn>
-                  </p:par>
-                  <p:par>
-                    <p:cTn id="34" fill="hold">
-                      <p:stCondLst>
-                        <p:cond delay="indefinite" evt="onClick"/>
-                      </p:stCondLst>
-                      <p:childTnLst>
-                        <p:par>
-                          <p:cTn id="35" fill="hold">
-                            <p:childTnLst>
-                              <p:par>
-                                <p:cTn id="36" presetID="10" presetClass="entr" presetSubtype="0" fill="hold" grpId="0" nodeType="withEffect">
-                                  <p:stCondLst>
-                                    <p:cond delay="0"/>
-                                  </p:stCondLst>
-                                  <p:childTnLst>
-                                    <p:par>
-                                      <p:cTn id="37" fill="hold">
-                                        <p:stCondLst>
-                                          <p:cond delay="0"/>
-                                        </p:stCondLst>
-                                        <p:childTnLst>
-                                          <p:par>
-                                            <p:cTn id="38" presetID="1" presetClass="entr" presetSubtype="0" fill="hold" grpId="0" nodeType="withEffect">
-                                              <p:childTnLst>
-                                                <p:set>
-                                                  <p:cBhvr>
-                                                    <p:cTn id="39" dur="1" fill="hold">
-                                                      <p:stCondLst>
-                                                        <p:cond delay="0"/>
-                                                      </p:stCondLst>
-                                                      <p:childTnLst/>
-                                                    </p:cTn>
-                                                    <p:tgtEl>
-                                                      <p:spTgt spid="7"/>
-                                                    </p:tgtEl>
-                                                    <p:attrNameLst>
-                                                      <p:attrName>style.visibility</p:attrName>
-                                                    </p:attrNameLst>
-                                                  </p:cBhvr>
-                                                  <p:to>
-                                                    <p:strVal val="visible"/>
-                                                  </p:to>
-                                                </p:set>
-                                              </p:childTnLst>
-                                            </p:cTn>
-                                          </p:par>
-                                          <p:par>
-                                            <p:cTn id="40" presetID="10" presetClass="entr" presetSubtype="0" fill="hold" grpId="0" nodeType="withEffect">
-                                              <p:childTnLst>
-                                                <p:animEffect transition="in" filter="fade">
-                                                  <p:cBhvr>
-                                                    <p:cTn id="41" dur="600"/>
-                                                    <p:tgtEl>
-                                                      <p:spTgt spid="7"/>
-                                                    </p:tgtEl>
-                                                  </p:cBhvr>
-                                                </p:animEffect>
-                                              </p:childTnLst>
-                                            </p:cTn>
-                                          </p:par>
-                                        </p:childTnLst>
-                                      </p:cTn>
-                                    </p:par>
-                                  </p:childTnLst>
-                                </p:cTn>
-                              </p:par>
-                            </p:childTnLst>
-                          </p:cTn>
-                        </p:par>
-                      </p:childTnLst>
-                    </p:cTn>
-                  </p:par>
-                </p:childTnLst>
-              </p:cTn>
-              <p:prevCondLst>
-                <p:cond evt="onClick" delay="0">
-                  <p:tgtEl>
-                    <p:sldTgt/>
-                  </p:tgtEl>
-                </p:cond>
-              </p:prevCondLst>
-              <p:nextCondLst>
-                <p:cond evt="onClick" delay="0">
-                  <p:tgtEl>
-                    <p:sldTgt/>
-                  </p:tgtEl>
-                </p:cond>
-              </p:nextCondLst>
-            </p:seq>
-          </p:childTnLst>
-        </p:cTn>
-      </p:par>
-    </p:tnLst>
-    <p:bldLst>
-      <p:bldP spid="4" grpId="0"/>
-      <p:bldP spid="5" grpId="0"/>
-      <p:bldP spid="8" grpId="0"/>
-      <p:bldP spid="6" grpId="0"/>
-      <p:bldP spid="7" grpId="0"/>
-    </p:bldLst>
-  </p:timing>
 </p:sld>
 </file>
 
@@ -4921,1245 +4582,6 @@
   <p:clrMapOvr>
     <a:masterClrMapping/>
   </p:clrMapOvr>
-  <p:timing>
-    <p:tnLst>
-      <p:par>
-        <p:cTn id="2" dur="indefinite" restart="never" nodeType="tmRoot">
-          <p:childTnLst>
-            <p:seq concurrent="1" nextAc="seek">
-              <p:cTn id="3" dur="indefinite" nodeType="mainSeq">
-                <p:childTnLst>
-                  <p:par>
-                    <p:cTn id="4" fill="hold">
-                      <p:stCondLst>
-                        <p:cond delay="indefinite" evt="onClick"/>
-                      </p:stCondLst>
-                      <p:childTnLst>
-                        <p:par>
-                          <p:cTn id="5" fill="hold">
-                            <p:childTnLst>
-                              <p:par>
-                                <p:cTn id="6" presetID="10" presetClass="entr" presetSubtype="0" fill="hold" grpId="0" nodeType="withEffect">
-                                  <p:stCondLst>
-                                    <p:cond delay="0"/>
-                                  </p:stCondLst>
-                                  <p:childTnLst>
-                                    <p:par>
-                                      <p:cTn id="7" fill="hold">
-                                        <p:stCondLst>
-                                          <p:cond delay="0"/>
-                                        </p:stCondLst>
-                                        <p:childTnLst>
-                                          <p:par>
-                                            <p:cTn id="8" presetID="1" presetClass="entr" presetSubtype="0" fill="hold" grpId="0" nodeType="withEffect">
-                                              <p:childTnLst>
-                                                <p:set>
-                                                  <p:cBhvr>
-                                                    <p:cTn id="9" dur="1" fill="hold">
-                                                      <p:stCondLst>
-                                                        <p:cond delay="0"/>
-                                                      </p:stCondLst>
-                                                      <p:childTnLst/>
-                                                    </p:cTn>
-                                                    <p:tgtEl>
-                                                      <p:spTgt spid="6"/>
-                                                    </p:tgtEl>
-                                                    <p:attrNameLst>
-                                                      <p:attrName>style.visibility</p:attrName>
-                                                    </p:attrNameLst>
-                                                  </p:cBhvr>
-                                                  <p:to>
-                                                    <p:strVal val="visible"/>
-                                                  </p:to>
-                                                </p:set>
-                                              </p:childTnLst>
-                                            </p:cTn>
-                                          </p:par>
-                                          <p:par>
-                                            <p:cTn id="10" presetID="10" presetClass="entr" presetSubtype="0" fill="hold" grpId="0" nodeType="withEffect">
-                                              <p:childTnLst>
-                                                <p:animEffect transition="in" filter="fade">
-                                                  <p:cBhvr>
-                                                    <p:cTn id="11" dur="600"/>
-                                                    <p:tgtEl>
-                                                      <p:spTgt spid="6"/>
-                                                    </p:tgtEl>
-                                                  </p:cBhvr>
-                                                </p:animEffect>
-                                              </p:childTnLst>
-                                            </p:cTn>
-                                          </p:par>
-                                        </p:childTnLst>
-                                      </p:cTn>
-                                    </p:par>
-                                  </p:childTnLst>
-                                </p:cTn>
-                              </p:par>
-                            </p:childTnLst>
-                          </p:cTn>
-                        </p:par>
-                      </p:childTnLst>
-                    </p:cTn>
-                  </p:par>
-                  <p:par>
-                    <p:cTn id="12" fill="hold">
-                      <p:stCondLst>
-                        <p:cond delay="indefinite" evt="onClick"/>
-                      </p:stCondLst>
-                      <p:childTnLst>
-                        <p:par>
-                          <p:cTn id="13" fill="hold">
-                            <p:childTnLst>
-                              <p:par>
-                                <p:cTn id="14" presetID="10" presetClass="entr" presetSubtype="0" fill="hold" grpId="0" nodeType="withEffect">
-                                  <p:stCondLst>
-                                    <p:cond delay="0"/>
-                                  </p:stCondLst>
-                                  <p:childTnLst>
-                                    <p:par>
-                                      <p:cTn id="15" fill="hold">
-                                        <p:stCondLst>
-                                          <p:cond delay="0"/>
-                                        </p:stCondLst>
-                                        <p:childTnLst>
-                                          <p:par>
-                                            <p:cTn id="16" presetID="1" presetClass="entr" presetSubtype="0" fill="hold" grpId="0" nodeType="withEffect">
-                                              <p:childTnLst>
-                                                <p:set>
-                                                  <p:cBhvr>
-                                                    <p:cTn id="17" dur="1" fill="hold">
-                                                      <p:stCondLst>
-                                                        <p:cond delay="0"/>
-                                                      </p:stCondLst>
-                                                      <p:childTnLst/>
-                                                    </p:cTn>
-                                                    <p:tgtEl>
-                                                      <p:spTgt spid="7"/>
-                                                    </p:tgtEl>
-                                                    <p:attrNameLst>
-                                                      <p:attrName>style.visibility</p:attrName>
-                                                    </p:attrNameLst>
-                                                  </p:cBhvr>
-                                                  <p:to>
-                                                    <p:strVal val="visible"/>
-                                                  </p:to>
-                                                </p:set>
-                                              </p:childTnLst>
-                                            </p:cTn>
-                                          </p:par>
-                                          <p:par>
-                                            <p:cTn id="18" presetID="10" presetClass="entr" presetSubtype="0" fill="hold" grpId="0" nodeType="withEffect">
-                                              <p:childTnLst>
-                                                <p:animEffect transition="in" filter="fade">
-                                                  <p:cBhvr>
-                                                    <p:cTn id="19" dur="600"/>
-                                                    <p:tgtEl>
-                                                      <p:spTgt spid="7"/>
-                                                    </p:tgtEl>
-                                                  </p:cBhvr>
-                                                </p:animEffect>
-                                              </p:childTnLst>
-                                            </p:cTn>
-                                          </p:par>
-                                        </p:childTnLst>
-                                      </p:cTn>
-                                    </p:par>
-                                  </p:childTnLst>
-                                </p:cTn>
-                              </p:par>
-                              <p:par>
-                                <p:cTn id="20" presetID="10" presetClass="entr" presetSubtype="0" fill="hold" grpId="0" nodeType="withEffect">
-                                  <p:stCondLst>
-                                    <p:cond delay="0"/>
-                                  </p:stCondLst>
-                                  <p:childTnLst>
-                                    <p:par>
-                                      <p:cTn id="21" fill="hold">
-                                        <p:stCondLst>
-                                          <p:cond delay="0"/>
-                                        </p:stCondLst>
-                                        <p:childTnLst>
-                                          <p:par>
-                                            <p:cTn id="22" presetID="1" presetClass="entr" presetSubtype="0" fill="hold" grpId="0" nodeType="withEffect">
-                                              <p:childTnLst>
-                                                <p:set>
-                                                  <p:cBhvr>
-                                                    <p:cTn id="23" dur="1" fill="hold">
-                                                      <p:stCondLst>
-                                                        <p:cond delay="0"/>
-                                                      </p:stCondLst>
-                                                      <p:childTnLst/>
-                                                    </p:cTn>
-                                                    <p:tgtEl>
-                                                      <p:spTgt spid="8"/>
-                                                    </p:tgtEl>
-                                                    <p:attrNameLst>
-                                                      <p:attrName>style.visibility</p:attrName>
-                                                    </p:attrNameLst>
-                                                  </p:cBhvr>
-                                                  <p:to>
-                                                    <p:strVal val="visible"/>
-                                                  </p:to>
-                                                </p:set>
-                                              </p:childTnLst>
-                                            </p:cTn>
-                                          </p:par>
-                                          <p:par>
-                                            <p:cTn id="24" presetID="10" presetClass="entr" presetSubtype="0" fill="hold" grpId="0" nodeType="withEffect">
-                                              <p:childTnLst>
-                                                <p:animEffect transition="in" filter="fade">
-                                                  <p:cBhvr>
-                                                    <p:cTn id="25" dur="600"/>
-                                                    <p:tgtEl>
-                                                      <p:spTgt spid="8"/>
-                                                    </p:tgtEl>
-                                                  </p:cBhvr>
-                                                </p:animEffect>
-                                              </p:childTnLst>
-                                            </p:cTn>
-                                          </p:par>
-                                        </p:childTnLst>
-                                      </p:cTn>
-                                    </p:par>
-                                  </p:childTnLst>
-                                </p:cTn>
-                              </p:par>
-                              <p:par>
-                                <p:cTn id="26" presetID="10" presetClass="entr" presetSubtype="0" fill="hold" grpId="0" nodeType="withEffect">
-                                  <p:stCondLst>
-                                    <p:cond delay="0"/>
-                                  </p:stCondLst>
-                                  <p:childTnLst>
-                                    <p:par>
-                                      <p:cTn id="27" fill="hold">
-                                        <p:stCondLst>
-                                          <p:cond delay="0"/>
-                                        </p:stCondLst>
-                                        <p:childTnLst>
-                                          <p:par>
-                                            <p:cTn id="28" presetID="1" presetClass="entr" presetSubtype="0" fill="hold" grpId="0" nodeType="withEffect">
-                                              <p:childTnLst>
-                                                <p:set>
-                                                  <p:cBhvr>
-                                                    <p:cTn id="29" dur="1" fill="hold">
-                                                      <p:stCondLst>
-                                                        <p:cond delay="0"/>
-                                                      </p:stCondLst>
-                                                      <p:childTnLst/>
-                                                    </p:cTn>
-                                                    <p:tgtEl>
-                                                      <p:spTgt spid="9"/>
-                                                    </p:tgtEl>
-                                                    <p:attrNameLst>
-                                                      <p:attrName>style.visibility</p:attrName>
-                                                    </p:attrNameLst>
-                                                  </p:cBhvr>
-                                                  <p:to>
-                                                    <p:strVal val="visible"/>
-                                                  </p:to>
-                                                </p:set>
-                                              </p:childTnLst>
-                                            </p:cTn>
-                                          </p:par>
-                                          <p:par>
-                                            <p:cTn id="30" presetID="10" presetClass="entr" presetSubtype="0" fill="hold" grpId="0" nodeType="withEffect">
-                                              <p:childTnLst>
-                                                <p:animEffect transition="in" filter="fade">
-                                                  <p:cBhvr>
-                                                    <p:cTn id="31" dur="600"/>
-                                                    <p:tgtEl>
-                                                      <p:spTgt spid="9"/>
-                                                    </p:tgtEl>
-                                                  </p:cBhvr>
-                                                </p:animEffect>
-                                              </p:childTnLst>
-                                            </p:cTn>
-                                          </p:par>
-                                        </p:childTnLst>
-                                      </p:cTn>
-                                    </p:par>
-                                  </p:childTnLst>
-                                </p:cTn>
-                              </p:par>
-                            </p:childTnLst>
-                          </p:cTn>
-                        </p:par>
-                      </p:childTnLst>
-                    </p:cTn>
-                  </p:par>
-                  <p:par>
-                    <p:cTn id="32" fill="hold">
-                      <p:stCondLst>
-                        <p:cond delay="indefinite" evt="onClick"/>
-                      </p:stCondLst>
-                      <p:childTnLst>
-                        <p:par>
-                          <p:cTn id="33" fill="hold">
-                            <p:childTnLst>
-                              <p:par>
-                                <p:cTn id="34" presetID="10" presetClass="entr" presetSubtype="0" fill="hold" grpId="0" nodeType="withEffect">
-                                  <p:stCondLst>
-                                    <p:cond delay="0"/>
-                                  </p:stCondLst>
-                                  <p:childTnLst>
-                                    <p:par>
-                                      <p:cTn id="35" fill="hold">
-                                        <p:stCondLst>
-                                          <p:cond delay="0"/>
-                                        </p:stCondLst>
-                                        <p:childTnLst>
-                                          <p:par>
-                                            <p:cTn id="36" presetID="1" presetClass="entr" presetSubtype="0" fill="hold" grpId="0" nodeType="withEffect">
-                                              <p:childTnLst>
-                                                <p:set>
-                                                  <p:cBhvr>
-                                                    <p:cTn id="37" dur="1" fill="hold">
-                                                      <p:stCondLst>
-                                                        <p:cond delay="0"/>
-                                                      </p:stCondLst>
-                                                      <p:childTnLst/>
-                                                    </p:cTn>
-                                                    <p:tgtEl>
-                                                      <p:spTgt spid="10"/>
-                                                    </p:tgtEl>
-                                                    <p:attrNameLst>
-                                                      <p:attrName>style.visibility</p:attrName>
-                                                    </p:attrNameLst>
-                                                  </p:cBhvr>
-                                                  <p:to>
-                                                    <p:strVal val="visible"/>
-                                                  </p:to>
-                                                </p:set>
-                                              </p:childTnLst>
-                                            </p:cTn>
-                                          </p:par>
-                                          <p:par>
-                                            <p:cTn id="38" presetID="10" presetClass="entr" presetSubtype="0" fill="hold" grpId="0" nodeType="withEffect">
-                                              <p:childTnLst>
-                                                <p:animEffect transition="in" filter="fade">
-                                                  <p:cBhvr>
-                                                    <p:cTn id="39" dur="600"/>
-                                                    <p:tgtEl>
-                                                      <p:spTgt spid="10"/>
-                                                    </p:tgtEl>
-                                                  </p:cBhvr>
-                                                </p:animEffect>
-                                              </p:childTnLst>
-                                            </p:cTn>
-                                          </p:par>
-                                        </p:childTnLst>
-                                      </p:cTn>
-                                    </p:par>
-                                  </p:childTnLst>
-                                </p:cTn>
-                              </p:par>
-                              <p:par>
-                                <p:cTn id="40" presetID="10" presetClass="entr" presetSubtype="0" fill="hold" grpId="0" nodeType="withEffect">
-                                  <p:stCondLst>
-                                    <p:cond delay="0"/>
-                                  </p:stCondLst>
-                                  <p:childTnLst>
-                                    <p:par>
-                                      <p:cTn id="41" fill="hold">
-                                        <p:stCondLst>
-                                          <p:cond delay="0"/>
-                                        </p:stCondLst>
-                                        <p:childTnLst>
-                                          <p:par>
-                                            <p:cTn id="42" presetID="1" presetClass="entr" presetSubtype="0" fill="hold" grpId="0" nodeType="withEffect">
-                                              <p:childTnLst>
-                                                <p:set>
-                                                  <p:cBhvr>
-                                                    <p:cTn id="43" dur="1" fill="hold">
-                                                      <p:stCondLst>
-                                                        <p:cond delay="0"/>
-                                                      </p:stCondLst>
-                                                      <p:childTnLst/>
-                                                    </p:cTn>
-                                                    <p:tgtEl>
-                                                      <p:spTgt spid="11"/>
-                                                    </p:tgtEl>
-                                                    <p:attrNameLst>
-                                                      <p:attrName>style.visibility</p:attrName>
-                                                    </p:attrNameLst>
-                                                  </p:cBhvr>
-                                                  <p:to>
-                                                    <p:strVal val="visible"/>
-                                                  </p:to>
-                                                </p:set>
-                                              </p:childTnLst>
-                                            </p:cTn>
-                                          </p:par>
-                                          <p:par>
-                                            <p:cTn id="44" presetID="10" presetClass="entr" presetSubtype="0" fill="hold" grpId="0" nodeType="withEffect">
-                                              <p:childTnLst>
-                                                <p:animEffect transition="in" filter="fade">
-                                                  <p:cBhvr>
-                                                    <p:cTn id="45" dur="600"/>
-                                                    <p:tgtEl>
-                                                      <p:spTgt spid="11"/>
-                                                    </p:tgtEl>
-                                                  </p:cBhvr>
-                                                </p:animEffect>
-                                              </p:childTnLst>
-                                            </p:cTn>
-                                          </p:par>
-                                        </p:childTnLst>
-                                      </p:cTn>
-                                    </p:par>
-                                  </p:childTnLst>
-                                </p:cTn>
-                              </p:par>
-                              <p:par>
-                                <p:cTn id="46" presetID="10" presetClass="entr" presetSubtype="0" fill="hold" grpId="0" nodeType="withEffect">
-                                  <p:stCondLst>
-                                    <p:cond delay="0"/>
-                                  </p:stCondLst>
-                                  <p:childTnLst>
-                                    <p:par>
-                                      <p:cTn id="47" fill="hold">
-                                        <p:stCondLst>
-                                          <p:cond delay="0"/>
-                                        </p:stCondLst>
-                                        <p:childTnLst>
-                                          <p:par>
-                                            <p:cTn id="48" presetID="1" presetClass="entr" presetSubtype="0" fill="hold" grpId="0" nodeType="withEffect">
-                                              <p:childTnLst>
-                                                <p:set>
-                                                  <p:cBhvr>
-                                                    <p:cTn id="49" dur="1" fill="hold">
-                                                      <p:stCondLst>
-                                                        <p:cond delay="0"/>
-                                                      </p:stCondLst>
-                                                      <p:childTnLst/>
-                                                    </p:cTn>
-                                                    <p:tgtEl>
-                                                      <p:spTgt spid="12"/>
-                                                    </p:tgtEl>
-                                                    <p:attrNameLst>
-                                                      <p:attrName>style.visibility</p:attrName>
-                                                    </p:attrNameLst>
-                                                  </p:cBhvr>
-                                                  <p:to>
-                                                    <p:strVal val="visible"/>
-                                                  </p:to>
-                                                </p:set>
-                                              </p:childTnLst>
-                                            </p:cTn>
-                                          </p:par>
-                                          <p:par>
-                                            <p:cTn id="50" presetID="10" presetClass="entr" presetSubtype="0" fill="hold" grpId="0" nodeType="withEffect">
-                                              <p:childTnLst>
-                                                <p:animEffect transition="in" filter="fade">
-                                                  <p:cBhvr>
-                                                    <p:cTn id="51" dur="600"/>
-                                                    <p:tgtEl>
-                                                      <p:spTgt spid="12"/>
-                                                    </p:tgtEl>
-                                                  </p:cBhvr>
-                                                </p:animEffect>
-                                              </p:childTnLst>
-                                            </p:cTn>
-                                          </p:par>
-                                        </p:childTnLst>
-                                      </p:cTn>
-                                    </p:par>
-                                  </p:childTnLst>
-                                </p:cTn>
-                              </p:par>
-                            </p:childTnLst>
-                          </p:cTn>
-                        </p:par>
-                      </p:childTnLst>
-                    </p:cTn>
-                  </p:par>
-                  <p:par>
-                    <p:cTn id="52" fill="hold">
-                      <p:stCondLst>
-                        <p:cond delay="indefinite" evt="onClick"/>
-                      </p:stCondLst>
-                      <p:childTnLst>
-                        <p:par>
-                          <p:cTn id="53" fill="hold">
-                            <p:childTnLst>
-                              <p:par>
-                                <p:cTn id="54" presetID="10" presetClass="entr" presetSubtype="0" fill="hold" grpId="0" nodeType="withEffect">
-                                  <p:stCondLst>
-                                    <p:cond delay="0"/>
-                                  </p:stCondLst>
-                                  <p:childTnLst>
-                                    <p:par>
-                                      <p:cTn id="55" fill="hold">
-                                        <p:stCondLst>
-                                          <p:cond delay="0"/>
-                                        </p:stCondLst>
-                                        <p:childTnLst>
-                                          <p:par>
-                                            <p:cTn id="56" presetID="1" presetClass="entr" presetSubtype="0" fill="hold" grpId="0" nodeType="withEffect">
-                                              <p:childTnLst>
-                                                <p:set>
-                                                  <p:cBhvr>
-                                                    <p:cTn id="57" dur="1" fill="hold">
-                                                      <p:stCondLst>
-                                                        <p:cond delay="0"/>
-                                                      </p:stCondLst>
-                                                      <p:childTnLst/>
-                                                    </p:cTn>
-                                                    <p:tgtEl>
-                                                      <p:spTgt spid="13"/>
-                                                    </p:tgtEl>
-                                                    <p:attrNameLst>
-                                                      <p:attrName>style.visibility</p:attrName>
-                                                    </p:attrNameLst>
-                                                  </p:cBhvr>
-                                                  <p:to>
-                                                    <p:strVal val="visible"/>
-                                                  </p:to>
-                                                </p:set>
-                                              </p:childTnLst>
-                                            </p:cTn>
-                                          </p:par>
-                                          <p:par>
-                                            <p:cTn id="58" presetID="10" presetClass="entr" presetSubtype="0" fill="hold" grpId="0" nodeType="withEffect">
-                                              <p:childTnLst>
-                                                <p:animEffect transition="in" filter="fade">
-                                                  <p:cBhvr>
-                                                    <p:cTn id="59" dur="600"/>
-                                                    <p:tgtEl>
-                                                      <p:spTgt spid="13"/>
-                                                    </p:tgtEl>
-                                                  </p:cBhvr>
-                                                </p:animEffect>
-                                              </p:childTnLst>
-                                            </p:cTn>
-                                          </p:par>
-                                        </p:childTnLst>
-                                      </p:cTn>
-                                    </p:par>
-                                  </p:childTnLst>
-                                </p:cTn>
-                              </p:par>
-                              <p:par>
-                                <p:cTn id="60" presetID="10" presetClass="entr" presetSubtype="0" fill="hold" grpId="0" nodeType="withEffect">
-                                  <p:stCondLst>
-                                    <p:cond delay="0"/>
-                                  </p:stCondLst>
-                                  <p:childTnLst>
-                                    <p:par>
-                                      <p:cTn id="61" fill="hold">
-                                        <p:stCondLst>
-                                          <p:cond delay="0"/>
-                                        </p:stCondLst>
-                                        <p:childTnLst>
-                                          <p:par>
-                                            <p:cTn id="62" presetID="1" presetClass="entr" presetSubtype="0" fill="hold" grpId="0" nodeType="withEffect">
-                                              <p:childTnLst>
-                                                <p:set>
-                                                  <p:cBhvr>
-                                                    <p:cTn id="63" dur="1" fill="hold">
-                                                      <p:stCondLst>
-                                                        <p:cond delay="0"/>
-                                                      </p:stCondLst>
-                                                      <p:childTnLst/>
-                                                    </p:cTn>
-                                                    <p:tgtEl>
-                                                      <p:spTgt spid="14"/>
-                                                    </p:tgtEl>
-                                                    <p:attrNameLst>
-                                                      <p:attrName>style.visibility</p:attrName>
-                                                    </p:attrNameLst>
-                                                  </p:cBhvr>
-                                                  <p:to>
-                                                    <p:strVal val="visible"/>
-                                                  </p:to>
-                                                </p:set>
-                                              </p:childTnLst>
-                                            </p:cTn>
-                                          </p:par>
-                                          <p:par>
-                                            <p:cTn id="64" presetID="10" presetClass="entr" presetSubtype="0" fill="hold" grpId="0" nodeType="withEffect">
-                                              <p:childTnLst>
-                                                <p:animEffect transition="in" filter="fade">
-                                                  <p:cBhvr>
-                                                    <p:cTn id="65" dur="600"/>
-                                                    <p:tgtEl>
-                                                      <p:spTgt spid="14"/>
-                                                    </p:tgtEl>
-                                                  </p:cBhvr>
-                                                </p:animEffect>
-                                              </p:childTnLst>
-                                            </p:cTn>
-                                          </p:par>
-                                        </p:childTnLst>
-                                      </p:cTn>
-                                    </p:par>
-                                  </p:childTnLst>
-                                </p:cTn>
-                              </p:par>
-                              <p:par>
-                                <p:cTn id="66" presetID="10" presetClass="entr" presetSubtype="0" fill="hold" grpId="0" nodeType="withEffect">
-                                  <p:stCondLst>
-                                    <p:cond delay="0"/>
-                                  </p:stCondLst>
-                                  <p:childTnLst>
-                                    <p:par>
-                                      <p:cTn id="67" fill="hold">
-                                        <p:stCondLst>
-                                          <p:cond delay="0"/>
-                                        </p:stCondLst>
-                                        <p:childTnLst>
-                                          <p:par>
-                                            <p:cTn id="68" presetID="1" presetClass="entr" presetSubtype="0" fill="hold" grpId="0" nodeType="withEffect">
-                                              <p:childTnLst>
-                                                <p:set>
-                                                  <p:cBhvr>
-                                                    <p:cTn id="69" dur="1" fill="hold">
-                                                      <p:stCondLst>
-                                                        <p:cond delay="0"/>
-                                                      </p:stCondLst>
-                                                      <p:childTnLst/>
-                                                    </p:cTn>
-                                                    <p:tgtEl>
-                                                      <p:spTgt spid="15"/>
-                                                    </p:tgtEl>
-                                                    <p:attrNameLst>
-                                                      <p:attrName>style.visibility</p:attrName>
-                                                    </p:attrNameLst>
-                                                  </p:cBhvr>
-                                                  <p:to>
-                                                    <p:strVal val="visible"/>
-                                                  </p:to>
-                                                </p:set>
-                                              </p:childTnLst>
-                                            </p:cTn>
-                                          </p:par>
-                                          <p:par>
-                                            <p:cTn id="70" presetID="10" presetClass="entr" presetSubtype="0" fill="hold" grpId="0" nodeType="withEffect">
-                                              <p:childTnLst>
-                                                <p:animEffect transition="in" filter="fade">
-                                                  <p:cBhvr>
-                                                    <p:cTn id="71" dur="600"/>
-                                                    <p:tgtEl>
-                                                      <p:spTgt spid="15"/>
-                                                    </p:tgtEl>
-                                                  </p:cBhvr>
-                                                </p:animEffect>
-                                              </p:childTnLst>
-                                            </p:cTn>
-                                          </p:par>
-                                        </p:childTnLst>
-                                      </p:cTn>
-                                    </p:par>
-                                  </p:childTnLst>
-                                </p:cTn>
-                              </p:par>
-                            </p:childTnLst>
-                          </p:cTn>
-                        </p:par>
-                      </p:childTnLst>
-                    </p:cTn>
-                  </p:par>
-                  <p:par>
-                    <p:cTn id="72" fill="hold">
-                      <p:stCondLst>
-                        <p:cond delay="indefinite" evt="onClick"/>
-                      </p:stCondLst>
-                      <p:childTnLst>
-                        <p:par>
-                          <p:cTn id="73" fill="hold">
-                            <p:childTnLst>
-                              <p:par>
-                                <p:cTn id="74" presetID="10" presetClass="entr" presetSubtype="0" fill="hold" grpId="0" nodeType="withEffect">
-                                  <p:stCondLst>
-                                    <p:cond delay="0"/>
-                                  </p:stCondLst>
-                                  <p:childTnLst>
-                                    <p:par>
-                                      <p:cTn id="75" fill="hold">
-                                        <p:stCondLst>
-                                          <p:cond delay="0"/>
-                                        </p:stCondLst>
-                                        <p:childTnLst>
-                                          <p:par>
-                                            <p:cTn id="76" presetID="1" presetClass="entr" presetSubtype="0" fill="hold" grpId="0" nodeType="withEffect">
-                                              <p:childTnLst>
-                                                <p:set>
-                                                  <p:cBhvr>
-                                                    <p:cTn id="77" dur="1" fill="hold">
-                                                      <p:stCondLst>
-                                                        <p:cond delay="0"/>
-                                                      </p:stCondLst>
-                                                      <p:childTnLst/>
-                                                    </p:cTn>
-                                                    <p:tgtEl>
-                                                      <p:spTgt spid="16"/>
-                                                    </p:tgtEl>
-                                                    <p:attrNameLst>
-                                                      <p:attrName>style.visibility</p:attrName>
-                                                    </p:attrNameLst>
-                                                  </p:cBhvr>
-                                                  <p:to>
-                                                    <p:strVal val="visible"/>
-                                                  </p:to>
-                                                </p:set>
-                                              </p:childTnLst>
-                                            </p:cTn>
-                                          </p:par>
-                                          <p:par>
-                                            <p:cTn id="78" presetID="10" presetClass="entr" presetSubtype="0" fill="hold" grpId="0" nodeType="withEffect">
-                                              <p:childTnLst>
-                                                <p:animEffect transition="in" filter="fade">
-                                                  <p:cBhvr>
-                                                    <p:cTn id="79" dur="600"/>
-                                                    <p:tgtEl>
-                                                      <p:spTgt spid="16"/>
-                                                    </p:tgtEl>
-                                                  </p:cBhvr>
-                                                </p:animEffect>
-                                              </p:childTnLst>
-                                            </p:cTn>
-                                          </p:par>
-                                        </p:childTnLst>
-                                      </p:cTn>
-                                    </p:par>
-                                  </p:childTnLst>
-                                </p:cTn>
-                              </p:par>
-                              <p:par>
-                                <p:cTn id="80" presetID="10" presetClass="entr" presetSubtype="0" fill="hold" grpId="0" nodeType="withEffect">
-                                  <p:stCondLst>
-                                    <p:cond delay="0"/>
-                                  </p:stCondLst>
-                                  <p:childTnLst>
-                                    <p:par>
-                                      <p:cTn id="81" fill="hold">
-                                        <p:stCondLst>
-                                          <p:cond delay="0"/>
-                                        </p:stCondLst>
-                                        <p:childTnLst>
-                                          <p:par>
-                                            <p:cTn id="82" presetID="1" presetClass="entr" presetSubtype="0" fill="hold" grpId="0" nodeType="withEffect">
-                                              <p:childTnLst>
-                                                <p:set>
-                                                  <p:cBhvr>
-                                                    <p:cTn id="83" dur="1" fill="hold">
-                                                      <p:stCondLst>
-                                                        <p:cond delay="0"/>
-                                                      </p:stCondLst>
-                                                      <p:childTnLst/>
-                                                    </p:cTn>
-                                                    <p:tgtEl>
-                                                      <p:spTgt spid="17"/>
-                                                    </p:tgtEl>
-                                                    <p:attrNameLst>
-                                                      <p:attrName>style.visibility</p:attrName>
-                                                    </p:attrNameLst>
-                                                  </p:cBhvr>
-                                                  <p:to>
-                                                    <p:strVal val="visible"/>
-                                                  </p:to>
-                                                </p:set>
-                                              </p:childTnLst>
-                                            </p:cTn>
-                                          </p:par>
-                                          <p:par>
-                                            <p:cTn id="84" presetID="10" presetClass="entr" presetSubtype="0" fill="hold" grpId="0" nodeType="withEffect">
-                                              <p:childTnLst>
-                                                <p:animEffect transition="in" filter="fade">
-                                                  <p:cBhvr>
-                                                    <p:cTn id="85" dur="600"/>
-                                                    <p:tgtEl>
-                                                      <p:spTgt spid="17"/>
-                                                    </p:tgtEl>
-                                                  </p:cBhvr>
-                                                </p:animEffect>
-                                              </p:childTnLst>
-                                            </p:cTn>
-                                          </p:par>
-                                        </p:childTnLst>
-                                      </p:cTn>
-                                    </p:par>
-                                  </p:childTnLst>
-                                </p:cTn>
-                              </p:par>
-                              <p:par>
-                                <p:cTn id="86" presetID="10" presetClass="entr" presetSubtype="0" fill="hold" grpId="0" nodeType="withEffect">
-                                  <p:stCondLst>
-                                    <p:cond delay="0"/>
-                                  </p:stCondLst>
-                                  <p:childTnLst>
-                                    <p:par>
-                                      <p:cTn id="87" fill="hold">
-                                        <p:stCondLst>
-                                          <p:cond delay="0"/>
-                                        </p:stCondLst>
-                                        <p:childTnLst>
-                                          <p:par>
-                                            <p:cTn id="88" presetID="1" presetClass="entr" presetSubtype="0" fill="hold" grpId="0" nodeType="withEffect">
-                                              <p:childTnLst>
-                                                <p:set>
-                                                  <p:cBhvr>
-                                                    <p:cTn id="89" dur="1" fill="hold">
-                                                      <p:stCondLst>
-                                                        <p:cond delay="0"/>
-                                                      </p:stCondLst>
-                                                      <p:childTnLst/>
-                                                    </p:cTn>
-                                                    <p:tgtEl>
-                                                      <p:spTgt spid="18"/>
-                                                    </p:tgtEl>
-                                                    <p:attrNameLst>
-                                                      <p:attrName>style.visibility</p:attrName>
-                                                    </p:attrNameLst>
-                                                  </p:cBhvr>
-                                                  <p:to>
-                                                    <p:strVal val="visible"/>
-                                                  </p:to>
-                                                </p:set>
-                                              </p:childTnLst>
-                                            </p:cTn>
-                                          </p:par>
-                                          <p:par>
-                                            <p:cTn id="90" presetID="10" presetClass="entr" presetSubtype="0" fill="hold" grpId="0" nodeType="withEffect">
-                                              <p:childTnLst>
-                                                <p:animEffect transition="in" filter="fade">
-                                                  <p:cBhvr>
-                                                    <p:cTn id="91" dur="600"/>
-                                                    <p:tgtEl>
-                                                      <p:spTgt spid="18"/>
-                                                    </p:tgtEl>
-                                                  </p:cBhvr>
-                                                </p:animEffect>
-                                              </p:childTnLst>
-                                            </p:cTn>
-                                          </p:par>
-                                        </p:childTnLst>
-                                      </p:cTn>
-                                    </p:par>
-                                  </p:childTnLst>
-                                </p:cTn>
-                              </p:par>
-                            </p:childTnLst>
-                          </p:cTn>
-                        </p:par>
-                      </p:childTnLst>
-                    </p:cTn>
-                  </p:par>
-                  <p:par>
-                    <p:cTn id="92" fill="hold">
-                      <p:stCondLst>
-                        <p:cond delay="indefinite" evt="onClick"/>
-                      </p:stCondLst>
-                      <p:childTnLst>
-                        <p:par>
-                          <p:cTn id="93" fill="hold">
-                            <p:childTnLst>
-                              <p:par>
-                                <p:cTn id="94" presetID="10" presetClass="entr" presetSubtype="0" fill="hold" grpId="0" nodeType="withEffect">
-                                  <p:stCondLst>
-                                    <p:cond delay="0"/>
-                                  </p:stCondLst>
-                                  <p:childTnLst>
-                                    <p:par>
-                                      <p:cTn id="95" fill="hold">
-                                        <p:stCondLst>
-                                          <p:cond delay="0"/>
-                                        </p:stCondLst>
-                                        <p:childTnLst>
-                                          <p:par>
-                                            <p:cTn id="96" presetID="1" presetClass="entr" presetSubtype="0" fill="hold" grpId="0" nodeType="withEffect">
-                                              <p:childTnLst>
-                                                <p:set>
-                                                  <p:cBhvr>
-                                                    <p:cTn id="97" dur="1" fill="hold">
-                                                      <p:stCondLst>
-                                                        <p:cond delay="0"/>
-                                                      </p:stCondLst>
-                                                      <p:childTnLst/>
-                                                    </p:cTn>
-                                                    <p:tgtEl>
-                                                      <p:spTgt spid="19"/>
-                                                    </p:tgtEl>
-                                                    <p:attrNameLst>
-                                                      <p:attrName>style.visibility</p:attrName>
-                                                    </p:attrNameLst>
-                                                  </p:cBhvr>
-                                                  <p:to>
-                                                    <p:strVal val="visible"/>
-                                                  </p:to>
-                                                </p:set>
-                                              </p:childTnLst>
-                                            </p:cTn>
-                                          </p:par>
-                                          <p:par>
-                                            <p:cTn id="98" presetID="10" presetClass="entr" presetSubtype="0" fill="hold" grpId="0" nodeType="withEffect">
-                                              <p:childTnLst>
-                                                <p:animEffect transition="in" filter="fade">
-                                                  <p:cBhvr>
-                                                    <p:cTn id="99" dur="600"/>
-                                                    <p:tgtEl>
-                                                      <p:spTgt spid="19"/>
-                                                    </p:tgtEl>
-                                                  </p:cBhvr>
-                                                </p:animEffect>
-                                              </p:childTnLst>
-                                            </p:cTn>
-                                          </p:par>
-                                        </p:childTnLst>
-                                      </p:cTn>
-                                    </p:par>
-                                  </p:childTnLst>
-                                </p:cTn>
-                              </p:par>
-                              <p:par>
-                                <p:cTn id="100" presetID="10" presetClass="entr" presetSubtype="0" fill="hold" grpId="0" nodeType="withEffect">
-                                  <p:stCondLst>
-                                    <p:cond delay="0"/>
-                                  </p:stCondLst>
-                                  <p:childTnLst>
-                                    <p:par>
-                                      <p:cTn id="101" fill="hold">
-                                        <p:stCondLst>
-                                          <p:cond delay="0"/>
-                                        </p:stCondLst>
-                                        <p:childTnLst>
-                                          <p:par>
-                                            <p:cTn id="102" presetID="1" presetClass="entr" presetSubtype="0" fill="hold" grpId="0" nodeType="withEffect">
-                                              <p:childTnLst>
-                                                <p:set>
-                                                  <p:cBhvr>
-                                                    <p:cTn id="103" dur="1" fill="hold">
-                                                      <p:stCondLst>
-                                                        <p:cond delay="0"/>
-                                                      </p:stCondLst>
-                                                      <p:childTnLst/>
-                                                    </p:cTn>
-                                                    <p:tgtEl>
-                                                      <p:spTgt spid="20"/>
-                                                    </p:tgtEl>
-                                                    <p:attrNameLst>
-                                                      <p:attrName>style.visibility</p:attrName>
-                                                    </p:attrNameLst>
-                                                  </p:cBhvr>
-                                                  <p:to>
-                                                    <p:strVal val="visible"/>
-                                                  </p:to>
-                                                </p:set>
-                                              </p:childTnLst>
-                                            </p:cTn>
-                                          </p:par>
-                                          <p:par>
-                                            <p:cTn id="104" presetID="10" presetClass="entr" presetSubtype="0" fill="hold" grpId="0" nodeType="withEffect">
-                                              <p:childTnLst>
-                                                <p:animEffect transition="in" filter="fade">
-                                                  <p:cBhvr>
-                                                    <p:cTn id="105" dur="600"/>
-                                                    <p:tgtEl>
-                                                      <p:spTgt spid="20"/>
-                                                    </p:tgtEl>
-                                                  </p:cBhvr>
-                                                </p:animEffect>
-                                              </p:childTnLst>
-                                            </p:cTn>
-                                          </p:par>
-                                        </p:childTnLst>
-                                      </p:cTn>
-                                    </p:par>
-                                  </p:childTnLst>
-                                </p:cTn>
-                              </p:par>
-                              <p:par>
-                                <p:cTn id="106" presetID="10" presetClass="entr" presetSubtype="0" fill="hold" grpId="0" nodeType="withEffect">
-                                  <p:stCondLst>
-                                    <p:cond delay="0"/>
-                                  </p:stCondLst>
-                                  <p:childTnLst>
-                                    <p:par>
-                                      <p:cTn id="107" fill="hold">
-                                        <p:stCondLst>
-                                          <p:cond delay="0"/>
-                                        </p:stCondLst>
-                                        <p:childTnLst>
-                                          <p:par>
-                                            <p:cTn id="108" presetID="1" presetClass="entr" presetSubtype="0" fill="hold" grpId="0" nodeType="withEffect">
-                                              <p:childTnLst>
-                                                <p:set>
-                                                  <p:cBhvr>
-                                                    <p:cTn id="109" dur="1" fill="hold">
-                                                      <p:stCondLst>
-                                                        <p:cond delay="0"/>
-                                                      </p:stCondLst>
-                                                      <p:childTnLst/>
-                                                    </p:cTn>
-                                                    <p:tgtEl>
-                                                      <p:spTgt spid="21"/>
-                                                    </p:tgtEl>
-                                                    <p:attrNameLst>
-                                                      <p:attrName>style.visibility</p:attrName>
-                                                    </p:attrNameLst>
-                                                  </p:cBhvr>
-                                                  <p:to>
-                                                    <p:strVal val="visible"/>
-                                                  </p:to>
-                                                </p:set>
-                                              </p:childTnLst>
-                                            </p:cTn>
-                                          </p:par>
-                                          <p:par>
-                                            <p:cTn id="110" presetID="10" presetClass="entr" presetSubtype="0" fill="hold" grpId="0" nodeType="withEffect">
-                                              <p:childTnLst>
-                                                <p:animEffect transition="in" filter="fade">
-                                                  <p:cBhvr>
-                                                    <p:cTn id="111" dur="600"/>
-                                                    <p:tgtEl>
-                                                      <p:spTgt spid="21"/>
-                                                    </p:tgtEl>
-                                                  </p:cBhvr>
-                                                </p:animEffect>
-                                              </p:childTnLst>
-                                            </p:cTn>
-                                          </p:par>
-                                        </p:childTnLst>
-                                      </p:cTn>
-                                    </p:par>
-                                  </p:childTnLst>
-                                </p:cTn>
-                              </p:par>
-                            </p:childTnLst>
-                          </p:cTn>
-                        </p:par>
-                      </p:childTnLst>
-                    </p:cTn>
-                  </p:par>
-                  <p:par>
-                    <p:cTn id="112" fill="hold">
-                      <p:stCondLst>
-                        <p:cond delay="indefinite" evt="onClick"/>
-                      </p:stCondLst>
-                      <p:childTnLst>
-                        <p:par>
-                          <p:cTn id="113" fill="hold">
-                            <p:childTnLst>
-                              <p:par>
-                                <p:cTn id="114" presetID="10" presetClass="entr" presetSubtype="0" fill="hold" grpId="0" nodeType="withEffect">
-                                  <p:stCondLst>
-                                    <p:cond delay="0"/>
-                                  </p:stCondLst>
-                                  <p:childTnLst>
-                                    <p:par>
-                                      <p:cTn id="115" fill="hold">
-                                        <p:stCondLst>
-                                          <p:cond delay="0"/>
-                                        </p:stCondLst>
-                                        <p:childTnLst>
-                                          <p:par>
-                                            <p:cTn id="116" presetID="1" presetClass="entr" presetSubtype="0" fill="hold" grpId="0" nodeType="withEffect">
-                                              <p:childTnLst>
-                                                <p:set>
-                                                  <p:cBhvr>
-                                                    <p:cTn id="117" dur="1" fill="hold">
-                                                      <p:stCondLst>
-                                                        <p:cond delay="0"/>
-                                                      </p:stCondLst>
-                                                      <p:childTnLst/>
-                                                    </p:cTn>
-                                                    <p:tgtEl>
-                                                      <p:spTgt spid="22"/>
-                                                    </p:tgtEl>
-                                                    <p:attrNameLst>
-                                                      <p:attrName>style.visibility</p:attrName>
-                                                    </p:attrNameLst>
-                                                  </p:cBhvr>
-                                                  <p:to>
-                                                    <p:strVal val="visible"/>
-                                                  </p:to>
-                                                </p:set>
-                                              </p:childTnLst>
-                                            </p:cTn>
-                                          </p:par>
-                                          <p:par>
-                                            <p:cTn id="118" presetID="10" presetClass="entr" presetSubtype="0" fill="hold" grpId="0" nodeType="withEffect">
-                                              <p:childTnLst>
-                                                <p:animEffect transition="in" filter="fade">
-                                                  <p:cBhvr>
-                                                    <p:cTn id="119" dur="600"/>
-                                                    <p:tgtEl>
-                                                      <p:spTgt spid="22"/>
-                                                    </p:tgtEl>
-                                                  </p:cBhvr>
-                                                </p:animEffect>
-                                              </p:childTnLst>
-                                            </p:cTn>
-                                          </p:par>
-                                        </p:childTnLst>
-                                      </p:cTn>
-                                    </p:par>
-                                  </p:childTnLst>
-                                </p:cTn>
-                              </p:par>
-                              <p:par>
-                                <p:cTn id="120" presetID="10" presetClass="entr" presetSubtype="0" fill="hold" grpId="0" nodeType="withEffect">
-                                  <p:stCondLst>
-                                    <p:cond delay="0"/>
-                                  </p:stCondLst>
-                                  <p:childTnLst>
-                                    <p:par>
-                                      <p:cTn id="121" fill="hold">
-                                        <p:stCondLst>
-                                          <p:cond delay="0"/>
-                                        </p:stCondLst>
-                                        <p:childTnLst>
-                                          <p:par>
-                                            <p:cTn id="122" presetID="1" presetClass="entr" presetSubtype="0" fill="hold" grpId="0" nodeType="withEffect">
-                                              <p:childTnLst>
-                                                <p:set>
-                                                  <p:cBhvr>
-                                                    <p:cTn id="123" dur="1" fill="hold">
-                                                      <p:stCondLst>
-                                                        <p:cond delay="0"/>
-                                                      </p:stCondLst>
-                                                      <p:childTnLst/>
-                                                    </p:cTn>
-                                                    <p:tgtEl>
-                                                      <p:spTgt spid="23"/>
-                                                    </p:tgtEl>
-                                                    <p:attrNameLst>
-                                                      <p:attrName>style.visibility</p:attrName>
-                                                    </p:attrNameLst>
-                                                  </p:cBhvr>
-                                                  <p:to>
-                                                    <p:strVal val="visible"/>
-                                                  </p:to>
-                                                </p:set>
-                                              </p:childTnLst>
-                                            </p:cTn>
-                                          </p:par>
-                                          <p:par>
-                                            <p:cTn id="124" presetID="10" presetClass="entr" presetSubtype="0" fill="hold" grpId="0" nodeType="withEffect">
-                                              <p:childTnLst>
-                                                <p:animEffect transition="in" filter="fade">
-                                                  <p:cBhvr>
-                                                    <p:cTn id="125" dur="600"/>
-                                                    <p:tgtEl>
-                                                      <p:spTgt spid="23"/>
-                                                    </p:tgtEl>
-                                                  </p:cBhvr>
-                                                </p:animEffect>
-                                              </p:childTnLst>
-                                            </p:cTn>
-                                          </p:par>
-                                        </p:childTnLst>
-                                      </p:cTn>
-                                    </p:par>
-                                  </p:childTnLst>
-                                </p:cTn>
-                              </p:par>
-                              <p:par>
-                                <p:cTn id="126" presetID="10" presetClass="entr" presetSubtype="0" fill="hold" grpId="0" nodeType="withEffect">
-                                  <p:stCondLst>
-                                    <p:cond delay="0"/>
-                                  </p:stCondLst>
-                                  <p:childTnLst>
-                                    <p:par>
-                                      <p:cTn id="127" fill="hold">
-                                        <p:stCondLst>
-                                          <p:cond delay="0"/>
-                                        </p:stCondLst>
-                                        <p:childTnLst>
-                                          <p:par>
-                                            <p:cTn id="128" presetID="1" presetClass="entr" presetSubtype="0" fill="hold" grpId="0" nodeType="withEffect">
-                                              <p:childTnLst>
-                                                <p:set>
-                                                  <p:cBhvr>
-                                                    <p:cTn id="129" dur="1" fill="hold">
-                                                      <p:stCondLst>
-                                                        <p:cond delay="0"/>
-                                                      </p:stCondLst>
-                                                      <p:childTnLst/>
-                                                    </p:cTn>
-                                                    <p:tgtEl>
-                                                      <p:spTgt spid="24"/>
-                                                    </p:tgtEl>
-                                                    <p:attrNameLst>
-                                                      <p:attrName>style.visibility</p:attrName>
-                                                    </p:attrNameLst>
-                                                  </p:cBhvr>
-                                                  <p:to>
-                                                    <p:strVal val="visible"/>
-                                                  </p:to>
-                                                </p:set>
-                                              </p:childTnLst>
-                                            </p:cTn>
-                                          </p:par>
-                                          <p:par>
-                                            <p:cTn id="130" presetID="10" presetClass="entr" presetSubtype="0" fill="hold" grpId="0" nodeType="withEffect">
-                                              <p:childTnLst>
-                                                <p:animEffect transition="in" filter="fade">
-                                                  <p:cBhvr>
-                                                    <p:cTn id="131" dur="600"/>
-                                                    <p:tgtEl>
-                                                      <p:spTgt spid="24"/>
-                                                    </p:tgtEl>
-                                                  </p:cBhvr>
-                                                </p:animEffect>
-                                              </p:childTnLst>
-                                            </p:cTn>
-                                          </p:par>
-                                        </p:childTnLst>
-                                      </p:cTn>
-                                    </p:par>
-                                  </p:childTnLst>
-                                </p:cTn>
-                              </p:par>
-                            </p:childTnLst>
-                          </p:cTn>
-                        </p:par>
-                      </p:childTnLst>
-                    </p:cTn>
-                  </p:par>
-                </p:childTnLst>
-              </p:cTn>
-              <p:prevCondLst>
-                <p:cond evt="onClick" delay="0">
-                  <p:tgtEl>
-                    <p:sldTgt/>
-                  </p:tgtEl>
-                </p:cond>
-              </p:prevCondLst>
-              <p:nextCondLst>
-                <p:cond evt="onClick" delay="0">
-                  <p:tgtEl>
-                    <p:sldTgt/>
-                  </p:tgtEl>
-                </p:cond>
-              </p:nextCondLst>
-            </p:seq>
-          </p:childTnLst>
-        </p:cTn>
-      </p:par>
-    </p:tnLst>
-    <p:bldLst>
-      <p:bldP spid="6" grpId="0"/>
-      <p:bldP spid="7" grpId="0"/>
-      <p:bldP spid="8" grpId="0"/>
-      <p:bldP spid="9" grpId="0"/>
-      <p:bldP spid="10" grpId="0"/>
-      <p:bldP spid="11" grpId="0"/>
-      <p:bldP spid="12" grpId="0"/>
-      <p:bldP spid="13" grpId="0"/>
-      <p:bldP spid="14" grpId="0"/>
-      <p:bldP spid="15" grpId="0"/>
-      <p:bldP spid="16" grpId="0"/>
-      <p:bldP spid="17" grpId="0"/>
-      <p:bldP spid="18" grpId="0"/>
-      <p:bldP spid="19" grpId="0"/>
-      <p:bldP spid="20" grpId="0"/>
-      <p:bldP spid="21" grpId="0"/>
-      <p:bldP spid="22" grpId="0"/>
-      <p:bldP spid="23" grpId="0"/>
-      <p:bldP spid="24" grpId="0"/>
-    </p:bldLst>
-  </p:timing>
 </p:sld>
 </file>
 
@@ -6392,9 +4814,57 @@
           </a:p>
         </p:txBody>
       </p:sp>
+      <p:sp>
+        <p:nvSpPr>
+          <p:cNvPr id="7" name="Rounded Rectangle 6"/>
+          <p:cNvSpPr/>
+          <p:nvPr/>
+        </p:nvSpPr>
+        <p:spPr>
+          <a:xfrm>
+            <a:off x="1347825" y="1947672"/>
+            <a:ext cx="1839772" cy="1609344"/>
+          </a:xfrm>
+          <a:prstGeom prst="roundRect">
+            <a:avLst>
+              <a:gd name="adj" fmla="val 6000"/>
+            </a:avLst>
+          </a:prstGeom>
+          <a:solidFill>
+            <a:srgbClr val="FFFFFF"/>
+          </a:solidFill>
+          <a:ln w="12700">
+            <a:solidFill>
+              <a:srgbClr val="DDCFB8"/>
+            </a:solidFill>
+          </a:ln>
+          <a:effectLst/>
+        </p:spPr>
+        <p:style>
+          <a:lnRef idx="1">
+            <a:schemeClr val="accent1"/>
+          </a:lnRef>
+          <a:fillRef idx="3">
+            <a:schemeClr val="accent1"/>
+          </a:fillRef>
+          <a:effectRef idx="2">
+            <a:schemeClr val="accent1"/>
+          </a:effectRef>
+          <a:fontRef idx="minor">
+            <a:schemeClr val="lt1"/>
+          </a:fontRef>
+        </p:style>
+        <p:txBody>
+          <a:bodyPr rtlCol="0" anchor="ctr"/>
+          <a:lstStyle/>
+          <a:p>
+            <a:pPr algn="ctr"/>
+          </a:p>
+        </p:txBody>
+      </p:sp>
       <p:pic>
         <p:nvPicPr>
-          <p:cNvPr id="7" name="Picture 6" descr="sketch-1-base-cube.jpg"/>
+          <p:cNvPr id="8" name="Picture 7" descr="sketch-1-base-cube.jpg"/>
           <p:cNvPicPr>
             <a:picLocks noChangeAspect="1"/>
           </p:cNvPicPr>
@@ -6411,11 +4881,6 @@
             <a:off x="1411833" y="2011680"/>
             <a:ext cx="1711756" cy="1481328"/>
           </a:xfrm>
-          <a:prstGeom prst="roundRect">
-            <a:avLst>
-              <a:gd name="adj" fmla="val 6500"/>
-            </a:avLst>
-          </a:prstGeom>
           <a:prstGeom prst="rect">
             <a:avLst/>
           </a:prstGeom>
@@ -6423,7 +4888,7 @@
       </p:pic>
       <p:sp>
         <p:nvSpPr>
-          <p:cNvPr id="8" name="TextBox 7"/>
+          <p:cNvPr id="9" name="TextBox 8"/>
           <p:cNvSpPr txBox="1"/>
           <p:nvPr/>
         </p:nvSpPr>
@@ -6462,7 +4927,7 @@
       </p:sp>
       <p:sp>
         <p:nvSpPr>
-          <p:cNvPr id="9" name="TextBox 8"/>
+          <p:cNvPr id="10" name="TextBox 9"/>
           <p:cNvSpPr txBox="1"/>
           <p:nvPr/>
         </p:nvSpPr>
@@ -6499,9 +4964,57 @@
           </a:p>
         </p:txBody>
       </p:sp>
+      <p:sp>
+        <p:nvSpPr>
+          <p:cNvPr id="11" name="Rounded Rectangle 10"/>
+          <p:cNvSpPr/>
+          <p:nvPr/>
+        </p:nvSpPr>
+        <p:spPr>
+          <a:xfrm>
+            <a:off x="5260377" y="1947672"/>
+            <a:ext cx="1659052" cy="1609344"/>
+          </a:xfrm>
+          <a:prstGeom prst="roundRect">
+            <a:avLst>
+              <a:gd name="adj" fmla="val 6000"/>
+            </a:avLst>
+          </a:prstGeom>
+          <a:solidFill>
+            <a:srgbClr val="FFFFFF"/>
+          </a:solidFill>
+          <a:ln w="12700">
+            <a:solidFill>
+              <a:srgbClr val="DDCFB8"/>
+            </a:solidFill>
+          </a:ln>
+          <a:effectLst/>
+        </p:spPr>
+        <p:style>
+          <a:lnRef idx="1">
+            <a:schemeClr val="accent1"/>
+          </a:lnRef>
+          <a:fillRef idx="3">
+            <a:schemeClr val="accent1"/>
+          </a:fillRef>
+          <a:effectRef idx="2">
+            <a:schemeClr val="accent1"/>
+          </a:effectRef>
+          <a:fontRef idx="minor">
+            <a:schemeClr val="lt1"/>
+          </a:fontRef>
+        </p:style>
+        <p:txBody>
+          <a:bodyPr rtlCol="0" anchor="ctr"/>
+          <a:lstStyle/>
+          <a:p>
+            <a:pPr algn="ctr"/>
+          </a:p>
+        </p:txBody>
+      </p:sp>
       <p:pic>
         <p:nvPicPr>
-          <p:cNvPr id="10" name="Picture 9" descr="sketch-2-subtraction-entrance.jpg"/>
+          <p:cNvPr id="12" name="Picture 11" descr="sketch-2-subtraction-entrance.jpg"/>
           <p:cNvPicPr>
             <a:picLocks noChangeAspect="1"/>
           </p:cNvPicPr>
@@ -6518,11 +5031,6 @@
             <a:off x="5324385" y="2011680"/>
             <a:ext cx="1531036" cy="1481328"/>
           </a:xfrm>
-          <a:prstGeom prst="roundRect">
-            <a:avLst>
-              <a:gd name="adj" fmla="val 6500"/>
-            </a:avLst>
-          </a:prstGeom>
           <a:prstGeom prst="rect">
             <a:avLst/>
           </a:prstGeom>
@@ -6530,7 +5038,7 @@
       </p:pic>
       <p:sp>
         <p:nvSpPr>
-          <p:cNvPr id="11" name="TextBox 10"/>
+          <p:cNvPr id="13" name="TextBox 12"/>
           <p:cNvSpPr txBox="1"/>
           <p:nvPr/>
         </p:nvSpPr>
@@ -6569,7 +5077,7 @@
       </p:sp>
       <p:sp>
         <p:nvSpPr>
-          <p:cNvPr id="12" name="TextBox 11"/>
+          <p:cNvPr id="14" name="TextBox 13"/>
           <p:cNvSpPr txBox="1"/>
           <p:nvPr/>
         </p:nvSpPr>
@@ -6606,9 +5114,57 @@
           </a:p>
         </p:txBody>
       </p:sp>
+      <p:sp>
+        <p:nvSpPr>
+          <p:cNvPr id="15" name="Rounded Rectangle 14"/>
+          <p:cNvSpPr/>
+          <p:nvPr/>
+        </p:nvSpPr>
+        <p:spPr>
+          <a:xfrm>
+            <a:off x="9101199" y="1947672"/>
+            <a:ext cx="1621792" cy="1609344"/>
+          </a:xfrm>
+          <a:prstGeom prst="roundRect">
+            <a:avLst>
+              <a:gd name="adj" fmla="val 6000"/>
+            </a:avLst>
+          </a:prstGeom>
+          <a:solidFill>
+            <a:srgbClr val="FFFFFF"/>
+          </a:solidFill>
+          <a:ln w="12700">
+            <a:solidFill>
+              <a:srgbClr val="DDCFB8"/>
+            </a:solidFill>
+          </a:ln>
+          <a:effectLst/>
+        </p:spPr>
+        <p:style>
+          <a:lnRef idx="1">
+            <a:schemeClr val="accent1"/>
+          </a:lnRef>
+          <a:fillRef idx="3">
+            <a:schemeClr val="accent1"/>
+          </a:fillRef>
+          <a:effectRef idx="2">
+            <a:schemeClr val="accent1"/>
+          </a:effectRef>
+          <a:fontRef idx="minor">
+            <a:schemeClr val="lt1"/>
+          </a:fontRef>
+        </p:style>
+        <p:txBody>
+          <a:bodyPr rtlCol="0" anchor="ctr"/>
+          <a:lstStyle/>
+          <a:p>
+            <a:pPr algn="ctr"/>
+          </a:p>
+        </p:txBody>
+      </p:sp>
       <p:pic>
         <p:nvPicPr>
-          <p:cNvPr id="13" name="Picture 12" descr="sketch-3-subtraction-window.jpg"/>
+          <p:cNvPr id="16" name="Picture 15" descr="sketch-3-subtraction-window.jpg"/>
           <p:cNvPicPr>
             <a:picLocks noChangeAspect="1"/>
           </p:cNvPicPr>
@@ -6625,11 +5181,6 @@
             <a:off x="9165207" y="2011680"/>
             <a:ext cx="1493776" cy="1481328"/>
           </a:xfrm>
-          <a:prstGeom prst="roundRect">
-            <a:avLst>
-              <a:gd name="adj" fmla="val 6500"/>
-            </a:avLst>
-          </a:prstGeom>
           <a:prstGeom prst="rect">
             <a:avLst/>
           </a:prstGeom>
@@ -6637,7 +5188,7 @@
       </p:pic>
       <p:sp>
         <p:nvSpPr>
-          <p:cNvPr id="14" name="TextBox 13"/>
+          <p:cNvPr id="17" name="TextBox 16"/>
           <p:cNvSpPr txBox="1"/>
           <p:nvPr/>
         </p:nvSpPr>
@@ -6676,7 +5227,7 @@
       </p:sp>
       <p:sp>
         <p:nvSpPr>
-          <p:cNvPr id="15" name="TextBox 14"/>
+          <p:cNvPr id="18" name="TextBox 17"/>
           <p:cNvSpPr txBox="1"/>
           <p:nvPr/>
         </p:nvSpPr>
@@ -6713,9 +5264,57 @@
           </a:p>
         </p:txBody>
       </p:sp>
+      <p:sp>
+        <p:nvSpPr>
+          <p:cNvPr id="19" name="Rounded Rectangle 18"/>
+          <p:cNvSpPr/>
+          <p:nvPr/>
+        </p:nvSpPr>
+        <p:spPr>
+          <a:xfrm>
+            <a:off x="609219" y="4251959"/>
+            <a:ext cx="3316986" cy="1609344"/>
+          </a:xfrm>
+          <a:prstGeom prst="roundRect">
+            <a:avLst>
+              <a:gd name="adj" fmla="val 6000"/>
+            </a:avLst>
+          </a:prstGeom>
+          <a:solidFill>
+            <a:srgbClr val="FFFFFF"/>
+          </a:solidFill>
+          <a:ln w="12700">
+            <a:solidFill>
+              <a:srgbClr val="DDCFB8"/>
+            </a:solidFill>
+          </a:ln>
+          <a:effectLst/>
+        </p:spPr>
+        <p:style>
+          <a:lnRef idx="1">
+            <a:schemeClr val="accent1"/>
+          </a:lnRef>
+          <a:fillRef idx="3">
+            <a:schemeClr val="accent1"/>
+          </a:fillRef>
+          <a:effectRef idx="2">
+            <a:schemeClr val="accent1"/>
+          </a:effectRef>
+          <a:fontRef idx="minor">
+            <a:schemeClr val="lt1"/>
+          </a:fontRef>
+        </p:style>
+        <p:txBody>
+          <a:bodyPr rtlCol="0" anchor="ctr"/>
+          <a:lstStyle/>
+          <a:p>
+            <a:pPr algn="ctr"/>
+          </a:p>
+        </p:txBody>
+      </p:sp>
       <p:pic>
         <p:nvPicPr>
-          <p:cNvPr id="16" name="Picture 15" descr="sketch-4-combined-form.jpg"/>
+          <p:cNvPr id="20" name="Picture 19" descr="sketch-4-combined-form.jpg"/>
           <p:cNvPicPr>
             <a:picLocks noChangeAspect="1"/>
           </p:cNvPicPr>
@@ -6732,11 +5331,6 @@
             <a:off x="673227" y="4315968"/>
             <a:ext cx="3188970" cy="1481328"/>
           </a:xfrm>
-          <a:prstGeom prst="roundRect">
-            <a:avLst>
-              <a:gd name="adj" fmla="val 6500"/>
-            </a:avLst>
-          </a:prstGeom>
           <a:prstGeom prst="rect">
             <a:avLst/>
           </a:prstGeom>
@@ -6744,7 +5338,7 @@
       </p:pic>
       <p:sp>
         <p:nvSpPr>
-          <p:cNvPr id="17" name="TextBox 16"/>
+          <p:cNvPr id="21" name="TextBox 20"/>
           <p:cNvSpPr txBox="1"/>
           <p:nvPr/>
         </p:nvSpPr>
@@ -6783,7 +5377,7 @@
       </p:sp>
       <p:sp>
         <p:nvSpPr>
-          <p:cNvPr id="18" name="TextBox 17"/>
+          <p:cNvPr id="22" name="TextBox 21"/>
           <p:cNvSpPr txBox="1"/>
           <p:nvPr/>
         </p:nvSpPr>
@@ -6820,9 +5414,57 @@
           </a:p>
         </p:txBody>
       </p:sp>
+      <p:sp>
+        <p:nvSpPr>
+          <p:cNvPr id="23" name="Rounded Rectangle 22"/>
+          <p:cNvSpPr/>
+          <p:nvPr/>
+        </p:nvSpPr>
+        <p:spPr>
+          <a:xfrm>
+            <a:off x="5410219" y="4251959"/>
+            <a:ext cx="1359369" cy="1609344"/>
+          </a:xfrm>
+          <a:prstGeom prst="roundRect">
+            <a:avLst>
+              <a:gd name="adj" fmla="val 6000"/>
+            </a:avLst>
+          </a:prstGeom>
+          <a:solidFill>
+            <a:srgbClr val="FFFFFF"/>
+          </a:solidFill>
+          <a:ln w="12700">
+            <a:solidFill>
+              <a:srgbClr val="DDCFB8"/>
+            </a:solidFill>
+          </a:ln>
+          <a:effectLst/>
+        </p:spPr>
+        <p:style>
+          <a:lnRef idx="1">
+            <a:schemeClr val="accent1"/>
+          </a:lnRef>
+          <a:fillRef idx="3">
+            <a:schemeClr val="accent1"/>
+          </a:fillRef>
+          <a:effectRef idx="2">
+            <a:schemeClr val="accent1"/>
+          </a:effectRef>
+          <a:fontRef idx="minor">
+            <a:schemeClr val="lt1"/>
+          </a:fontRef>
+        </p:style>
+        <p:txBody>
+          <a:bodyPr rtlCol="0" anchor="ctr"/>
+          <a:lstStyle/>
+          <a:p>
+            <a:pPr algn="ctr"/>
+          </a:p>
+        </p:txBody>
+      </p:sp>
       <p:pic>
         <p:nvPicPr>
-          <p:cNvPr id="19" name="Picture 18" descr="sketch-5-addition-small-cube-on-top.jpg"/>
+          <p:cNvPr id="24" name="Picture 23" descr="sketch-5-addition-small-cube-on-top.jpg"/>
           <p:cNvPicPr>
             <a:picLocks noChangeAspect="1"/>
           </p:cNvPicPr>
@@ -6839,11 +5481,6 @@
             <a:off x="5474227" y="4315968"/>
             <a:ext cx="1231353" cy="1481328"/>
           </a:xfrm>
-          <a:prstGeom prst="roundRect">
-            <a:avLst>
-              <a:gd name="adj" fmla="val 6500"/>
-            </a:avLst>
-          </a:prstGeom>
           <a:prstGeom prst="rect">
             <a:avLst/>
           </a:prstGeom>
@@ -6851,7 +5488,7 @@
       </p:pic>
       <p:sp>
         <p:nvSpPr>
-          <p:cNvPr id="20" name="TextBox 19"/>
+          <p:cNvPr id="25" name="TextBox 24"/>
           <p:cNvSpPr txBox="1"/>
           <p:nvPr/>
         </p:nvSpPr>
@@ -6890,7 +5527,7 @@
       </p:sp>
       <p:sp>
         <p:nvSpPr>
-          <p:cNvPr id="21" name="TextBox 20"/>
+          <p:cNvPr id="26" name="TextBox 25"/>
           <p:cNvSpPr txBox="1"/>
           <p:nvPr/>
         </p:nvSpPr>
@@ -6927,9 +5564,57 @@
           </a:p>
         </p:txBody>
       </p:sp>
+      <p:sp>
+        <p:nvSpPr>
+          <p:cNvPr id="27" name="Rounded Rectangle 26"/>
+          <p:cNvSpPr/>
+          <p:nvPr/>
+        </p:nvSpPr>
+        <p:spPr>
+          <a:xfrm>
+            <a:off x="8728611" y="4251959"/>
+            <a:ext cx="2366969" cy="1609344"/>
+          </a:xfrm>
+          <a:prstGeom prst="roundRect">
+            <a:avLst>
+              <a:gd name="adj" fmla="val 6000"/>
+            </a:avLst>
+          </a:prstGeom>
+          <a:solidFill>
+            <a:srgbClr val="FFFFFF"/>
+          </a:solidFill>
+          <a:ln w="12700">
+            <a:solidFill>
+              <a:srgbClr val="DDCFB8"/>
+            </a:solidFill>
+          </a:ln>
+          <a:effectLst/>
+        </p:spPr>
+        <p:style>
+          <a:lnRef idx="1">
+            <a:schemeClr val="accent1"/>
+          </a:lnRef>
+          <a:fillRef idx="3">
+            <a:schemeClr val="accent1"/>
+          </a:fillRef>
+          <a:effectRef idx="2">
+            <a:schemeClr val="accent1"/>
+          </a:effectRef>
+          <a:fontRef idx="minor">
+            <a:schemeClr val="lt1"/>
+          </a:fontRef>
+        </p:style>
+        <p:txBody>
+          <a:bodyPr rtlCol="0" anchor="ctr"/>
+          <a:lstStyle/>
+          <a:p>
+            <a:pPr algn="ctr"/>
+          </a:p>
+        </p:txBody>
+      </p:sp>
       <p:pic>
         <p:nvPicPr>
-          <p:cNvPr id="22" name="Picture 21" descr="sketch-6-addition-side-cube.jpg"/>
+          <p:cNvPr id="28" name="Picture 27" descr="sketch-6-addition-side-cube.jpg"/>
           <p:cNvPicPr>
             <a:picLocks noChangeAspect="1"/>
           </p:cNvPicPr>
@@ -6946,11 +5631,6 @@
             <a:off x="8792619" y="4315968"/>
             <a:ext cx="2238953" cy="1481328"/>
           </a:xfrm>
-          <a:prstGeom prst="roundRect">
-            <a:avLst>
-              <a:gd name="adj" fmla="val 6500"/>
-            </a:avLst>
-          </a:prstGeom>
           <a:prstGeom prst="rect">
             <a:avLst/>
           </a:prstGeom>
@@ -6958,7 +5638,7 @@
       </p:pic>
       <p:sp>
         <p:nvSpPr>
-          <p:cNvPr id="23" name="TextBox 22"/>
+          <p:cNvPr id="29" name="TextBox 28"/>
           <p:cNvSpPr txBox="1"/>
           <p:nvPr/>
         </p:nvSpPr>
@@ -6997,7 +5677,7 @@
       </p:sp>
       <p:sp>
         <p:nvSpPr>
-          <p:cNvPr id="24" name="TextBox 23"/>
+          <p:cNvPr id="30" name="TextBox 29"/>
           <p:cNvSpPr txBox="1"/>
           <p:nvPr/>
         </p:nvSpPr>
@@ -7039,1172 +5719,6 @@
   <p:clrMapOvr>
     <a:masterClrMapping/>
   </p:clrMapOvr>
-  <p:timing>
-    <p:tnLst>
-      <p:par>
-        <p:cTn id="2" dur="indefinite" restart="never" nodeType="tmRoot">
-          <p:childTnLst>
-            <p:seq concurrent="1" nextAc="seek">
-              <p:cTn id="3" dur="indefinite" nodeType="mainSeq">
-                <p:childTnLst>
-                  <p:par>
-                    <p:cTn id="4" fill="hold">
-                      <p:stCondLst>
-                        <p:cond delay="indefinite" evt="onClick"/>
-                      </p:stCondLst>
-                      <p:childTnLst>
-                        <p:par>
-                          <p:cTn id="5" fill="hold">
-                            <p:childTnLst>
-                              <p:par>
-                                <p:cTn id="6" presetID="10" presetClass="entr" presetSubtype="0" fill="hold" grpId="0" nodeType="withEffect">
-                                  <p:stCondLst>
-                                    <p:cond delay="0"/>
-                                  </p:stCondLst>
-                                  <p:childTnLst>
-                                    <p:par>
-                                      <p:cTn id="7" fill="hold">
-                                        <p:stCondLst>
-                                          <p:cond delay="0"/>
-                                        </p:stCondLst>
-                                        <p:childTnLst>
-                                          <p:par>
-                                            <p:cTn id="8" presetID="1" presetClass="entr" presetSubtype="0" fill="hold" grpId="0" nodeType="withEffect">
-                                              <p:childTnLst>
-                                                <p:set>
-                                                  <p:cBhvr>
-                                                    <p:cTn id="9" dur="1" fill="hold">
-                                                      <p:stCondLst>
-                                                        <p:cond delay="0"/>
-                                                      </p:stCondLst>
-                                                      <p:childTnLst/>
-                                                    </p:cTn>
-                                                    <p:tgtEl>
-                                                      <p:spTgt spid="7"/>
-                                                    </p:tgtEl>
-                                                    <p:attrNameLst>
-                                                      <p:attrName>style.visibility</p:attrName>
-                                                    </p:attrNameLst>
-                                                  </p:cBhvr>
-                                                  <p:to>
-                                                    <p:strVal val="visible"/>
-                                                  </p:to>
-                                                </p:set>
-                                              </p:childTnLst>
-                                            </p:cTn>
-                                          </p:par>
-                                          <p:par>
-                                            <p:cTn id="10" presetID="10" presetClass="entr" presetSubtype="0" fill="hold" grpId="0" nodeType="withEffect">
-                                              <p:childTnLst>
-                                                <p:animEffect transition="in" filter="fade">
-                                                  <p:cBhvr>
-                                                    <p:cTn id="11" dur="600"/>
-                                                    <p:tgtEl>
-                                                      <p:spTgt spid="7"/>
-                                                    </p:tgtEl>
-                                                  </p:cBhvr>
-                                                </p:animEffect>
-                                              </p:childTnLst>
-                                            </p:cTn>
-                                          </p:par>
-                                        </p:childTnLst>
-                                      </p:cTn>
-                                    </p:par>
-                                  </p:childTnLst>
-                                </p:cTn>
-                              </p:par>
-                              <p:par>
-                                <p:cTn id="12" presetID="10" presetClass="entr" presetSubtype="0" fill="hold" grpId="0" nodeType="withEffect">
-                                  <p:stCondLst>
-                                    <p:cond delay="0"/>
-                                  </p:stCondLst>
-                                  <p:childTnLst>
-                                    <p:par>
-                                      <p:cTn id="13" fill="hold">
-                                        <p:stCondLst>
-                                          <p:cond delay="0"/>
-                                        </p:stCondLst>
-                                        <p:childTnLst>
-                                          <p:par>
-                                            <p:cTn id="14" presetID="1" presetClass="entr" presetSubtype="0" fill="hold" grpId="0" nodeType="withEffect">
-                                              <p:childTnLst>
-                                                <p:set>
-                                                  <p:cBhvr>
-                                                    <p:cTn id="15" dur="1" fill="hold">
-                                                      <p:stCondLst>
-                                                        <p:cond delay="0"/>
-                                                      </p:stCondLst>
-                                                      <p:childTnLst/>
-                                                    </p:cTn>
-                                                    <p:tgtEl>
-                                                      <p:spTgt spid="8"/>
-                                                    </p:tgtEl>
-                                                    <p:attrNameLst>
-                                                      <p:attrName>style.visibility</p:attrName>
-                                                    </p:attrNameLst>
-                                                  </p:cBhvr>
-                                                  <p:to>
-                                                    <p:strVal val="visible"/>
-                                                  </p:to>
-                                                </p:set>
-                                              </p:childTnLst>
-                                            </p:cTn>
-                                          </p:par>
-                                          <p:par>
-                                            <p:cTn id="16" presetID="10" presetClass="entr" presetSubtype="0" fill="hold" grpId="0" nodeType="withEffect">
-                                              <p:childTnLst>
-                                                <p:animEffect transition="in" filter="fade">
-                                                  <p:cBhvr>
-                                                    <p:cTn id="17" dur="600"/>
-                                                    <p:tgtEl>
-                                                      <p:spTgt spid="8"/>
-                                                    </p:tgtEl>
-                                                  </p:cBhvr>
-                                                </p:animEffect>
-                                              </p:childTnLst>
-                                            </p:cTn>
-                                          </p:par>
-                                        </p:childTnLst>
-                                      </p:cTn>
-                                    </p:par>
-                                  </p:childTnLst>
-                                </p:cTn>
-                              </p:par>
-                              <p:par>
-                                <p:cTn id="18" presetID="10" presetClass="entr" presetSubtype="0" fill="hold" grpId="0" nodeType="withEffect">
-                                  <p:stCondLst>
-                                    <p:cond delay="0"/>
-                                  </p:stCondLst>
-                                  <p:childTnLst>
-                                    <p:par>
-                                      <p:cTn id="19" fill="hold">
-                                        <p:stCondLst>
-                                          <p:cond delay="0"/>
-                                        </p:stCondLst>
-                                        <p:childTnLst>
-                                          <p:par>
-                                            <p:cTn id="20" presetID="1" presetClass="entr" presetSubtype="0" fill="hold" grpId="0" nodeType="withEffect">
-                                              <p:childTnLst>
-                                                <p:set>
-                                                  <p:cBhvr>
-                                                    <p:cTn id="21" dur="1" fill="hold">
-                                                      <p:stCondLst>
-                                                        <p:cond delay="0"/>
-                                                      </p:stCondLst>
-                                                      <p:childTnLst/>
-                                                    </p:cTn>
-                                                    <p:tgtEl>
-                                                      <p:spTgt spid="9"/>
-                                                    </p:tgtEl>
-                                                    <p:attrNameLst>
-                                                      <p:attrName>style.visibility</p:attrName>
-                                                    </p:attrNameLst>
-                                                  </p:cBhvr>
-                                                  <p:to>
-                                                    <p:strVal val="visible"/>
-                                                  </p:to>
-                                                </p:set>
-                                              </p:childTnLst>
-                                            </p:cTn>
-                                          </p:par>
-                                          <p:par>
-                                            <p:cTn id="22" presetID="10" presetClass="entr" presetSubtype="0" fill="hold" grpId="0" nodeType="withEffect">
-                                              <p:childTnLst>
-                                                <p:animEffect transition="in" filter="fade">
-                                                  <p:cBhvr>
-                                                    <p:cTn id="23" dur="600"/>
-                                                    <p:tgtEl>
-                                                      <p:spTgt spid="9"/>
-                                                    </p:tgtEl>
-                                                  </p:cBhvr>
-                                                </p:animEffect>
-                                              </p:childTnLst>
-                                            </p:cTn>
-                                          </p:par>
-                                        </p:childTnLst>
-                                      </p:cTn>
-                                    </p:par>
-                                  </p:childTnLst>
-                                </p:cTn>
-                              </p:par>
-                            </p:childTnLst>
-                          </p:cTn>
-                        </p:par>
-                      </p:childTnLst>
-                    </p:cTn>
-                  </p:par>
-                  <p:par>
-                    <p:cTn id="24" fill="hold">
-                      <p:stCondLst>
-                        <p:cond delay="indefinite" evt="onClick"/>
-                      </p:stCondLst>
-                      <p:childTnLst>
-                        <p:par>
-                          <p:cTn id="25" fill="hold">
-                            <p:childTnLst>
-                              <p:par>
-                                <p:cTn id="26" presetID="10" presetClass="entr" presetSubtype="0" fill="hold" grpId="0" nodeType="withEffect">
-                                  <p:stCondLst>
-                                    <p:cond delay="0"/>
-                                  </p:stCondLst>
-                                  <p:childTnLst>
-                                    <p:par>
-                                      <p:cTn id="27" fill="hold">
-                                        <p:stCondLst>
-                                          <p:cond delay="0"/>
-                                        </p:stCondLst>
-                                        <p:childTnLst>
-                                          <p:par>
-                                            <p:cTn id="28" presetID="1" presetClass="entr" presetSubtype="0" fill="hold" grpId="0" nodeType="withEffect">
-                                              <p:childTnLst>
-                                                <p:set>
-                                                  <p:cBhvr>
-                                                    <p:cTn id="29" dur="1" fill="hold">
-                                                      <p:stCondLst>
-                                                        <p:cond delay="0"/>
-                                                      </p:stCondLst>
-                                                      <p:childTnLst/>
-                                                    </p:cTn>
-                                                    <p:tgtEl>
-                                                      <p:spTgt spid="10"/>
-                                                    </p:tgtEl>
-                                                    <p:attrNameLst>
-                                                      <p:attrName>style.visibility</p:attrName>
-                                                    </p:attrNameLst>
-                                                  </p:cBhvr>
-                                                  <p:to>
-                                                    <p:strVal val="visible"/>
-                                                  </p:to>
-                                                </p:set>
-                                              </p:childTnLst>
-                                            </p:cTn>
-                                          </p:par>
-                                          <p:par>
-                                            <p:cTn id="30" presetID="10" presetClass="entr" presetSubtype="0" fill="hold" grpId="0" nodeType="withEffect">
-                                              <p:childTnLst>
-                                                <p:animEffect transition="in" filter="fade">
-                                                  <p:cBhvr>
-                                                    <p:cTn id="31" dur="600"/>
-                                                    <p:tgtEl>
-                                                      <p:spTgt spid="10"/>
-                                                    </p:tgtEl>
-                                                  </p:cBhvr>
-                                                </p:animEffect>
-                                              </p:childTnLst>
-                                            </p:cTn>
-                                          </p:par>
-                                        </p:childTnLst>
-                                      </p:cTn>
-                                    </p:par>
-                                  </p:childTnLst>
-                                </p:cTn>
-                              </p:par>
-                              <p:par>
-                                <p:cTn id="32" presetID="10" presetClass="entr" presetSubtype="0" fill="hold" grpId="0" nodeType="withEffect">
-                                  <p:stCondLst>
-                                    <p:cond delay="0"/>
-                                  </p:stCondLst>
-                                  <p:childTnLst>
-                                    <p:par>
-                                      <p:cTn id="33" fill="hold">
-                                        <p:stCondLst>
-                                          <p:cond delay="0"/>
-                                        </p:stCondLst>
-                                        <p:childTnLst>
-                                          <p:par>
-                                            <p:cTn id="34" presetID="1" presetClass="entr" presetSubtype="0" fill="hold" grpId="0" nodeType="withEffect">
-                                              <p:childTnLst>
-                                                <p:set>
-                                                  <p:cBhvr>
-                                                    <p:cTn id="35" dur="1" fill="hold">
-                                                      <p:stCondLst>
-                                                        <p:cond delay="0"/>
-                                                      </p:stCondLst>
-                                                      <p:childTnLst/>
-                                                    </p:cTn>
-                                                    <p:tgtEl>
-                                                      <p:spTgt spid="11"/>
-                                                    </p:tgtEl>
-                                                    <p:attrNameLst>
-                                                      <p:attrName>style.visibility</p:attrName>
-                                                    </p:attrNameLst>
-                                                  </p:cBhvr>
-                                                  <p:to>
-                                                    <p:strVal val="visible"/>
-                                                  </p:to>
-                                                </p:set>
-                                              </p:childTnLst>
-                                            </p:cTn>
-                                          </p:par>
-                                          <p:par>
-                                            <p:cTn id="36" presetID="10" presetClass="entr" presetSubtype="0" fill="hold" grpId="0" nodeType="withEffect">
-                                              <p:childTnLst>
-                                                <p:animEffect transition="in" filter="fade">
-                                                  <p:cBhvr>
-                                                    <p:cTn id="37" dur="600"/>
-                                                    <p:tgtEl>
-                                                      <p:spTgt spid="11"/>
-                                                    </p:tgtEl>
-                                                  </p:cBhvr>
-                                                </p:animEffect>
-                                              </p:childTnLst>
-                                            </p:cTn>
-                                          </p:par>
-                                        </p:childTnLst>
-                                      </p:cTn>
-                                    </p:par>
-                                  </p:childTnLst>
-                                </p:cTn>
-                              </p:par>
-                              <p:par>
-                                <p:cTn id="38" presetID="10" presetClass="entr" presetSubtype="0" fill="hold" grpId="0" nodeType="withEffect">
-                                  <p:stCondLst>
-                                    <p:cond delay="0"/>
-                                  </p:stCondLst>
-                                  <p:childTnLst>
-                                    <p:par>
-                                      <p:cTn id="39" fill="hold">
-                                        <p:stCondLst>
-                                          <p:cond delay="0"/>
-                                        </p:stCondLst>
-                                        <p:childTnLst>
-                                          <p:par>
-                                            <p:cTn id="40" presetID="1" presetClass="entr" presetSubtype="0" fill="hold" grpId="0" nodeType="withEffect">
-                                              <p:childTnLst>
-                                                <p:set>
-                                                  <p:cBhvr>
-                                                    <p:cTn id="41" dur="1" fill="hold">
-                                                      <p:stCondLst>
-                                                        <p:cond delay="0"/>
-                                                      </p:stCondLst>
-                                                      <p:childTnLst/>
-                                                    </p:cTn>
-                                                    <p:tgtEl>
-                                                      <p:spTgt spid="12"/>
-                                                    </p:tgtEl>
-                                                    <p:attrNameLst>
-                                                      <p:attrName>style.visibility</p:attrName>
-                                                    </p:attrNameLst>
-                                                  </p:cBhvr>
-                                                  <p:to>
-                                                    <p:strVal val="visible"/>
-                                                  </p:to>
-                                                </p:set>
-                                              </p:childTnLst>
-                                            </p:cTn>
-                                          </p:par>
-                                          <p:par>
-                                            <p:cTn id="42" presetID="10" presetClass="entr" presetSubtype="0" fill="hold" grpId="0" nodeType="withEffect">
-                                              <p:childTnLst>
-                                                <p:animEffect transition="in" filter="fade">
-                                                  <p:cBhvr>
-                                                    <p:cTn id="43" dur="600"/>
-                                                    <p:tgtEl>
-                                                      <p:spTgt spid="12"/>
-                                                    </p:tgtEl>
-                                                  </p:cBhvr>
-                                                </p:animEffect>
-                                              </p:childTnLst>
-                                            </p:cTn>
-                                          </p:par>
-                                        </p:childTnLst>
-                                      </p:cTn>
-                                    </p:par>
-                                  </p:childTnLst>
-                                </p:cTn>
-                              </p:par>
-                            </p:childTnLst>
-                          </p:cTn>
-                        </p:par>
-                      </p:childTnLst>
-                    </p:cTn>
-                  </p:par>
-                  <p:par>
-                    <p:cTn id="44" fill="hold">
-                      <p:stCondLst>
-                        <p:cond delay="indefinite" evt="onClick"/>
-                      </p:stCondLst>
-                      <p:childTnLst>
-                        <p:par>
-                          <p:cTn id="45" fill="hold">
-                            <p:childTnLst>
-                              <p:par>
-                                <p:cTn id="46" presetID="10" presetClass="entr" presetSubtype="0" fill="hold" grpId="0" nodeType="withEffect">
-                                  <p:stCondLst>
-                                    <p:cond delay="0"/>
-                                  </p:stCondLst>
-                                  <p:childTnLst>
-                                    <p:par>
-                                      <p:cTn id="47" fill="hold">
-                                        <p:stCondLst>
-                                          <p:cond delay="0"/>
-                                        </p:stCondLst>
-                                        <p:childTnLst>
-                                          <p:par>
-                                            <p:cTn id="48" presetID="1" presetClass="entr" presetSubtype="0" fill="hold" grpId="0" nodeType="withEffect">
-                                              <p:childTnLst>
-                                                <p:set>
-                                                  <p:cBhvr>
-                                                    <p:cTn id="49" dur="1" fill="hold">
-                                                      <p:stCondLst>
-                                                        <p:cond delay="0"/>
-                                                      </p:stCondLst>
-                                                      <p:childTnLst/>
-                                                    </p:cTn>
-                                                    <p:tgtEl>
-                                                      <p:spTgt spid="13"/>
-                                                    </p:tgtEl>
-                                                    <p:attrNameLst>
-                                                      <p:attrName>style.visibility</p:attrName>
-                                                    </p:attrNameLst>
-                                                  </p:cBhvr>
-                                                  <p:to>
-                                                    <p:strVal val="visible"/>
-                                                  </p:to>
-                                                </p:set>
-                                              </p:childTnLst>
-                                            </p:cTn>
-                                          </p:par>
-                                          <p:par>
-                                            <p:cTn id="50" presetID="10" presetClass="entr" presetSubtype="0" fill="hold" grpId="0" nodeType="withEffect">
-                                              <p:childTnLst>
-                                                <p:animEffect transition="in" filter="fade">
-                                                  <p:cBhvr>
-                                                    <p:cTn id="51" dur="600"/>
-                                                    <p:tgtEl>
-                                                      <p:spTgt spid="13"/>
-                                                    </p:tgtEl>
-                                                  </p:cBhvr>
-                                                </p:animEffect>
-                                              </p:childTnLst>
-                                            </p:cTn>
-                                          </p:par>
-                                        </p:childTnLst>
-                                      </p:cTn>
-                                    </p:par>
-                                  </p:childTnLst>
-                                </p:cTn>
-                              </p:par>
-                              <p:par>
-                                <p:cTn id="52" presetID="10" presetClass="entr" presetSubtype="0" fill="hold" grpId="0" nodeType="withEffect">
-                                  <p:stCondLst>
-                                    <p:cond delay="0"/>
-                                  </p:stCondLst>
-                                  <p:childTnLst>
-                                    <p:par>
-                                      <p:cTn id="53" fill="hold">
-                                        <p:stCondLst>
-                                          <p:cond delay="0"/>
-                                        </p:stCondLst>
-                                        <p:childTnLst>
-                                          <p:par>
-                                            <p:cTn id="54" presetID="1" presetClass="entr" presetSubtype="0" fill="hold" grpId="0" nodeType="withEffect">
-                                              <p:childTnLst>
-                                                <p:set>
-                                                  <p:cBhvr>
-                                                    <p:cTn id="55" dur="1" fill="hold">
-                                                      <p:stCondLst>
-                                                        <p:cond delay="0"/>
-                                                      </p:stCondLst>
-                                                      <p:childTnLst/>
-                                                    </p:cTn>
-                                                    <p:tgtEl>
-                                                      <p:spTgt spid="14"/>
-                                                    </p:tgtEl>
-                                                    <p:attrNameLst>
-                                                      <p:attrName>style.visibility</p:attrName>
-                                                    </p:attrNameLst>
-                                                  </p:cBhvr>
-                                                  <p:to>
-                                                    <p:strVal val="visible"/>
-                                                  </p:to>
-                                                </p:set>
-                                              </p:childTnLst>
-                                            </p:cTn>
-                                          </p:par>
-                                          <p:par>
-                                            <p:cTn id="56" presetID="10" presetClass="entr" presetSubtype="0" fill="hold" grpId="0" nodeType="withEffect">
-                                              <p:childTnLst>
-                                                <p:animEffect transition="in" filter="fade">
-                                                  <p:cBhvr>
-                                                    <p:cTn id="57" dur="600"/>
-                                                    <p:tgtEl>
-                                                      <p:spTgt spid="14"/>
-                                                    </p:tgtEl>
-                                                  </p:cBhvr>
-                                                </p:animEffect>
-                                              </p:childTnLst>
-                                            </p:cTn>
-                                          </p:par>
-                                        </p:childTnLst>
-                                      </p:cTn>
-                                    </p:par>
-                                  </p:childTnLst>
-                                </p:cTn>
-                              </p:par>
-                              <p:par>
-                                <p:cTn id="58" presetID="10" presetClass="entr" presetSubtype="0" fill="hold" grpId="0" nodeType="withEffect">
-                                  <p:stCondLst>
-                                    <p:cond delay="0"/>
-                                  </p:stCondLst>
-                                  <p:childTnLst>
-                                    <p:par>
-                                      <p:cTn id="59" fill="hold">
-                                        <p:stCondLst>
-                                          <p:cond delay="0"/>
-                                        </p:stCondLst>
-                                        <p:childTnLst>
-                                          <p:par>
-                                            <p:cTn id="60" presetID="1" presetClass="entr" presetSubtype="0" fill="hold" grpId="0" nodeType="withEffect">
-                                              <p:childTnLst>
-                                                <p:set>
-                                                  <p:cBhvr>
-                                                    <p:cTn id="61" dur="1" fill="hold">
-                                                      <p:stCondLst>
-                                                        <p:cond delay="0"/>
-                                                      </p:stCondLst>
-                                                      <p:childTnLst/>
-                                                    </p:cTn>
-                                                    <p:tgtEl>
-                                                      <p:spTgt spid="15"/>
-                                                    </p:tgtEl>
-                                                    <p:attrNameLst>
-                                                      <p:attrName>style.visibility</p:attrName>
-                                                    </p:attrNameLst>
-                                                  </p:cBhvr>
-                                                  <p:to>
-                                                    <p:strVal val="visible"/>
-                                                  </p:to>
-                                                </p:set>
-                                              </p:childTnLst>
-                                            </p:cTn>
-                                          </p:par>
-                                          <p:par>
-                                            <p:cTn id="62" presetID="10" presetClass="entr" presetSubtype="0" fill="hold" grpId="0" nodeType="withEffect">
-                                              <p:childTnLst>
-                                                <p:animEffect transition="in" filter="fade">
-                                                  <p:cBhvr>
-                                                    <p:cTn id="63" dur="600"/>
-                                                    <p:tgtEl>
-                                                      <p:spTgt spid="15"/>
-                                                    </p:tgtEl>
-                                                  </p:cBhvr>
-                                                </p:animEffect>
-                                              </p:childTnLst>
-                                            </p:cTn>
-                                          </p:par>
-                                        </p:childTnLst>
-                                      </p:cTn>
-                                    </p:par>
-                                  </p:childTnLst>
-                                </p:cTn>
-                              </p:par>
-                            </p:childTnLst>
-                          </p:cTn>
-                        </p:par>
-                      </p:childTnLst>
-                    </p:cTn>
-                  </p:par>
-                  <p:par>
-                    <p:cTn id="64" fill="hold">
-                      <p:stCondLst>
-                        <p:cond delay="indefinite" evt="onClick"/>
-                      </p:stCondLst>
-                      <p:childTnLst>
-                        <p:par>
-                          <p:cTn id="65" fill="hold">
-                            <p:childTnLst>
-                              <p:par>
-                                <p:cTn id="66" presetID="10" presetClass="entr" presetSubtype="0" fill="hold" grpId="0" nodeType="withEffect">
-                                  <p:stCondLst>
-                                    <p:cond delay="0"/>
-                                  </p:stCondLst>
-                                  <p:childTnLst>
-                                    <p:par>
-                                      <p:cTn id="67" fill="hold">
-                                        <p:stCondLst>
-                                          <p:cond delay="0"/>
-                                        </p:stCondLst>
-                                        <p:childTnLst>
-                                          <p:par>
-                                            <p:cTn id="68" presetID="1" presetClass="entr" presetSubtype="0" fill="hold" grpId="0" nodeType="withEffect">
-                                              <p:childTnLst>
-                                                <p:set>
-                                                  <p:cBhvr>
-                                                    <p:cTn id="69" dur="1" fill="hold">
-                                                      <p:stCondLst>
-                                                        <p:cond delay="0"/>
-                                                      </p:stCondLst>
-                                                      <p:childTnLst/>
-                                                    </p:cTn>
-                                                    <p:tgtEl>
-                                                      <p:spTgt spid="16"/>
-                                                    </p:tgtEl>
-                                                    <p:attrNameLst>
-                                                      <p:attrName>style.visibility</p:attrName>
-                                                    </p:attrNameLst>
-                                                  </p:cBhvr>
-                                                  <p:to>
-                                                    <p:strVal val="visible"/>
-                                                  </p:to>
-                                                </p:set>
-                                              </p:childTnLst>
-                                            </p:cTn>
-                                          </p:par>
-                                          <p:par>
-                                            <p:cTn id="70" presetID="10" presetClass="entr" presetSubtype="0" fill="hold" grpId="0" nodeType="withEffect">
-                                              <p:childTnLst>
-                                                <p:animEffect transition="in" filter="fade">
-                                                  <p:cBhvr>
-                                                    <p:cTn id="71" dur="600"/>
-                                                    <p:tgtEl>
-                                                      <p:spTgt spid="16"/>
-                                                    </p:tgtEl>
-                                                  </p:cBhvr>
-                                                </p:animEffect>
-                                              </p:childTnLst>
-                                            </p:cTn>
-                                          </p:par>
-                                        </p:childTnLst>
-                                      </p:cTn>
-                                    </p:par>
-                                  </p:childTnLst>
-                                </p:cTn>
-                              </p:par>
-                              <p:par>
-                                <p:cTn id="72" presetID="10" presetClass="entr" presetSubtype="0" fill="hold" grpId="0" nodeType="withEffect">
-                                  <p:stCondLst>
-                                    <p:cond delay="0"/>
-                                  </p:stCondLst>
-                                  <p:childTnLst>
-                                    <p:par>
-                                      <p:cTn id="73" fill="hold">
-                                        <p:stCondLst>
-                                          <p:cond delay="0"/>
-                                        </p:stCondLst>
-                                        <p:childTnLst>
-                                          <p:par>
-                                            <p:cTn id="74" presetID="1" presetClass="entr" presetSubtype="0" fill="hold" grpId="0" nodeType="withEffect">
-                                              <p:childTnLst>
-                                                <p:set>
-                                                  <p:cBhvr>
-                                                    <p:cTn id="75" dur="1" fill="hold">
-                                                      <p:stCondLst>
-                                                        <p:cond delay="0"/>
-                                                      </p:stCondLst>
-                                                      <p:childTnLst/>
-                                                    </p:cTn>
-                                                    <p:tgtEl>
-                                                      <p:spTgt spid="17"/>
-                                                    </p:tgtEl>
-                                                    <p:attrNameLst>
-                                                      <p:attrName>style.visibility</p:attrName>
-                                                    </p:attrNameLst>
-                                                  </p:cBhvr>
-                                                  <p:to>
-                                                    <p:strVal val="visible"/>
-                                                  </p:to>
-                                                </p:set>
-                                              </p:childTnLst>
-                                            </p:cTn>
-                                          </p:par>
-                                          <p:par>
-                                            <p:cTn id="76" presetID="10" presetClass="entr" presetSubtype="0" fill="hold" grpId="0" nodeType="withEffect">
-                                              <p:childTnLst>
-                                                <p:animEffect transition="in" filter="fade">
-                                                  <p:cBhvr>
-                                                    <p:cTn id="77" dur="600"/>
-                                                    <p:tgtEl>
-                                                      <p:spTgt spid="17"/>
-                                                    </p:tgtEl>
-                                                  </p:cBhvr>
-                                                </p:animEffect>
-                                              </p:childTnLst>
-                                            </p:cTn>
-                                          </p:par>
-                                        </p:childTnLst>
-                                      </p:cTn>
-                                    </p:par>
-                                  </p:childTnLst>
-                                </p:cTn>
-                              </p:par>
-                              <p:par>
-                                <p:cTn id="78" presetID="10" presetClass="entr" presetSubtype="0" fill="hold" grpId="0" nodeType="withEffect">
-                                  <p:stCondLst>
-                                    <p:cond delay="0"/>
-                                  </p:stCondLst>
-                                  <p:childTnLst>
-                                    <p:par>
-                                      <p:cTn id="79" fill="hold">
-                                        <p:stCondLst>
-                                          <p:cond delay="0"/>
-                                        </p:stCondLst>
-                                        <p:childTnLst>
-                                          <p:par>
-                                            <p:cTn id="80" presetID="1" presetClass="entr" presetSubtype="0" fill="hold" grpId="0" nodeType="withEffect">
-                                              <p:childTnLst>
-                                                <p:set>
-                                                  <p:cBhvr>
-                                                    <p:cTn id="81" dur="1" fill="hold">
-                                                      <p:stCondLst>
-                                                        <p:cond delay="0"/>
-                                                      </p:stCondLst>
-                                                      <p:childTnLst/>
-                                                    </p:cTn>
-                                                    <p:tgtEl>
-                                                      <p:spTgt spid="18"/>
-                                                    </p:tgtEl>
-                                                    <p:attrNameLst>
-                                                      <p:attrName>style.visibility</p:attrName>
-                                                    </p:attrNameLst>
-                                                  </p:cBhvr>
-                                                  <p:to>
-                                                    <p:strVal val="visible"/>
-                                                  </p:to>
-                                                </p:set>
-                                              </p:childTnLst>
-                                            </p:cTn>
-                                          </p:par>
-                                          <p:par>
-                                            <p:cTn id="82" presetID="10" presetClass="entr" presetSubtype="0" fill="hold" grpId="0" nodeType="withEffect">
-                                              <p:childTnLst>
-                                                <p:animEffect transition="in" filter="fade">
-                                                  <p:cBhvr>
-                                                    <p:cTn id="83" dur="600"/>
-                                                    <p:tgtEl>
-                                                      <p:spTgt spid="18"/>
-                                                    </p:tgtEl>
-                                                  </p:cBhvr>
-                                                </p:animEffect>
-                                              </p:childTnLst>
-                                            </p:cTn>
-                                          </p:par>
-                                        </p:childTnLst>
-                                      </p:cTn>
-                                    </p:par>
-                                  </p:childTnLst>
-                                </p:cTn>
-                              </p:par>
-                            </p:childTnLst>
-                          </p:cTn>
-                        </p:par>
-                      </p:childTnLst>
-                    </p:cTn>
-                  </p:par>
-                  <p:par>
-                    <p:cTn id="84" fill="hold">
-                      <p:stCondLst>
-                        <p:cond delay="indefinite" evt="onClick"/>
-                      </p:stCondLst>
-                      <p:childTnLst>
-                        <p:par>
-                          <p:cTn id="85" fill="hold">
-                            <p:childTnLst>
-                              <p:par>
-                                <p:cTn id="86" presetID="10" presetClass="entr" presetSubtype="0" fill="hold" grpId="0" nodeType="withEffect">
-                                  <p:stCondLst>
-                                    <p:cond delay="0"/>
-                                  </p:stCondLst>
-                                  <p:childTnLst>
-                                    <p:par>
-                                      <p:cTn id="87" fill="hold">
-                                        <p:stCondLst>
-                                          <p:cond delay="0"/>
-                                        </p:stCondLst>
-                                        <p:childTnLst>
-                                          <p:par>
-                                            <p:cTn id="88" presetID="1" presetClass="entr" presetSubtype="0" fill="hold" grpId="0" nodeType="withEffect">
-                                              <p:childTnLst>
-                                                <p:set>
-                                                  <p:cBhvr>
-                                                    <p:cTn id="89" dur="1" fill="hold">
-                                                      <p:stCondLst>
-                                                        <p:cond delay="0"/>
-                                                      </p:stCondLst>
-                                                      <p:childTnLst/>
-                                                    </p:cTn>
-                                                    <p:tgtEl>
-                                                      <p:spTgt spid="19"/>
-                                                    </p:tgtEl>
-                                                    <p:attrNameLst>
-                                                      <p:attrName>style.visibility</p:attrName>
-                                                    </p:attrNameLst>
-                                                  </p:cBhvr>
-                                                  <p:to>
-                                                    <p:strVal val="visible"/>
-                                                  </p:to>
-                                                </p:set>
-                                              </p:childTnLst>
-                                            </p:cTn>
-                                          </p:par>
-                                          <p:par>
-                                            <p:cTn id="90" presetID="10" presetClass="entr" presetSubtype="0" fill="hold" grpId="0" nodeType="withEffect">
-                                              <p:childTnLst>
-                                                <p:animEffect transition="in" filter="fade">
-                                                  <p:cBhvr>
-                                                    <p:cTn id="91" dur="600"/>
-                                                    <p:tgtEl>
-                                                      <p:spTgt spid="19"/>
-                                                    </p:tgtEl>
-                                                  </p:cBhvr>
-                                                </p:animEffect>
-                                              </p:childTnLst>
-                                            </p:cTn>
-                                          </p:par>
-                                        </p:childTnLst>
-                                      </p:cTn>
-                                    </p:par>
-                                  </p:childTnLst>
-                                </p:cTn>
-                              </p:par>
-                              <p:par>
-                                <p:cTn id="92" presetID="10" presetClass="entr" presetSubtype="0" fill="hold" grpId="0" nodeType="withEffect">
-                                  <p:stCondLst>
-                                    <p:cond delay="0"/>
-                                  </p:stCondLst>
-                                  <p:childTnLst>
-                                    <p:par>
-                                      <p:cTn id="93" fill="hold">
-                                        <p:stCondLst>
-                                          <p:cond delay="0"/>
-                                        </p:stCondLst>
-                                        <p:childTnLst>
-                                          <p:par>
-                                            <p:cTn id="94" presetID="1" presetClass="entr" presetSubtype="0" fill="hold" grpId="0" nodeType="withEffect">
-                                              <p:childTnLst>
-                                                <p:set>
-                                                  <p:cBhvr>
-                                                    <p:cTn id="95" dur="1" fill="hold">
-                                                      <p:stCondLst>
-                                                        <p:cond delay="0"/>
-                                                      </p:stCondLst>
-                                                      <p:childTnLst/>
-                                                    </p:cTn>
-                                                    <p:tgtEl>
-                                                      <p:spTgt spid="20"/>
-                                                    </p:tgtEl>
-                                                    <p:attrNameLst>
-                                                      <p:attrName>style.visibility</p:attrName>
-                                                    </p:attrNameLst>
-                                                  </p:cBhvr>
-                                                  <p:to>
-                                                    <p:strVal val="visible"/>
-                                                  </p:to>
-                                                </p:set>
-                                              </p:childTnLst>
-                                            </p:cTn>
-                                          </p:par>
-                                          <p:par>
-                                            <p:cTn id="96" presetID="10" presetClass="entr" presetSubtype="0" fill="hold" grpId="0" nodeType="withEffect">
-                                              <p:childTnLst>
-                                                <p:animEffect transition="in" filter="fade">
-                                                  <p:cBhvr>
-                                                    <p:cTn id="97" dur="600"/>
-                                                    <p:tgtEl>
-                                                      <p:spTgt spid="20"/>
-                                                    </p:tgtEl>
-                                                  </p:cBhvr>
-                                                </p:animEffect>
-                                              </p:childTnLst>
-                                            </p:cTn>
-                                          </p:par>
-                                        </p:childTnLst>
-                                      </p:cTn>
-                                    </p:par>
-                                  </p:childTnLst>
-                                </p:cTn>
-                              </p:par>
-                              <p:par>
-                                <p:cTn id="98" presetID="10" presetClass="entr" presetSubtype="0" fill="hold" grpId="0" nodeType="withEffect">
-                                  <p:stCondLst>
-                                    <p:cond delay="0"/>
-                                  </p:stCondLst>
-                                  <p:childTnLst>
-                                    <p:par>
-                                      <p:cTn id="99" fill="hold">
-                                        <p:stCondLst>
-                                          <p:cond delay="0"/>
-                                        </p:stCondLst>
-                                        <p:childTnLst>
-                                          <p:par>
-                                            <p:cTn id="100" presetID="1" presetClass="entr" presetSubtype="0" fill="hold" grpId="0" nodeType="withEffect">
-                                              <p:childTnLst>
-                                                <p:set>
-                                                  <p:cBhvr>
-                                                    <p:cTn id="101" dur="1" fill="hold">
-                                                      <p:stCondLst>
-                                                        <p:cond delay="0"/>
-                                                      </p:stCondLst>
-                                                      <p:childTnLst/>
-                                                    </p:cTn>
-                                                    <p:tgtEl>
-                                                      <p:spTgt spid="21"/>
-                                                    </p:tgtEl>
-                                                    <p:attrNameLst>
-                                                      <p:attrName>style.visibility</p:attrName>
-                                                    </p:attrNameLst>
-                                                  </p:cBhvr>
-                                                  <p:to>
-                                                    <p:strVal val="visible"/>
-                                                  </p:to>
-                                                </p:set>
-                                              </p:childTnLst>
-                                            </p:cTn>
-                                          </p:par>
-                                          <p:par>
-                                            <p:cTn id="102" presetID="10" presetClass="entr" presetSubtype="0" fill="hold" grpId="0" nodeType="withEffect">
-                                              <p:childTnLst>
-                                                <p:animEffect transition="in" filter="fade">
-                                                  <p:cBhvr>
-                                                    <p:cTn id="103" dur="600"/>
-                                                    <p:tgtEl>
-                                                      <p:spTgt spid="21"/>
-                                                    </p:tgtEl>
-                                                  </p:cBhvr>
-                                                </p:animEffect>
-                                              </p:childTnLst>
-                                            </p:cTn>
-                                          </p:par>
-                                        </p:childTnLst>
-                                      </p:cTn>
-                                    </p:par>
-                                  </p:childTnLst>
-                                </p:cTn>
-                              </p:par>
-                            </p:childTnLst>
-                          </p:cTn>
-                        </p:par>
-                      </p:childTnLst>
-                    </p:cTn>
-                  </p:par>
-                  <p:par>
-                    <p:cTn id="104" fill="hold">
-                      <p:stCondLst>
-                        <p:cond delay="indefinite" evt="onClick"/>
-                      </p:stCondLst>
-                      <p:childTnLst>
-                        <p:par>
-                          <p:cTn id="105" fill="hold">
-                            <p:childTnLst>
-                              <p:par>
-                                <p:cTn id="106" presetID="10" presetClass="entr" presetSubtype="0" fill="hold" grpId="0" nodeType="withEffect">
-                                  <p:stCondLst>
-                                    <p:cond delay="0"/>
-                                  </p:stCondLst>
-                                  <p:childTnLst>
-                                    <p:par>
-                                      <p:cTn id="107" fill="hold">
-                                        <p:stCondLst>
-                                          <p:cond delay="0"/>
-                                        </p:stCondLst>
-                                        <p:childTnLst>
-                                          <p:par>
-                                            <p:cTn id="108" presetID="1" presetClass="entr" presetSubtype="0" fill="hold" grpId="0" nodeType="withEffect">
-                                              <p:childTnLst>
-                                                <p:set>
-                                                  <p:cBhvr>
-                                                    <p:cTn id="109" dur="1" fill="hold">
-                                                      <p:stCondLst>
-                                                        <p:cond delay="0"/>
-                                                      </p:stCondLst>
-                                                      <p:childTnLst/>
-                                                    </p:cTn>
-                                                    <p:tgtEl>
-                                                      <p:spTgt spid="22"/>
-                                                    </p:tgtEl>
-                                                    <p:attrNameLst>
-                                                      <p:attrName>style.visibility</p:attrName>
-                                                    </p:attrNameLst>
-                                                  </p:cBhvr>
-                                                  <p:to>
-                                                    <p:strVal val="visible"/>
-                                                  </p:to>
-                                                </p:set>
-                                              </p:childTnLst>
-                                            </p:cTn>
-                                          </p:par>
-                                          <p:par>
-                                            <p:cTn id="110" presetID="10" presetClass="entr" presetSubtype="0" fill="hold" grpId="0" nodeType="withEffect">
-                                              <p:childTnLst>
-                                                <p:animEffect transition="in" filter="fade">
-                                                  <p:cBhvr>
-                                                    <p:cTn id="111" dur="600"/>
-                                                    <p:tgtEl>
-                                                      <p:spTgt spid="22"/>
-                                                    </p:tgtEl>
-                                                  </p:cBhvr>
-                                                </p:animEffect>
-                                              </p:childTnLst>
-                                            </p:cTn>
-                                          </p:par>
-                                        </p:childTnLst>
-                                      </p:cTn>
-                                    </p:par>
-                                  </p:childTnLst>
-                                </p:cTn>
-                              </p:par>
-                              <p:par>
-                                <p:cTn id="112" presetID="10" presetClass="entr" presetSubtype="0" fill="hold" grpId="0" nodeType="withEffect">
-                                  <p:stCondLst>
-                                    <p:cond delay="0"/>
-                                  </p:stCondLst>
-                                  <p:childTnLst>
-                                    <p:par>
-                                      <p:cTn id="113" fill="hold">
-                                        <p:stCondLst>
-                                          <p:cond delay="0"/>
-                                        </p:stCondLst>
-                                        <p:childTnLst>
-                                          <p:par>
-                                            <p:cTn id="114" presetID="1" presetClass="entr" presetSubtype="0" fill="hold" grpId="0" nodeType="withEffect">
-                                              <p:childTnLst>
-                                                <p:set>
-                                                  <p:cBhvr>
-                                                    <p:cTn id="115" dur="1" fill="hold">
-                                                      <p:stCondLst>
-                                                        <p:cond delay="0"/>
-                                                      </p:stCondLst>
-                                                      <p:childTnLst/>
-                                                    </p:cTn>
-                                                    <p:tgtEl>
-                                                      <p:spTgt spid="23"/>
-                                                    </p:tgtEl>
-                                                    <p:attrNameLst>
-                                                      <p:attrName>style.visibility</p:attrName>
-                                                    </p:attrNameLst>
-                                                  </p:cBhvr>
-                                                  <p:to>
-                                                    <p:strVal val="visible"/>
-                                                  </p:to>
-                                                </p:set>
-                                              </p:childTnLst>
-                                            </p:cTn>
-                                          </p:par>
-                                          <p:par>
-                                            <p:cTn id="116" presetID="10" presetClass="entr" presetSubtype="0" fill="hold" grpId="0" nodeType="withEffect">
-                                              <p:childTnLst>
-                                                <p:animEffect transition="in" filter="fade">
-                                                  <p:cBhvr>
-                                                    <p:cTn id="117" dur="600"/>
-                                                    <p:tgtEl>
-                                                      <p:spTgt spid="23"/>
-                                                    </p:tgtEl>
-                                                  </p:cBhvr>
-                                                </p:animEffect>
-                                              </p:childTnLst>
-                                            </p:cTn>
-                                          </p:par>
-                                        </p:childTnLst>
-                                      </p:cTn>
-                                    </p:par>
-                                  </p:childTnLst>
-                                </p:cTn>
-                              </p:par>
-                              <p:par>
-                                <p:cTn id="118" presetID="10" presetClass="entr" presetSubtype="0" fill="hold" grpId="0" nodeType="withEffect">
-                                  <p:stCondLst>
-                                    <p:cond delay="0"/>
-                                  </p:stCondLst>
-                                  <p:childTnLst>
-                                    <p:par>
-                                      <p:cTn id="119" fill="hold">
-                                        <p:stCondLst>
-                                          <p:cond delay="0"/>
-                                        </p:stCondLst>
-                                        <p:childTnLst>
-                                          <p:par>
-                                            <p:cTn id="120" presetID="1" presetClass="entr" presetSubtype="0" fill="hold" grpId="0" nodeType="withEffect">
-                                              <p:childTnLst>
-                                                <p:set>
-                                                  <p:cBhvr>
-                                                    <p:cTn id="121" dur="1" fill="hold">
-                                                      <p:stCondLst>
-                                                        <p:cond delay="0"/>
-                                                      </p:stCondLst>
-                                                      <p:childTnLst/>
-                                                    </p:cTn>
-                                                    <p:tgtEl>
-                                                      <p:spTgt spid="24"/>
-                                                    </p:tgtEl>
-                                                    <p:attrNameLst>
-                                                      <p:attrName>style.visibility</p:attrName>
-                                                    </p:attrNameLst>
-                                                  </p:cBhvr>
-                                                  <p:to>
-                                                    <p:strVal val="visible"/>
-                                                  </p:to>
-                                                </p:set>
-                                              </p:childTnLst>
-                                            </p:cTn>
-                                          </p:par>
-                                          <p:par>
-                                            <p:cTn id="122" presetID="10" presetClass="entr" presetSubtype="0" fill="hold" grpId="0" nodeType="withEffect">
-                                              <p:childTnLst>
-                                                <p:animEffect transition="in" filter="fade">
-                                                  <p:cBhvr>
-                                                    <p:cTn id="123" dur="600"/>
-                                                    <p:tgtEl>
-                                                      <p:spTgt spid="24"/>
-                                                    </p:tgtEl>
-                                                  </p:cBhvr>
-                                                </p:animEffect>
-                                              </p:childTnLst>
-                                            </p:cTn>
-                                          </p:par>
-                                        </p:childTnLst>
-                                      </p:cTn>
-                                    </p:par>
-                                  </p:childTnLst>
-                                </p:cTn>
-                              </p:par>
-                            </p:childTnLst>
-                          </p:cTn>
-                        </p:par>
-                      </p:childTnLst>
-                    </p:cTn>
-                  </p:par>
-                </p:childTnLst>
-              </p:cTn>
-              <p:prevCondLst>
-                <p:cond evt="onClick" delay="0">
-                  <p:tgtEl>
-                    <p:sldTgt/>
-                  </p:tgtEl>
-                </p:cond>
-              </p:prevCondLst>
-              <p:nextCondLst>
-                <p:cond evt="onClick" delay="0">
-                  <p:tgtEl>
-                    <p:sldTgt/>
-                  </p:tgtEl>
-                </p:cond>
-              </p:nextCondLst>
-            </p:seq>
-          </p:childTnLst>
-        </p:cTn>
-      </p:par>
-    </p:tnLst>
-    <p:bldLst>
-      <p:bldP spid="7" grpId="0"/>
-      <p:bldP spid="8" grpId="0"/>
-      <p:bldP spid="9" grpId="0"/>
-      <p:bldP spid="10" grpId="0"/>
-      <p:bldP spid="11" grpId="0"/>
-      <p:bldP spid="12" grpId="0"/>
-      <p:bldP spid="13" grpId="0"/>
-      <p:bldP spid="14" grpId="0"/>
-      <p:bldP spid="15" grpId="0"/>
-      <p:bldP spid="16" grpId="0"/>
-      <p:bldP spid="17" grpId="0"/>
-      <p:bldP spid="18" grpId="0"/>
-      <p:bldP spid="19" grpId="0"/>
-      <p:bldP spid="20" grpId="0"/>
-      <p:bldP spid="21" grpId="0"/>
-      <p:bldP spid="22" grpId="0"/>
-      <p:bldP spid="23" grpId="0"/>
-      <p:bldP spid="24" grpId="0"/>
-    </p:bldLst>
-  </p:timing>
 </p:sld>
 </file>
 
@@ -8437,9 +5951,57 @@
           </a:p>
         </p:txBody>
       </p:sp>
+      <p:sp>
+        <p:nvSpPr>
+          <p:cNvPr id="7" name="Rounded Rectangle 6"/>
+          <p:cNvSpPr/>
+          <p:nvPr/>
+        </p:nvSpPr>
+        <p:spPr>
+          <a:xfrm>
+            <a:off x="502920" y="2522601"/>
+            <a:ext cx="3529584" cy="2041398"/>
+          </a:xfrm>
+          <a:prstGeom prst="roundRect">
+            <a:avLst>
+              <a:gd name="adj" fmla="val 6000"/>
+            </a:avLst>
+          </a:prstGeom>
+          <a:solidFill>
+            <a:srgbClr val="FFFFFF"/>
+          </a:solidFill>
+          <a:ln w="12700">
+            <a:solidFill>
+              <a:srgbClr val="DDCFB8"/>
+            </a:solidFill>
+          </a:ln>
+          <a:effectLst/>
+        </p:spPr>
+        <p:style>
+          <a:lnRef idx="1">
+            <a:schemeClr val="accent1"/>
+          </a:lnRef>
+          <a:fillRef idx="3">
+            <a:schemeClr val="accent1"/>
+          </a:fillRef>
+          <a:effectRef idx="2">
+            <a:schemeClr val="accent1"/>
+          </a:effectRef>
+          <a:fontRef idx="minor">
+            <a:schemeClr val="lt1"/>
+          </a:fontRef>
+        </p:style>
+        <p:txBody>
+          <a:bodyPr rtlCol="0" anchor="ctr"/>
+          <a:lstStyle/>
+          <a:p>
+            <a:pPr algn="ctr"/>
+          </a:p>
+        </p:txBody>
+      </p:sp>
       <p:pic>
         <p:nvPicPr>
-          <p:cNvPr id="7" name="Picture 6" descr="process-1-walls.jpg"/>
+          <p:cNvPr id="8" name="Picture 7" descr="process-1-walls.jpg"/>
           <p:cNvPicPr>
             <a:picLocks noChangeAspect="1"/>
           </p:cNvPicPr>
@@ -8456,11 +6018,6 @@
             <a:off x="566928" y="2586609"/>
             <a:ext cx="3401568" cy="1913381"/>
           </a:xfrm>
-          <a:prstGeom prst="roundRect">
-            <a:avLst>
-              <a:gd name="adj" fmla="val 6500"/>
-            </a:avLst>
-          </a:prstGeom>
           <a:prstGeom prst="rect">
             <a:avLst/>
           </a:prstGeom>
@@ -8468,7 +6025,7 @@
       </p:pic>
       <p:sp>
         <p:nvSpPr>
-          <p:cNvPr id="8" name="TextBox 7"/>
+          <p:cNvPr id="9" name="TextBox 8"/>
           <p:cNvSpPr txBox="1"/>
           <p:nvPr/>
         </p:nvSpPr>
@@ -8507,7 +6064,7 @@
       </p:sp>
       <p:sp>
         <p:nvSpPr>
-          <p:cNvPr id="9" name="TextBox 8"/>
+          <p:cNvPr id="10" name="TextBox 9"/>
           <p:cNvSpPr txBox="1"/>
           <p:nvPr/>
         </p:nvSpPr>
@@ -8544,9 +6101,57 @@
           </a:p>
         </p:txBody>
       </p:sp>
+      <p:sp>
+        <p:nvSpPr>
+          <p:cNvPr id="11" name="Rounded Rectangle 10"/>
+          <p:cNvSpPr/>
+          <p:nvPr/>
+        </p:nvSpPr>
+        <p:spPr>
+          <a:xfrm>
+            <a:off x="5164359" y="1947672"/>
+            <a:ext cx="1851088" cy="3191256"/>
+          </a:xfrm>
+          <a:prstGeom prst="roundRect">
+            <a:avLst>
+              <a:gd name="adj" fmla="val 6000"/>
+            </a:avLst>
+          </a:prstGeom>
+          <a:solidFill>
+            <a:srgbClr val="FFFFFF"/>
+          </a:solidFill>
+          <a:ln w="12700">
+            <a:solidFill>
+              <a:srgbClr val="DDCFB8"/>
+            </a:solidFill>
+          </a:ln>
+          <a:effectLst/>
+        </p:spPr>
+        <p:style>
+          <a:lnRef idx="1">
+            <a:schemeClr val="accent1"/>
+          </a:lnRef>
+          <a:fillRef idx="3">
+            <a:schemeClr val="accent1"/>
+          </a:fillRef>
+          <a:effectRef idx="2">
+            <a:schemeClr val="accent1"/>
+          </a:effectRef>
+          <a:fontRef idx="minor">
+            <a:schemeClr val="lt1"/>
+          </a:fontRef>
+        </p:style>
+        <p:txBody>
+          <a:bodyPr rtlCol="0" anchor="ctr"/>
+          <a:lstStyle/>
+          <a:p>
+            <a:pPr algn="ctr"/>
+          </a:p>
+        </p:txBody>
+      </p:sp>
       <p:pic>
         <p:nvPicPr>
-          <p:cNvPr id="10" name="Picture 9" descr="process-2-main-cube-entrance.jpg"/>
+          <p:cNvPr id="12" name="Picture 11" descr="process-2-main-cube-entrance.jpg"/>
           <p:cNvPicPr>
             <a:picLocks noChangeAspect="1"/>
           </p:cNvPicPr>
@@ -8563,11 +6168,6 @@
             <a:off x="5228367" y="2011680"/>
             <a:ext cx="1723072" cy="3063240"/>
           </a:xfrm>
-          <a:prstGeom prst="roundRect">
-            <a:avLst>
-              <a:gd name="adj" fmla="val 6500"/>
-            </a:avLst>
-          </a:prstGeom>
           <a:prstGeom prst="rect">
             <a:avLst/>
           </a:prstGeom>
@@ -8575,7 +6175,7 @@
       </p:pic>
       <p:sp>
         <p:nvSpPr>
-          <p:cNvPr id="11" name="TextBox 10"/>
+          <p:cNvPr id="13" name="TextBox 12"/>
           <p:cNvSpPr txBox="1"/>
           <p:nvPr/>
         </p:nvSpPr>
@@ -8614,7 +6214,7 @@
       </p:sp>
       <p:sp>
         <p:nvSpPr>
-          <p:cNvPr id="12" name="TextBox 11"/>
+          <p:cNvPr id="14" name="TextBox 13"/>
           <p:cNvSpPr txBox="1"/>
           <p:nvPr/>
         </p:nvSpPr>
@@ -8651,9 +6251,57 @@
           </a:p>
         </p:txBody>
       </p:sp>
+      <p:sp>
+        <p:nvSpPr>
+          <p:cNvPr id="15" name="Rounded Rectangle 14"/>
+          <p:cNvSpPr/>
+          <p:nvPr/>
+        </p:nvSpPr>
+        <p:spPr>
+          <a:xfrm>
+            <a:off x="8986551" y="1947672"/>
+            <a:ext cx="1851088" cy="3191256"/>
+          </a:xfrm>
+          <a:prstGeom prst="roundRect">
+            <a:avLst>
+              <a:gd name="adj" fmla="val 6000"/>
+            </a:avLst>
+          </a:prstGeom>
+          <a:solidFill>
+            <a:srgbClr val="FFFFFF"/>
+          </a:solidFill>
+          <a:ln w="12700">
+            <a:solidFill>
+              <a:srgbClr val="DDCFB8"/>
+            </a:solidFill>
+          </a:ln>
+          <a:effectLst/>
+        </p:spPr>
+        <p:style>
+          <a:lnRef idx="1">
+            <a:schemeClr val="accent1"/>
+          </a:lnRef>
+          <a:fillRef idx="3">
+            <a:schemeClr val="accent1"/>
+          </a:fillRef>
+          <a:effectRef idx="2">
+            <a:schemeClr val="accent1"/>
+          </a:effectRef>
+          <a:fontRef idx="minor">
+            <a:schemeClr val="lt1"/>
+          </a:fontRef>
+        </p:style>
+        <p:txBody>
+          <a:bodyPr rtlCol="0" anchor="ctr"/>
+          <a:lstStyle/>
+          <a:p>
+            <a:pPr algn="ctr"/>
+          </a:p>
+        </p:txBody>
+      </p:sp>
       <p:pic>
         <p:nvPicPr>
-          <p:cNvPr id="13" name="Picture 12" descr="process-3-side-cube-window.jpg"/>
+          <p:cNvPr id="16" name="Picture 15" descr="process-3-side-cube-window.jpg"/>
           <p:cNvPicPr>
             <a:picLocks noChangeAspect="1"/>
           </p:cNvPicPr>
@@ -8670,11 +6318,6 @@
             <a:off x="9050559" y="2011680"/>
             <a:ext cx="1723072" cy="3063240"/>
           </a:xfrm>
-          <a:prstGeom prst="roundRect">
-            <a:avLst>
-              <a:gd name="adj" fmla="val 6500"/>
-            </a:avLst>
-          </a:prstGeom>
           <a:prstGeom prst="rect">
             <a:avLst/>
           </a:prstGeom>
@@ -8682,7 +6325,7 @@
       </p:pic>
       <p:sp>
         <p:nvSpPr>
-          <p:cNvPr id="14" name="TextBox 13"/>
+          <p:cNvPr id="17" name="TextBox 16"/>
           <p:cNvSpPr txBox="1"/>
           <p:nvPr/>
         </p:nvSpPr>
@@ -8721,7 +6364,7 @@
       </p:sp>
       <p:sp>
         <p:nvSpPr>
-          <p:cNvPr id="15" name="TextBox 14"/>
+          <p:cNvPr id="18" name="TextBox 17"/>
           <p:cNvSpPr txBox="1"/>
           <p:nvPr/>
         </p:nvSpPr>
@@ -8763,605 +6406,6 @@
   <p:clrMapOvr>
     <a:masterClrMapping/>
   </p:clrMapOvr>
-  <p:timing>
-    <p:tnLst>
-      <p:par>
-        <p:cTn id="2" dur="indefinite" restart="never" nodeType="tmRoot">
-          <p:childTnLst>
-            <p:seq concurrent="1" nextAc="seek">
-              <p:cTn id="3" dur="indefinite" nodeType="mainSeq">
-                <p:childTnLst>
-                  <p:par>
-                    <p:cTn id="4" fill="hold">
-                      <p:stCondLst>
-                        <p:cond delay="indefinite" evt="onClick"/>
-                      </p:stCondLst>
-                      <p:childTnLst>
-                        <p:par>
-                          <p:cTn id="5" fill="hold">
-                            <p:childTnLst>
-                              <p:par>
-                                <p:cTn id="6" presetID="10" presetClass="entr" presetSubtype="0" fill="hold" grpId="0" nodeType="withEffect">
-                                  <p:stCondLst>
-                                    <p:cond delay="0"/>
-                                  </p:stCondLst>
-                                  <p:childTnLst>
-                                    <p:par>
-                                      <p:cTn id="7" fill="hold">
-                                        <p:stCondLst>
-                                          <p:cond delay="0"/>
-                                        </p:stCondLst>
-                                        <p:childTnLst>
-                                          <p:par>
-                                            <p:cTn id="8" presetID="1" presetClass="entr" presetSubtype="0" fill="hold" grpId="0" nodeType="withEffect">
-                                              <p:childTnLst>
-                                                <p:set>
-                                                  <p:cBhvr>
-                                                    <p:cTn id="9" dur="1" fill="hold">
-                                                      <p:stCondLst>
-                                                        <p:cond delay="0"/>
-                                                      </p:stCondLst>
-                                                      <p:childTnLst/>
-                                                    </p:cTn>
-                                                    <p:tgtEl>
-                                                      <p:spTgt spid="7"/>
-                                                    </p:tgtEl>
-                                                    <p:attrNameLst>
-                                                      <p:attrName>style.visibility</p:attrName>
-                                                    </p:attrNameLst>
-                                                  </p:cBhvr>
-                                                  <p:to>
-                                                    <p:strVal val="visible"/>
-                                                  </p:to>
-                                                </p:set>
-                                              </p:childTnLst>
-                                            </p:cTn>
-                                          </p:par>
-                                          <p:par>
-                                            <p:cTn id="10" presetID="10" presetClass="entr" presetSubtype="0" fill="hold" grpId="0" nodeType="withEffect">
-                                              <p:childTnLst>
-                                                <p:animEffect transition="in" filter="fade">
-                                                  <p:cBhvr>
-                                                    <p:cTn id="11" dur="600"/>
-                                                    <p:tgtEl>
-                                                      <p:spTgt spid="7"/>
-                                                    </p:tgtEl>
-                                                  </p:cBhvr>
-                                                </p:animEffect>
-                                              </p:childTnLst>
-                                            </p:cTn>
-                                          </p:par>
-                                        </p:childTnLst>
-                                      </p:cTn>
-                                    </p:par>
-                                  </p:childTnLst>
-                                </p:cTn>
-                              </p:par>
-                              <p:par>
-                                <p:cTn id="12" presetID="10" presetClass="entr" presetSubtype="0" fill="hold" grpId="0" nodeType="withEffect">
-                                  <p:stCondLst>
-                                    <p:cond delay="0"/>
-                                  </p:stCondLst>
-                                  <p:childTnLst>
-                                    <p:par>
-                                      <p:cTn id="13" fill="hold">
-                                        <p:stCondLst>
-                                          <p:cond delay="0"/>
-                                        </p:stCondLst>
-                                        <p:childTnLst>
-                                          <p:par>
-                                            <p:cTn id="14" presetID="1" presetClass="entr" presetSubtype="0" fill="hold" grpId="0" nodeType="withEffect">
-                                              <p:childTnLst>
-                                                <p:set>
-                                                  <p:cBhvr>
-                                                    <p:cTn id="15" dur="1" fill="hold">
-                                                      <p:stCondLst>
-                                                        <p:cond delay="0"/>
-                                                      </p:stCondLst>
-                                                      <p:childTnLst/>
-                                                    </p:cTn>
-                                                    <p:tgtEl>
-                                                      <p:spTgt spid="8"/>
-                                                    </p:tgtEl>
-                                                    <p:attrNameLst>
-                                                      <p:attrName>style.visibility</p:attrName>
-                                                    </p:attrNameLst>
-                                                  </p:cBhvr>
-                                                  <p:to>
-                                                    <p:strVal val="visible"/>
-                                                  </p:to>
-                                                </p:set>
-                                              </p:childTnLst>
-                                            </p:cTn>
-                                          </p:par>
-                                          <p:par>
-                                            <p:cTn id="16" presetID="10" presetClass="entr" presetSubtype="0" fill="hold" grpId="0" nodeType="withEffect">
-                                              <p:childTnLst>
-                                                <p:animEffect transition="in" filter="fade">
-                                                  <p:cBhvr>
-                                                    <p:cTn id="17" dur="600"/>
-                                                    <p:tgtEl>
-                                                      <p:spTgt spid="8"/>
-                                                    </p:tgtEl>
-                                                  </p:cBhvr>
-                                                </p:animEffect>
-                                              </p:childTnLst>
-                                            </p:cTn>
-                                          </p:par>
-                                        </p:childTnLst>
-                                      </p:cTn>
-                                    </p:par>
-                                  </p:childTnLst>
-                                </p:cTn>
-                              </p:par>
-                              <p:par>
-                                <p:cTn id="18" presetID="10" presetClass="entr" presetSubtype="0" fill="hold" grpId="0" nodeType="withEffect">
-                                  <p:stCondLst>
-                                    <p:cond delay="0"/>
-                                  </p:stCondLst>
-                                  <p:childTnLst>
-                                    <p:par>
-                                      <p:cTn id="19" fill="hold">
-                                        <p:stCondLst>
-                                          <p:cond delay="0"/>
-                                        </p:stCondLst>
-                                        <p:childTnLst>
-                                          <p:par>
-                                            <p:cTn id="20" presetID="1" presetClass="entr" presetSubtype="0" fill="hold" grpId="0" nodeType="withEffect">
-                                              <p:childTnLst>
-                                                <p:set>
-                                                  <p:cBhvr>
-                                                    <p:cTn id="21" dur="1" fill="hold">
-                                                      <p:stCondLst>
-                                                        <p:cond delay="0"/>
-                                                      </p:stCondLst>
-                                                      <p:childTnLst/>
-                                                    </p:cTn>
-                                                    <p:tgtEl>
-                                                      <p:spTgt spid="9"/>
-                                                    </p:tgtEl>
-                                                    <p:attrNameLst>
-                                                      <p:attrName>style.visibility</p:attrName>
-                                                    </p:attrNameLst>
-                                                  </p:cBhvr>
-                                                  <p:to>
-                                                    <p:strVal val="visible"/>
-                                                  </p:to>
-                                                </p:set>
-                                              </p:childTnLst>
-                                            </p:cTn>
-                                          </p:par>
-                                          <p:par>
-                                            <p:cTn id="22" presetID="10" presetClass="entr" presetSubtype="0" fill="hold" grpId="0" nodeType="withEffect">
-                                              <p:childTnLst>
-                                                <p:animEffect transition="in" filter="fade">
-                                                  <p:cBhvr>
-                                                    <p:cTn id="23" dur="600"/>
-                                                    <p:tgtEl>
-                                                      <p:spTgt spid="9"/>
-                                                    </p:tgtEl>
-                                                  </p:cBhvr>
-                                                </p:animEffect>
-                                              </p:childTnLst>
-                                            </p:cTn>
-                                          </p:par>
-                                        </p:childTnLst>
-                                      </p:cTn>
-                                    </p:par>
-                                  </p:childTnLst>
-                                </p:cTn>
-                              </p:par>
-                            </p:childTnLst>
-                          </p:cTn>
-                        </p:par>
-                      </p:childTnLst>
-                    </p:cTn>
-                  </p:par>
-                  <p:par>
-                    <p:cTn id="24" fill="hold">
-                      <p:stCondLst>
-                        <p:cond delay="indefinite" evt="onClick"/>
-                      </p:stCondLst>
-                      <p:childTnLst>
-                        <p:par>
-                          <p:cTn id="25" fill="hold">
-                            <p:childTnLst>
-                              <p:par>
-                                <p:cTn id="26" presetID="10" presetClass="entr" presetSubtype="0" fill="hold" grpId="0" nodeType="withEffect">
-                                  <p:stCondLst>
-                                    <p:cond delay="0"/>
-                                  </p:stCondLst>
-                                  <p:childTnLst>
-                                    <p:par>
-                                      <p:cTn id="27" fill="hold">
-                                        <p:stCondLst>
-                                          <p:cond delay="0"/>
-                                        </p:stCondLst>
-                                        <p:childTnLst>
-                                          <p:par>
-                                            <p:cTn id="28" presetID="1" presetClass="entr" presetSubtype="0" fill="hold" grpId="0" nodeType="withEffect">
-                                              <p:childTnLst>
-                                                <p:set>
-                                                  <p:cBhvr>
-                                                    <p:cTn id="29" dur="1" fill="hold">
-                                                      <p:stCondLst>
-                                                        <p:cond delay="0"/>
-                                                      </p:stCondLst>
-                                                      <p:childTnLst/>
-                                                    </p:cTn>
-                                                    <p:tgtEl>
-                                                      <p:spTgt spid="10"/>
-                                                    </p:tgtEl>
-                                                    <p:attrNameLst>
-                                                      <p:attrName>style.visibility</p:attrName>
-                                                    </p:attrNameLst>
-                                                  </p:cBhvr>
-                                                  <p:to>
-                                                    <p:strVal val="visible"/>
-                                                  </p:to>
-                                                </p:set>
-                                              </p:childTnLst>
-                                            </p:cTn>
-                                          </p:par>
-                                          <p:par>
-                                            <p:cTn id="30" presetID="10" presetClass="entr" presetSubtype="0" fill="hold" grpId="0" nodeType="withEffect">
-                                              <p:childTnLst>
-                                                <p:animEffect transition="in" filter="fade">
-                                                  <p:cBhvr>
-                                                    <p:cTn id="31" dur="600"/>
-                                                    <p:tgtEl>
-                                                      <p:spTgt spid="10"/>
-                                                    </p:tgtEl>
-                                                  </p:cBhvr>
-                                                </p:animEffect>
-                                              </p:childTnLst>
-                                            </p:cTn>
-                                          </p:par>
-                                        </p:childTnLst>
-                                      </p:cTn>
-                                    </p:par>
-                                  </p:childTnLst>
-                                </p:cTn>
-                              </p:par>
-                              <p:par>
-                                <p:cTn id="32" presetID="10" presetClass="entr" presetSubtype="0" fill="hold" grpId="0" nodeType="withEffect">
-                                  <p:stCondLst>
-                                    <p:cond delay="0"/>
-                                  </p:stCondLst>
-                                  <p:childTnLst>
-                                    <p:par>
-                                      <p:cTn id="33" fill="hold">
-                                        <p:stCondLst>
-                                          <p:cond delay="0"/>
-                                        </p:stCondLst>
-                                        <p:childTnLst>
-                                          <p:par>
-                                            <p:cTn id="34" presetID="1" presetClass="entr" presetSubtype="0" fill="hold" grpId="0" nodeType="withEffect">
-                                              <p:childTnLst>
-                                                <p:set>
-                                                  <p:cBhvr>
-                                                    <p:cTn id="35" dur="1" fill="hold">
-                                                      <p:stCondLst>
-                                                        <p:cond delay="0"/>
-                                                      </p:stCondLst>
-                                                      <p:childTnLst/>
-                                                    </p:cTn>
-                                                    <p:tgtEl>
-                                                      <p:spTgt spid="11"/>
-                                                    </p:tgtEl>
-                                                    <p:attrNameLst>
-                                                      <p:attrName>style.visibility</p:attrName>
-                                                    </p:attrNameLst>
-                                                  </p:cBhvr>
-                                                  <p:to>
-                                                    <p:strVal val="visible"/>
-                                                  </p:to>
-                                                </p:set>
-                                              </p:childTnLst>
-                                            </p:cTn>
-                                          </p:par>
-                                          <p:par>
-                                            <p:cTn id="36" presetID="10" presetClass="entr" presetSubtype="0" fill="hold" grpId="0" nodeType="withEffect">
-                                              <p:childTnLst>
-                                                <p:animEffect transition="in" filter="fade">
-                                                  <p:cBhvr>
-                                                    <p:cTn id="37" dur="600"/>
-                                                    <p:tgtEl>
-                                                      <p:spTgt spid="11"/>
-                                                    </p:tgtEl>
-                                                  </p:cBhvr>
-                                                </p:animEffect>
-                                              </p:childTnLst>
-                                            </p:cTn>
-                                          </p:par>
-                                        </p:childTnLst>
-                                      </p:cTn>
-                                    </p:par>
-                                  </p:childTnLst>
-                                </p:cTn>
-                              </p:par>
-                              <p:par>
-                                <p:cTn id="38" presetID="10" presetClass="entr" presetSubtype="0" fill="hold" grpId="0" nodeType="withEffect">
-                                  <p:stCondLst>
-                                    <p:cond delay="0"/>
-                                  </p:stCondLst>
-                                  <p:childTnLst>
-                                    <p:par>
-                                      <p:cTn id="39" fill="hold">
-                                        <p:stCondLst>
-                                          <p:cond delay="0"/>
-                                        </p:stCondLst>
-                                        <p:childTnLst>
-                                          <p:par>
-                                            <p:cTn id="40" presetID="1" presetClass="entr" presetSubtype="0" fill="hold" grpId="0" nodeType="withEffect">
-                                              <p:childTnLst>
-                                                <p:set>
-                                                  <p:cBhvr>
-                                                    <p:cTn id="41" dur="1" fill="hold">
-                                                      <p:stCondLst>
-                                                        <p:cond delay="0"/>
-                                                      </p:stCondLst>
-                                                      <p:childTnLst/>
-                                                    </p:cTn>
-                                                    <p:tgtEl>
-                                                      <p:spTgt spid="12"/>
-                                                    </p:tgtEl>
-                                                    <p:attrNameLst>
-                                                      <p:attrName>style.visibility</p:attrName>
-                                                    </p:attrNameLst>
-                                                  </p:cBhvr>
-                                                  <p:to>
-                                                    <p:strVal val="visible"/>
-                                                  </p:to>
-                                                </p:set>
-                                              </p:childTnLst>
-                                            </p:cTn>
-                                          </p:par>
-                                          <p:par>
-                                            <p:cTn id="42" presetID="10" presetClass="entr" presetSubtype="0" fill="hold" grpId="0" nodeType="withEffect">
-                                              <p:childTnLst>
-                                                <p:animEffect transition="in" filter="fade">
-                                                  <p:cBhvr>
-                                                    <p:cTn id="43" dur="600"/>
-                                                    <p:tgtEl>
-                                                      <p:spTgt spid="12"/>
-                                                    </p:tgtEl>
-                                                  </p:cBhvr>
-                                                </p:animEffect>
-                                              </p:childTnLst>
-                                            </p:cTn>
-                                          </p:par>
-                                        </p:childTnLst>
-                                      </p:cTn>
-                                    </p:par>
-                                  </p:childTnLst>
-                                </p:cTn>
-                              </p:par>
-                            </p:childTnLst>
-                          </p:cTn>
-                        </p:par>
-                      </p:childTnLst>
-                    </p:cTn>
-                  </p:par>
-                  <p:par>
-                    <p:cTn id="44" fill="hold">
-                      <p:stCondLst>
-                        <p:cond delay="indefinite" evt="onClick"/>
-                      </p:stCondLst>
-                      <p:childTnLst>
-                        <p:par>
-                          <p:cTn id="45" fill="hold">
-                            <p:childTnLst>
-                              <p:par>
-                                <p:cTn id="46" presetID="10" presetClass="entr" presetSubtype="0" fill="hold" grpId="0" nodeType="withEffect">
-                                  <p:stCondLst>
-                                    <p:cond delay="0"/>
-                                  </p:stCondLst>
-                                  <p:childTnLst>
-                                    <p:par>
-                                      <p:cTn id="47" fill="hold">
-                                        <p:stCondLst>
-                                          <p:cond delay="0"/>
-                                        </p:stCondLst>
-                                        <p:childTnLst>
-                                          <p:par>
-                                            <p:cTn id="48" presetID="1" presetClass="entr" presetSubtype="0" fill="hold" grpId="0" nodeType="withEffect">
-                                              <p:childTnLst>
-                                                <p:set>
-                                                  <p:cBhvr>
-                                                    <p:cTn id="49" dur="1" fill="hold">
-                                                      <p:stCondLst>
-                                                        <p:cond delay="0"/>
-                                                      </p:stCondLst>
-                                                      <p:childTnLst/>
-                                                    </p:cTn>
-                                                    <p:tgtEl>
-                                                      <p:spTgt spid="13"/>
-                                                    </p:tgtEl>
-                                                    <p:attrNameLst>
-                                                      <p:attrName>style.visibility</p:attrName>
-                                                    </p:attrNameLst>
-                                                  </p:cBhvr>
-                                                  <p:to>
-                                                    <p:strVal val="visible"/>
-                                                  </p:to>
-                                                </p:set>
-                                              </p:childTnLst>
-                                            </p:cTn>
-                                          </p:par>
-                                          <p:par>
-                                            <p:cTn id="50" presetID="10" presetClass="entr" presetSubtype="0" fill="hold" grpId="0" nodeType="withEffect">
-                                              <p:childTnLst>
-                                                <p:animEffect transition="in" filter="fade">
-                                                  <p:cBhvr>
-                                                    <p:cTn id="51" dur="600"/>
-                                                    <p:tgtEl>
-                                                      <p:spTgt spid="13"/>
-                                                    </p:tgtEl>
-                                                  </p:cBhvr>
-                                                </p:animEffect>
-                                              </p:childTnLst>
-                                            </p:cTn>
-                                          </p:par>
-                                        </p:childTnLst>
-                                      </p:cTn>
-                                    </p:par>
-                                  </p:childTnLst>
-                                </p:cTn>
-                              </p:par>
-                              <p:par>
-                                <p:cTn id="52" presetID="10" presetClass="entr" presetSubtype="0" fill="hold" grpId="0" nodeType="withEffect">
-                                  <p:stCondLst>
-                                    <p:cond delay="0"/>
-                                  </p:stCondLst>
-                                  <p:childTnLst>
-                                    <p:par>
-                                      <p:cTn id="53" fill="hold">
-                                        <p:stCondLst>
-                                          <p:cond delay="0"/>
-                                        </p:stCondLst>
-                                        <p:childTnLst>
-                                          <p:par>
-                                            <p:cTn id="54" presetID="1" presetClass="entr" presetSubtype="0" fill="hold" grpId="0" nodeType="withEffect">
-                                              <p:childTnLst>
-                                                <p:set>
-                                                  <p:cBhvr>
-                                                    <p:cTn id="55" dur="1" fill="hold">
-                                                      <p:stCondLst>
-                                                        <p:cond delay="0"/>
-                                                      </p:stCondLst>
-                                                      <p:childTnLst/>
-                                                    </p:cTn>
-                                                    <p:tgtEl>
-                                                      <p:spTgt spid="14"/>
-                                                    </p:tgtEl>
-                                                    <p:attrNameLst>
-                                                      <p:attrName>style.visibility</p:attrName>
-                                                    </p:attrNameLst>
-                                                  </p:cBhvr>
-                                                  <p:to>
-                                                    <p:strVal val="visible"/>
-                                                  </p:to>
-                                                </p:set>
-                                              </p:childTnLst>
-                                            </p:cTn>
-                                          </p:par>
-                                          <p:par>
-                                            <p:cTn id="56" presetID="10" presetClass="entr" presetSubtype="0" fill="hold" grpId="0" nodeType="withEffect">
-                                              <p:childTnLst>
-                                                <p:animEffect transition="in" filter="fade">
-                                                  <p:cBhvr>
-                                                    <p:cTn id="57" dur="600"/>
-                                                    <p:tgtEl>
-                                                      <p:spTgt spid="14"/>
-                                                    </p:tgtEl>
-                                                  </p:cBhvr>
-                                                </p:animEffect>
-                                              </p:childTnLst>
-                                            </p:cTn>
-                                          </p:par>
-                                        </p:childTnLst>
-                                      </p:cTn>
-                                    </p:par>
-                                  </p:childTnLst>
-                                </p:cTn>
-                              </p:par>
-                              <p:par>
-                                <p:cTn id="58" presetID="10" presetClass="entr" presetSubtype="0" fill="hold" grpId="0" nodeType="withEffect">
-                                  <p:stCondLst>
-                                    <p:cond delay="0"/>
-                                  </p:stCondLst>
-                                  <p:childTnLst>
-                                    <p:par>
-                                      <p:cTn id="59" fill="hold">
-                                        <p:stCondLst>
-                                          <p:cond delay="0"/>
-                                        </p:stCondLst>
-                                        <p:childTnLst>
-                                          <p:par>
-                                            <p:cTn id="60" presetID="1" presetClass="entr" presetSubtype="0" fill="hold" grpId="0" nodeType="withEffect">
-                                              <p:childTnLst>
-                                                <p:set>
-                                                  <p:cBhvr>
-                                                    <p:cTn id="61" dur="1" fill="hold">
-                                                      <p:stCondLst>
-                                                        <p:cond delay="0"/>
-                                                      </p:stCondLst>
-                                                      <p:childTnLst/>
-                                                    </p:cTn>
-                                                    <p:tgtEl>
-                                                      <p:spTgt spid="15"/>
-                                                    </p:tgtEl>
-                                                    <p:attrNameLst>
-                                                      <p:attrName>style.visibility</p:attrName>
-                                                    </p:attrNameLst>
-                                                  </p:cBhvr>
-                                                  <p:to>
-                                                    <p:strVal val="visible"/>
-                                                  </p:to>
-                                                </p:set>
-                                              </p:childTnLst>
-                                            </p:cTn>
-                                          </p:par>
-                                          <p:par>
-                                            <p:cTn id="62" presetID="10" presetClass="entr" presetSubtype="0" fill="hold" grpId="0" nodeType="withEffect">
-                                              <p:childTnLst>
-                                                <p:animEffect transition="in" filter="fade">
-                                                  <p:cBhvr>
-                                                    <p:cTn id="63" dur="600"/>
-                                                    <p:tgtEl>
-                                                      <p:spTgt spid="15"/>
-                                                    </p:tgtEl>
-                                                  </p:cBhvr>
-                                                </p:animEffect>
-                                              </p:childTnLst>
-                                            </p:cTn>
-                                          </p:par>
-                                        </p:childTnLst>
-                                      </p:cTn>
-                                    </p:par>
-                                  </p:childTnLst>
-                                </p:cTn>
-                              </p:par>
-                            </p:childTnLst>
-                          </p:cTn>
-                        </p:par>
-                      </p:childTnLst>
-                    </p:cTn>
-                  </p:par>
-                </p:childTnLst>
-              </p:cTn>
-              <p:prevCondLst>
-                <p:cond evt="onClick" delay="0">
-                  <p:tgtEl>
-                    <p:sldTgt/>
-                  </p:tgtEl>
-                </p:cond>
-              </p:prevCondLst>
-              <p:nextCondLst>
-                <p:cond evt="onClick" delay="0">
-                  <p:tgtEl>
-                    <p:sldTgt/>
-                  </p:tgtEl>
-                </p:cond>
-              </p:nextCondLst>
-            </p:seq>
-          </p:childTnLst>
-        </p:cTn>
-      </p:par>
-    </p:tnLst>
-    <p:bldLst>
-      <p:bldP spid="7" grpId="0"/>
-      <p:bldP spid="8" grpId="0"/>
-      <p:bldP spid="9" grpId="0"/>
-      <p:bldP spid="10" grpId="0"/>
-      <p:bldP spid="11" grpId="0"/>
-      <p:bldP spid="12" grpId="0"/>
-      <p:bldP spid="13" grpId="0"/>
-      <p:bldP spid="14" grpId="0"/>
-      <p:bldP spid="15" grpId="0"/>
-    </p:bldLst>
-  </p:timing>
 </p:sld>
 </file>
 
@@ -9555,9 +6599,57 @@
           </a:p>
         </p:txBody>
       </p:sp>
+      <p:sp>
+        <p:nvSpPr>
+          <p:cNvPr id="6" name="Rounded Rectangle 5"/>
+          <p:cNvSpPr/>
+          <p:nvPr/>
+        </p:nvSpPr>
+        <p:spPr>
+          <a:xfrm>
+            <a:off x="505532" y="1719072"/>
+            <a:ext cx="3688950" cy="3044952"/>
+          </a:xfrm>
+          <a:prstGeom prst="roundRect">
+            <a:avLst>
+              <a:gd name="adj" fmla="val 6000"/>
+            </a:avLst>
+          </a:prstGeom>
+          <a:solidFill>
+            <a:srgbClr val="FFFFFF"/>
+          </a:solidFill>
+          <a:ln w="12700">
+            <a:solidFill>
+              <a:srgbClr val="DDCFB8"/>
+            </a:solidFill>
+          </a:ln>
+          <a:effectLst/>
+        </p:spPr>
+        <p:style>
+          <a:lnRef idx="1">
+            <a:schemeClr val="accent1"/>
+          </a:lnRef>
+          <a:fillRef idx="3">
+            <a:schemeClr val="accent1"/>
+          </a:fillRef>
+          <a:effectRef idx="2">
+            <a:schemeClr val="accent1"/>
+          </a:effectRef>
+          <a:fontRef idx="minor">
+            <a:schemeClr val="lt1"/>
+          </a:fontRef>
+        </p:style>
+        <p:txBody>
+          <a:bodyPr rtlCol="0" anchor="ctr"/>
+          <a:lstStyle/>
+          <a:p>
+            <a:pPr algn="ctr"/>
+          </a:p>
+        </p:txBody>
+      </p:sp>
       <p:pic>
         <p:nvPicPr>
-          <p:cNvPr id="6" name="Picture 5" descr="grizzly-bear.png"/>
+          <p:cNvPr id="7" name="Picture 6" descr="grizzly-bear.png"/>
           <p:cNvPicPr>
             <a:picLocks noChangeAspect="1"/>
           </p:cNvPicPr>
@@ -9574,11 +6666,6 @@
             <a:off x="569540" y="1783080"/>
             <a:ext cx="3560934" cy="2916936"/>
           </a:xfrm>
-          <a:prstGeom prst="roundRect">
-            <a:avLst>
-              <a:gd name="adj" fmla="val 6500"/>
-            </a:avLst>
-          </a:prstGeom>
           <a:prstGeom prst="rect">
             <a:avLst/>
           </a:prstGeom>
@@ -9586,7 +6673,7 @@
       </p:pic>
       <p:sp>
         <p:nvSpPr>
-          <p:cNvPr id="7" name="TextBox 6"/>
+          <p:cNvPr id="8" name="TextBox 7"/>
           <p:cNvSpPr txBox="1"/>
           <p:nvPr/>
         </p:nvSpPr>
@@ -9705,7 +6792,7 @@
       </p:sp>
       <p:sp>
         <p:nvSpPr>
-          <p:cNvPr id="8" name="TextBox 7"/>
+          <p:cNvPr id="9" name="TextBox 8"/>
           <p:cNvSpPr txBox="1"/>
           <p:nvPr/>
         </p:nvSpPr>
@@ -9827,257 +6914,6 @@
   <p:clrMapOvr>
     <a:masterClrMapping/>
   </p:clrMapOvr>
-  <p:timing>
-    <p:tnLst>
-      <p:par>
-        <p:cTn id="2" dur="indefinite" restart="never" nodeType="tmRoot">
-          <p:childTnLst>
-            <p:seq concurrent="1" nextAc="seek">
-              <p:cTn id="3" dur="indefinite" nodeType="mainSeq">
-                <p:childTnLst>
-                  <p:par>
-                    <p:cTn id="4" fill="hold">
-                      <p:stCondLst>
-                        <p:cond delay="indefinite" evt="onClick"/>
-                      </p:stCondLst>
-                      <p:childTnLst>
-                        <p:par>
-                          <p:cTn id="5" fill="hold">
-                            <p:childTnLst>
-                              <p:par>
-                                <p:cTn id="6" presetID="10" presetClass="entr" presetSubtype="0" fill="hold" grpId="0" nodeType="withEffect">
-                                  <p:stCondLst>
-                                    <p:cond delay="0"/>
-                                  </p:stCondLst>
-                                  <p:childTnLst>
-                                    <p:par>
-                                      <p:cTn id="7" fill="hold">
-                                        <p:stCondLst>
-                                          <p:cond delay="0"/>
-                                        </p:stCondLst>
-                                        <p:childTnLst>
-                                          <p:par>
-                                            <p:cTn id="8" presetID="1" presetClass="entr" presetSubtype="0" fill="hold" grpId="0" nodeType="withEffect">
-                                              <p:childTnLst>
-                                                <p:set>
-                                                  <p:cBhvr>
-                                                    <p:cTn id="9" dur="1" fill="hold">
-                                                      <p:stCondLst>
-                                                        <p:cond delay="0"/>
-                                                      </p:stCondLst>
-                                                      <p:childTnLst/>
-                                                    </p:cTn>
-                                                    <p:tgtEl>
-                                                      <p:spTgt spid="6"/>
-                                                    </p:tgtEl>
-                                                    <p:attrNameLst>
-                                                      <p:attrName>style.visibility</p:attrName>
-                                                    </p:attrNameLst>
-                                                  </p:cBhvr>
-                                                  <p:to>
-                                                    <p:strVal val="visible"/>
-                                                  </p:to>
-                                                </p:set>
-                                              </p:childTnLst>
-                                            </p:cTn>
-                                          </p:par>
-                                          <p:par>
-                                            <p:cTn id="10" presetID="10" presetClass="entr" presetSubtype="0" fill="hold" grpId="0" nodeType="withEffect">
-                                              <p:childTnLst>
-                                                <p:animEffect transition="in" filter="fade">
-                                                  <p:cBhvr>
-                                                    <p:cTn id="11" dur="600"/>
-                                                    <p:tgtEl>
-                                                      <p:spTgt spid="6"/>
-                                                    </p:tgtEl>
-                                                  </p:cBhvr>
-                                                </p:animEffect>
-                                              </p:childTnLst>
-                                            </p:cTn>
-                                          </p:par>
-                                        </p:childTnLst>
-                                      </p:cTn>
-                                    </p:par>
-                                  </p:childTnLst>
-                                </p:cTn>
-                              </p:par>
-                            </p:childTnLst>
-                          </p:cTn>
-                        </p:par>
-                      </p:childTnLst>
-                    </p:cTn>
-                  </p:par>
-                  <p:par>
-                    <p:cTn id="12" fill="hold">
-                      <p:stCondLst>
-                        <p:cond delay="indefinite" evt="onClick"/>
-                      </p:stCondLst>
-                      <p:childTnLst>
-                        <p:par>
-                          <p:cTn id="13" fill="hold">
-                            <p:childTnLst>
-                              <p:par>
-                                <p:cTn id="14" presetID="10" presetClass="entr" presetSubtype="0" fill="hold" grpId="0" nodeType="withEffect">
-                                  <p:stCondLst>
-                                    <p:cond delay="0"/>
-                                  </p:stCondLst>
-                                  <p:childTnLst>
-                                    <p:par>
-                                      <p:cTn id="15" fill="hold">
-                                        <p:stCondLst>
-                                          <p:cond delay="0"/>
-                                        </p:stCondLst>
-                                        <p:childTnLst>
-                                          <p:par>
-                                            <p:cTn id="16" presetID="1" presetClass="entr" presetSubtype="0" fill="hold" grpId="0" nodeType="withEffect">
-                                              <p:childTnLst>
-                                                <p:set>
-                                                  <p:cBhvr>
-                                                    <p:cTn id="17" dur="1" fill="hold">
-                                                      <p:stCondLst>
-                                                        <p:cond delay="0"/>
-                                                      </p:stCondLst>
-                                                      <p:childTnLst/>
-                                                    </p:cTn>
-                                                    <p:tgtEl>
-                                                      <p:spTgt spid="7"/>
-                                                    </p:tgtEl>
-                                                    <p:attrNameLst>
-                                                      <p:attrName>style.visibility</p:attrName>
-                                                    </p:attrNameLst>
-                                                  </p:cBhvr>
-                                                  <p:to>
-                                                    <p:strVal val="visible"/>
-                                                  </p:to>
-                                                </p:set>
-                                              </p:childTnLst>
-                                            </p:cTn>
-                                          </p:par>
-                                          <p:par>
-                                            <p:cTn id="18" presetID="10" presetClass="entr" presetSubtype="0" fill="hold" grpId="0" nodeType="withEffect">
-                                              <p:childTnLst>
-                                                <p:animEffect transition="in" filter="fade">
-                                                  <p:cBhvr>
-                                                    <p:cTn id="19" dur="600"/>
-                                                    <p:tgtEl>
-                                                      <p:spTgt spid="7"/>
-                                                    </p:tgtEl>
-                                                  </p:cBhvr>
-                                                </p:animEffect>
-                                              </p:childTnLst>
-                                            </p:cTn>
-                                          </p:par>
-                                        </p:childTnLst>
-                                      </p:cTn>
-                                    </p:par>
-                                  </p:childTnLst>
-                                </p:cTn>
-                              </p:par>
-                            </p:childTnLst>
-                          </p:cTn>
-                        </p:par>
-                      </p:childTnLst>
-                    </p:cTn>
-                  </p:par>
-                  <p:par>
-                    <p:cTn id="20" fill="hold">
-                      <p:stCondLst>
-                        <p:cond delay="indefinite" evt="onClick"/>
-                      </p:stCondLst>
-                      <p:childTnLst>
-                        <p:par>
-                          <p:cTn id="21" fill="hold">
-                            <p:childTnLst>
-                              <p:par>
-                                <p:cTn id="22" presetID="10" presetClass="entr" presetSubtype="0" fill="hold" grpId="0" nodeType="withEffect">
-                                  <p:stCondLst>
-                                    <p:cond delay="0"/>
-                                  </p:stCondLst>
-                                  <p:childTnLst>
-                                    <p:par>
-                                      <p:cTn id="23" fill="hold">
-                                        <p:stCondLst>
-                                          <p:cond delay="0"/>
-                                        </p:stCondLst>
-                                        <p:childTnLst>
-                                          <p:par>
-                                            <p:cTn id="24" presetID="1" presetClass="entr" presetSubtype="0" fill="hold" grpId="0" nodeType="withEffect">
-                                              <p:childTnLst>
-                                                <p:set>
-                                                  <p:cBhvr>
-                                                    <p:cTn id="25" dur="1" fill="hold">
-                                                      <p:stCondLst>
-                                                        <p:cond delay="0"/>
-                                                      </p:stCondLst>
-                                                      <p:childTnLst/>
-                                                    </p:cTn>
-                                                    <p:tgtEl>
-                                                      <p:spTgt spid="8"/>
-                                                    </p:tgtEl>
-                                                    <p:attrNameLst>
-                                                      <p:attrName>style.visibility</p:attrName>
-                                                    </p:attrNameLst>
-                                                  </p:cBhvr>
-                                                  <p:to>
-                                                    <p:strVal val="visible"/>
-                                                  </p:to>
-                                                </p:set>
-                                              </p:childTnLst>
-                                            </p:cTn>
-                                          </p:par>
-                                          <p:par>
-                                            <p:cTn id="26" presetID="10" presetClass="entr" presetSubtype="0" fill="hold" grpId="0" nodeType="withEffect">
-                                              <p:childTnLst>
-                                                <p:animEffect transition="in" filter="fade">
-                                                  <p:cBhvr>
-                                                    <p:cTn id="27" dur="600"/>
-                                                    <p:tgtEl>
-                                                      <p:spTgt spid="8"/>
-                                                    </p:tgtEl>
-                                                  </p:cBhvr>
-                                                </p:animEffect>
-                                              </p:childTnLst>
-                                            </p:cTn>
-                                          </p:par>
-                                        </p:childTnLst>
-                                      </p:cTn>
-                                    </p:par>
-                                  </p:childTnLst>
-                                </p:cTn>
-                              </p:par>
-                            </p:childTnLst>
-                          </p:cTn>
-                        </p:par>
-                      </p:childTnLst>
-                    </p:cTn>
-                  </p:par>
-                </p:childTnLst>
-              </p:cTn>
-              <p:prevCondLst>
-                <p:cond evt="onClick" delay="0">
-                  <p:tgtEl>
-                    <p:sldTgt/>
-                  </p:tgtEl>
-                </p:cond>
-              </p:prevCondLst>
-              <p:nextCondLst>
-                <p:cond evt="onClick" delay="0">
-                  <p:tgtEl>
-                    <p:sldTgt/>
-                  </p:tgtEl>
-                </p:cond>
-              </p:nextCondLst>
-            </p:seq>
-          </p:childTnLst>
-        </p:cTn>
-      </p:par>
-    </p:tnLst>
-    <p:bldLst>
-      <p:bldP spid="6" grpId="0"/>
-      <p:bldP spid="7" grpId="0"/>
-      <p:bldP spid="8" grpId="0"/>
-    </p:bldLst>
-  </p:timing>
 </p:sld>
 </file>
 
@@ -10271,9 +7107,57 @@
           </a:p>
         </p:txBody>
       </p:sp>
+      <p:sp>
+        <p:nvSpPr>
+          <p:cNvPr id="6" name="Rounded Rectangle 5"/>
+          <p:cNvSpPr/>
+          <p:nvPr/>
+        </p:nvSpPr>
+        <p:spPr>
+          <a:xfrm>
+            <a:off x="502920" y="1993106"/>
+            <a:ext cx="4791455" cy="3557587"/>
+          </a:xfrm>
+          <a:prstGeom prst="roundRect">
+            <a:avLst>
+              <a:gd name="adj" fmla="val 6000"/>
+            </a:avLst>
+          </a:prstGeom>
+          <a:solidFill>
+            <a:srgbClr val="FFFFFF"/>
+          </a:solidFill>
+          <a:ln w="12700">
+            <a:solidFill>
+              <a:srgbClr val="DDCFB8"/>
+            </a:solidFill>
+          </a:ln>
+          <a:effectLst/>
+        </p:spPr>
+        <p:style>
+          <a:lnRef idx="1">
+            <a:schemeClr val="accent1"/>
+          </a:lnRef>
+          <a:fillRef idx="3">
+            <a:schemeClr val="accent1"/>
+          </a:fillRef>
+          <a:effectRef idx="2">
+            <a:schemeClr val="accent1"/>
+          </a:effectRef>
+          <a:fontRef idx="minor">
+            <a:schemeClr val="lt1"/>
+          </a:fontRef>
+        </p:style>
+        <p:txBody>
+          <a:bodyPr rtlCol="0" anchor="ctr"/>
+          <a:lstStyle/>
+          <a:p>
+            <a:pPr algn="ctr"/>
+          </a:p>
+        </p:txBody>
+      </p:sp>
       <p:pic>
         <p:nvPicPr>
-          <p:cNvPr id="6" name="Picture 5" descr="final-shelter-sketch.jpg"/>
+          <p:cNvPr id="7" name="Picture 6" descr="final-shelter-sketch.jpg"/>
           <p:cNvPicPr>
             <a:picLocks noChangeAspect="1"/>
           </p:cNvPicPr>
@@ -10290,11 +7174,6 @@
             <a:off x="566928" y="2057114"/>
             <a:ext cx="4663440" cy="3429571"/>
           </a:xfrm>
-          <a:prstGeom prst="roundRect">
-            <a:avLst>
-              <a:gd name="adj" fmla="val 6500"/>
-            </a:avLst>
-          </a:prstGeom>
           <a:prstGeom prst="rect">
             <a:avLst/>
           </a:prstGeom>
@@ -10302,7 +7181,7 @@
       </p:pic>
       <p:sp>
         <p:nvSpPr>
-          <p:cNvPr id="7" name="Oval 6"/>
+          <p:cNvPr id="8" name="Oval 7"/>
           <p:cNvSpPr/>
           <p:nvPr/>
         </p:nvSpPr>
@@ -10346,7 +7225,7 @@
       </p:sp>
       <p:sp>
         <p:nvSpPr>
-          <p:cNvPr id="8" name="TextBox 7"/>
+          <p:cNvPr id="9" name="TextBox 8"/>
           <p:cNvSpPr txBox="1"/>
           <p:nvPr/>
         </p:nvSpPr>
@@ -10401,7 +7280,7 @@
       </p:sp>
       <p:sp>
         <p:nvSpPr>
-          <p:cNvPr id="9" name="Oval 8"/>
+          <p:cNvPr id="10" name="Oval 9"/>
           <p:cNvSpPr/>
           <p:nvPr/>
         </p:nvSpPr>
@@ -10445,7 +7324,7 @@
       </p:sp>
       <p:sp>
         <p:nvSpPr>
-          <p:cNvPr id="10" name="TextBox 9"/>
+          <p:cNvPr id="11" name="TextBox 10"/>
           <p:cNvSpPr txBox="1"/>
           <p:nvPr/>
         </p:nvSpPr>
@@ -10500,7 +7379,7 @@
       </p:sp>
       <p:sp>
         <p:nvSpPr>
-          <p:cNvPr id="11" name="Oval 10"/>
+          <p:cNvPr id="12" name="Oval 11"/>
           <p:cNvSpPr/>
           <p:nvPr/>
         </p:nvSpPr>
@@ -10544,7 +7423,7 @@
       </p:sp>
       <p:sp>
         <p:nvSpPr>
-          <p:cNvPr id="12" name="TextBox 11"/>
+          <p:cNvPr id="13" name="TextBox 12"/>
           <p:cNvSpPr txBox="1"/>
           <p:nvPr/>
         </p:nvSpPr>
@@ -10599,7 +7478,7 @@
       </p:sp>
       <p:sp>
         <p:nvSpPr>
-          <p:cNvPr id="13" name="Oval 12"/>
+          <p:cNvPr id="14" name="Oval 13"/>
           <p:cNvSpPr/>
           <p:nvPr/>
         </p:nvSpPr>
@@ -10643,7 +7522,7 @@
       </p:sp>
       <p:sp>
         <p:nvSpPr>
-          <p:cNvPr id="14" name="TextBox 13"/>
+          <p:cNvPr id="15" name="TextBox 14"/>
           <p:cNvSpPr txBox="1"/>
           <p:nvPr/>
         </p:nvSpPr>
@@ -10698,7 +7577,7 @@
       </p:sp>
       <p:sp>
         <p:nvSpPr>
-          <p:cNvPr id="15" name="Oval 14"/>
+          <p:cNvPr id="16" name="Oval 15"/>
           <p:cNvSpPr/>
           <p:nvPr/>
         </p:nvSpPr>
@@ -10742,7 +7621,7 @@
       </p:sp>
       <p:sp>
         <p:nvSpPr>
-          <p:cNvPr id="16" name="TextBox 15"/>
+          <p:cNvPr id="17" name="TextBox 16"/>
           <p:cNvSpPr txBox="1"/>
           <p:nvPr/>
         </p:nvSpPr>
@@ -10797,7 +7676,7 @@
       </p:sp>
       <p:sp>
         <p:nvSpPr>
-          <p:cNvPr id="17" name="Oval 16"/>
+          <p:cNvPr id="18" name="Oval 17"/>
           <p:cNvSpPr/>
           <p:nvPr/>
         </p:nvSpPr>
@@ -10841,7 +7720,7 @@
       </p:sp>
       <p:sp>
         <p:nvSpPr>
-          <p:cNvPr id="18" name="TextBox 17"/>
+          <p:cNvPr id="19" name="TextBox 18"/>
           <p:cNvSpPr txBox="1"/>
           <p:nvPr/>
         </p:nvSpPr>
@@ -10899,897 +7778,6 @@
   <p:clrMapOvr>
     <a:masterClrMapping/>
   </p:clrMapOvr>
-  <p:timing>
-    <p:tnLst>
-      <p:par>
-        <p:cTn id="2" dur="indefinite" restart="never" nodeType="tmRoot">
-          <p:childTnLst>
-            <p:seq concurrent="1" nextAc="seek">
-              <p:cTn id="3" dur="indefinite" nodeType="mainSeq">
-                <p:childTnLst>
-                  <p:par>
-                    <p:cTn id="4" fill="hold">
-                      <p:stCondLst>
-                        <p:cond delay="indefinite" evt="onClick"/>
-                      </p:stCondLst>
-                      <p:childTnLst>
-                        <p:par>
-                          <p:cTn id="5" fill="hold">
-                            <p:childTnLst>
-                              <p:par>
-                                <p:cTn id="6" presetID="10" presetClass="entr" presetSubtype="0" fill="hold" grpId="0" nodeType="withEffect">
-                                  <p:stCondLst>
-                                    <p:cond delay="0"/>
-                                  </p:stCondLst>
-                                  <p:childTnLst>
-                                    <p:par>
-                                      <p:cTn id="7" fill="hold">
-                                        <p:stCondLst>
-                                          <p:cond delay="0"/>
-                                        </p:stCondLst>
-                                        <p:childTnLst>
-                                          <p:par>
-                                            <p:cTn id="8" presetID="1" presetClass="entr" presetSubtype="0" fill="hold" grpId="0" nodeType="withEffect">
-                                              <p:childTnLst>
-                                                <p:set>
-                                                  <p:cBhvr>
-                                                    <p:cTn id="9" dur="1" fill="hold">
-                                                      <p:stCondLst>
-                                                        <p:cond delay="0"/>
-                                                      </p:stCondLst>
-                                                      <p:childTnLst/>
-                                                    </p:cTn>
-                                                    <p:tgtEl>
-                                                      <p:spTgt spid="6"/>
-                                                    </p:tgtEl>
-                                                    <p:attrNameLst>
-                                                      <p:attrName>style.visibility</p:attrName>
-                                                    </p:attrNameLst>
-                                                  </p:cBhvr>
-                                                  <p:to>
-                                                    <p:strVal val="visible"/>
-                                                  </p:to>
-                                                </p:set>
-                                              </p:childTnLst>
-                                            </p:cTn>
-                                          </p:par>
-                                          <p:par>
-                                            <p:cTn id="10" presetID="10" presetClass="entr" presetSubtype="0" fill="hold" grpId="0" nodeType="withEffect">
-                                              <p:childTnLst>
-                                                <p:animEffect transition="in" filter="fade">
-                                                  <p:cBhvr>
-                                                    <p:cTn id="11" dur="600"/>
-                                                    <p:tgtEl>
-                                                      <p:spTgt spid="6"/>
-                                                    </p:tgtEl>
-                                                  </p:cBhvr>
-                                                </p:animEffect>
-                                              </p:childTnLst>
-                                            </p:cTn>
-                                          </p:par>
-                                        </p:childTnLst>
-                                      </p:cTn>
-                                    </p:par>
-                                  </p:childTnLst>
-                                </p:cTn>
-                              </p:par>
-                            </p:childTnLst>
-                          </p:cTn>
-                        </p:par>
-                      </p:childTnLst>
-                    </p:cTn>
-                  </p:par>
-                  <p:par>
-                    <p:cTn id="12" fill="hold">
-                      <p:stCondLst>
-                        <p:cond delay="indefinite" evt="onClick"/>
-                      </p:stCondLst>
-                      <p:childTnLst>
-                        <p:par>
-                          <p:cTn id="13" fill="hold">
-                            <p:childTnLst>
-                              <p:par>
-                                <p:cTn id="14" presetID="10" presetClass="entr" presetSubtype="0" fill="hold" grpId="0" nodeType="withEffect">
-                                  <p:stCondLst>
-                                    <p:cond delay="0"/>
-                                  </p:stCondLst>
-                                  <p:childTnLst>
-                                    <p:par>
-                                      <p:cTn id="15" fill="hold">
-                                        <p:stCondLst>
-                                          <p:cond delay="0"/>
-                                        </p:stCondLst>
-                                        <p:childTnLst>
-                                          <p:par>
-                                            <p:cTn id="16" presetID="1" presetClass="entr" presetSubtype="0" fill="hold" grpId="0" nodeType="withEffect">
-                                              <p:childTnLst>
-                                                <p:set>
-                                                  <p:cBhvr>
-                                                    <p:cTn id="17" dur="1" fill="hold">
-                                                      <p:stCondLst>
-                                                        <p:cond delay="0"/>
-                                                      </p:stCondLst>
-                                                      <p:childTnLst/>
-                                                    </p:cTn>
-                                                    <p:tgtEl>
-                                                      <p:spTgt spid="7"/>
-                                                    </p:tgtEl>
-                                                    <p:attrNameLst>
-                                                      <p:attrName>style.visibility</p:attrName>
-                                                    </p:attrNameLst>
-                                                  </p:cBhvr>
-                                                  <p:to>
-                                                    <p:strVal val="visible"/>
-                                                  </p:to>
-                                                </p:set>
-                                              </p:childTnLst>
-                                            </p:cTn>
-                                          </p:par>
-                                          <p:par>
-                                            <p:cTn id="18" presetID="10" presetClass="entr" presetSubtype="0" fill="hold" grpId="0" nodeType="withEffect">
-                                              <p:childTnLst>
-                                                <p:animEffect transition="in" filter="fade">
-                                                  <p:cBhvr>
-                                                    <p:cTn id="19" dur="600"/>
-                                                    <p:tgtEl>
-                                                      <p:spTgt spid="7"/>
-                                                    </p:tgtEl>
-                                                  </p:cBhvr>
-                                                </p:animEffect>
-                                              </p:childTnLst>
-                                            </p:cTn>
-                                          </p:par>
-                                        </p:childTnLst>
-                                      </p:cTn>
-                                    </p:par>
-                                  </p:childTnLst>
-                                </p:cTn>
-                              </p:par>
-                              <p:par>
-                                <p:cTn id="20" presetID="10" presetClass="entr" presetSubtype="0" fill="hold" grpId="0" nodeType="withEffect">
-                                  <p:stCondLst>
-                                    <p:cond delay="0"/>
-                                  </p:stCondLst>
-                                  <p:childTnLst>
-                                    <p:par>
-                                      <p:cTn id="21" fill="hold">
-                                        <p:stCondLst>
-                                          <p:cond delay="0"/>
-                                        </p:stCondLst>
-                                        <p:childTnLst>
-                                          <p:par>
-                                            <p:cTn id="22" presetID="1" presetClass="entr" presetSubtype="0" fill="hold" grpId="0" nodeType="withEffect">
-                                              <p:childTnLst>
-                                                <p:set>
-                                                  <p:cBhvr>
-                                                    <p:cTn id="23" dur="1" fill="hold">
-                                                      <p:stCondLst>
-                                                        <p:cond delay="0"/>
-                                                      </p:stCondLst>
-                                                      <p:childTnLst/>
-                                                    </p:cTn>
-                                                    <p:tgtEl>
-                                                      <p:spTgt spid="8"/>
-                                                    </p:tgtEl>
-                                                    <p:attrNameLst>
-                                                      <p:attrName>style.visibility</p:attrName>
-                                                    </p:attrNameLst>
-                                                  </p:cBhvr>
-                                                  <p:to>
-                                                    <p:strVal val="visible"/>
-                                                  </p:to>
-                                                </p:set>
-                                              </p:childTnLst>
-                                            </p:cTn>
-                                          </p:par>
-                                          <p:par>
-                                            <p:cTn id="24" presetID="10" presetClass="entr" presetSubtype="0" fill="hold" grpId="0" nodeType="withEffect">
-                                              <p:childTnLst>
-                                                <p:animEffect transition="in" filter="fade">
-                                                  <p:cBhvr>
-                                                    <p:cTn id="25" dur="600"/>
-                                                    <p:tgtEl>
-                                                      <p:spTgt spid="8"/>
-                                                    </p:tgtEl>
-                                                  </p:cBhvr>
-                                                </p:animEffect>
-                                              </p:childTnLst>
-                                            </p:cTn>
-                                          </p:par>
-                                        </p:childTnLst>
-                                      </p:cTn>
-                                    </p:par>
-                                  </p:childTnLst>
-                                </p:cTn>
-                              </p:par>
-                            </p:childTnLst>
-                          </p:cTn>
-                        </p:par>
-                      </p:childTnLst>
-                    </p:cTn>
-                  </p:par>
-                  <p:par>
-                    <p:cTn id="26" fill="hold">
-                      <p:stCondLst>
-                        <p:cond delay="indefinite" evt="onClick"/>
-                      </p:stCondLst>
-                      <p:childTnLst>
-                        <p:par>
-                          <p:cTn id="27" fill="hold">
-                            <p:childTnLst>
-                              <p:par>
-                                <p:cTn id="28" presetID="10" presetClass="entr" presetSubtype="0" fill="hold" grpId="0" nodeType="withEffect">
-                                  <p:stCondLst>
-                                    <p:cond delay="0"/>
-                                  </p:stCondLst>
-                                  <p:childTnLst>
-                                    <p:par>
-                                      <p:cTn id="29" fill="hold">
-                                        <p:stCondLst>
-                                          <p:cond delay="0"/>
-                                        </p:stCondLst>
-                                        <p:childTnLst>
-                                          <p:par>
-                                            <p:cTn id="30" presetID="1" presetClass="entr" presetSubtype="0" fill="hold" grpId="0" nodeType="withEffect">
-                                              <p:childTnLst>
-                                                <p:set>
-                                                  <p:cBhvr>
-                                                    <p:cTn id="31" dur="1" fill="hold">
-                                                      <p:stCondLst>
-                                                        <p:cond delay="0"/>
-                                                      </p:stCondLst>
-                                                      <p:childTnLst/>
-                                                    </p:cTn>
-                                                    <p:tgtEl>
-                                                      <p:spTgt spid="9"/>
-                                                    </p:tgtEl>
-                                                    <p:attrNameLst>
-                                                      <p:attrName>style.visibility</p:attrName>
-                                                    </p:attrNameLst>
-                                                  </p:cBhvr>
-                                                  <p:to>
-                                                    <p:strVal val="visible"/>
-                                                  </p:to>
-                                                </p:set>
-                                              </p:childTnLst>
-                                            </p:cTn>
-                                          </p:par>
-                                          <p:par>
-                                            <p:cTn id="32" presetID="10" presetClass="entr" presetSubtype="0" fill="hold" grpId="0" nodeType="withEffect">
-                                              <p:childTnLst>
-                                                <p:animEffect transition="in" filter="fade">
-                                                  <p:cBhvr>
-                                                    <p:cTn id="33" dur="600"/>
-                                                    <p:tgtEl>
-                                                      <p:spTgt spid="9"/>
-                                                    </p:tgtEl>
-                                                  </p:cBhvr>
-                                                </p:animEffect>
-                                              </p:childTnLst>
-                                            </p:cTn>
-                                          </p:par>
-                                        </p:childTnLst>
-                                      </p:cTn>
-                                    </p:par>
-                                  </p:childTnLst>
-                                </p:cTn>
-                              </p:par>
-                              <p:par>
-                                <p:cTn id="34" presetID="10" presetClass="entr" presetSubtype="0" fill="hold" grpId="0" nodeType="withEffect">
-                                  <p:stCondLst>
-                                    <p:cond delay="0"/>
-                                  </p:stCondLst>
-                                  <p:childTnLst>
-                                    <p:par>
-                                      <p:cTn id="35" fill="hold">
-                                        <p:stCondLst>
-                                          <p:cond delay="0"/>
-                                        </p:stCondLst>
-                                        <p:childTnLst>
-                                          <p:par>
-                                            <p:cTn id="36" presetID="1" presetClass="entr" presetSubtype="0" fill="hold" grpId="0" nodeType="withEffect">
-                                              <p:childTnLst>
-                                                <p:set>
-                                                  <p:cBhvr>
-                                                    <p:cTn id="37" dur="1" fill="hold">
-                                                      <p:stCondLst>
-                                                        <p:cond delay="0"/>
-                                                      </p:stCondLst>
-                                                      <p:childTnLst/>
-                                                    </p:cTn>
-                                                    <p:tgtEl>
-                                                      <p:spTgt spid="10"/>
-                                                    </p:tgtEl>
-                                                    <p:attrNameLst>
-                                                      <p:attrName>style.visibility</p:attrName>
-                                                    </p:attrNameLst>
-                                                  </p:cBhvr>
-                                                  <p:to>
-                                                    <p:strVal val="visible"/>
-                                                  </p:to>
-                                                </p:set>
-                                              </p:childTnLst>
-                                            </p:cTn>
-                                          </p:par>
-                                          <p:par>
-                                            <p:cTn id="38" presetID="10" presetClass="entr" presetSubtype="0" fill="hold" grpId="0" nodeType="withEffect">
-                                              <p:childTnLst>
-                                                <p:animEffect transition="in" filter="fade">
-                                                  <p:cBhvr>
-                                                    <p:cTn id="39" dur="600"/>
-                                                    <p:tgtEl>
-                                                      <p:spTgt spid="10"/>
-                                                    </p:tgtEl>
-                                                  </p:cBhvr>
-                                                </p:animEffect>
-                                              </p:childTnLst>
-                                            </p:cTn>
-                                          </p:par>
-                                        </p:childTnLst>
-                                      </p:cTn>
-                                    </p:par>
-                                  </p:childTnLst>
-                                </p:cTn>
-                              </p:par>
-                            </p:childTnLst>
-                          </p:cTn>
-                        </p:par>
-                      </p:childTnLst>
-                    </p:cTn>
-                  </p:par>
-                  <p:par>
-                    <p:cTn id="40" fill="hold">
-                      <p:stCondLst>
-                        <p:cond delay="indefinite" evt="onClick"/>
-                      </p:stCondLst>
-                      <p:childTnLst>
-                        <p:par>
-                          <p:cTn id="41" fill="hold">
-                            <p:childTnLst>
-                              <p:par>
-                                <p:cTn id="42" presetID="10" presetClass="entr" presetSubtype="0" fill="hold" grpId="0" nodeType="withEffect">
-                                  <p:stCondLst>
-                                    <p:cond delay="0"/>
-                                  </p:stCondLst>
-                                  <p:childTnLst>
-                                    <p:par>
-                                      <p:cTn id="43" fill="hold">
-                                        <p:stCondLst>
-                                          <p:cond delay="0"/>
-                                        </p:stCondLst>
-                                        <p:childTnLst>
-                                          <p:par>
-                                            <p:cTn id="44" presetID="1" presetClass="entr" presetSubtype="0" fill="hold" grpId="0" nodeType="withEffect">
-                                              <p:childTnLst>
-                                                <p:set>
-                                                  <p:cBhvr>
-                                                    <p:cTn id="45" dur="1" fill="hold">
-                                                      <p:stCondLst>
-                                                        <p:cond delay="0"/>
-                                                      </p:stCondLst>
-                                                      <p:childTnLst/>
-                                                    </p:cTn>
-                                                    <p:tgtEl>
-                                                      <p:spTgt spid="11"/>
-                                                    </p:tgtEl>
-                                                    <p:attrNameLst>
-                                                      <p:attrName>style.visibility</p:attrName>
-                                                    </p:attrNameLst>
-                                                  </p:cBhvr>
-                                                  <p:to>
-                                                    <p:strVal val="visible"/>
-                                                  </p:to>
-                                                </p:set>
-                                              </p:childTnLst>
-                                            </p:cTn>
-                                          </p:par>
-                                          <p:par>
-                                            <p:cTn id="46" presetID="10" presetClass="entr" presetSubtype="0" fill="hold" grpId="0" nodeType="withEffect">
-                                              <p:childTnLst>
-                                                <p:animEffect transition="in" filter="fade">
-                                                  <p:cBhvr>
-                                                    <p:cTn id="47" dur="600"/>
-                                                    <p:tgtEl>
-                                                      <p:spTgt spid="11"/>
-                                                    </p:tgtEl>
-                                                  </p:cBhvr>
-                                                </p:animEffect>
-                                              </p:childTnLst>
-                                            </p:cTn>
-                                          </p:par>
-                                        </p:childTnLst>
-                                      </p:cTn>
-                                    </p:par>
-                                  </p:childTnLst>
-                                </p:cTn>
-                              </p:par>
-                              <p:par>
-                                <p:cTn id="48" presetID="10" presetClass="entr" presetSubtype="0" fill="hold" grpId="0" nodeType="withEffect">
-                                  <p:stCondLst>
-                                    <p:cond delay="0"/>
-                                  </p:stCondLst>
-                                  <p:childTnLst>
-                                    <p:par>
-                                      <p:cTn id="49" fill="hold">
-                                        <p:stCondLst>
-                                          <p:cond delay="0"/>
-                                        </p:stCondLst>
-                                        <p:childTnLst>
-                                          <p:par>
-                                            <p:cTn id="50" presetID="1" presetClass="entr" presetSubtype="0" fill="hold" grpId="0" nodeType="withEffect">
-                                              <p:childTnLst>
-                                                <p:set>
-                                                  <p:cBhvr>
-                                                    <p:cTn id="51" dur="1" fill="hold">
-                                                      <p:stCondLst>
-                                                        <p:cond delay="0"/>
-                                                      </p:stCondLst>
-                                                      <p:childTnLst/>
-                                                    </p:cTn>
-                                                    <p:tgtEl>
-                                                      <p:spTgt spid="12"/>
-                                                    </p:tgtEl>
-                                                    <p:attrNameLst>
-                                                      <p:attrName>style.visibility</p:attrName>
-                                                    </p:attrNameLst>
-                                                  </p:cBhvr>
-                                                  <p:to>
-                                                    <p:strVal val="visible"/>
-                                                  </p:to>
-                                                </p:set>
-                                              </p:childTnLst>
-                                            </p:cTn>
-                                          </p:par>
-                                          <p:par>
-                                            <p:cTn id="52" presetID="10" presetClass="entr" presetSubtype="0" fill="hold" grpId="0" nodeType="withEffect">
-                                              <p:childTnLst>
-                                                <p:animEffect transition="in" filter="fade">
-                                                  <p:cBhvr>
-                                                    <p:cTn id="53" dur="600"/>
-                                                    <p:tgtEl>
-                                                      <p:spTgt spid="12"/>
-                                                    </p:tgtEl>
-                                                  </p:cBhvr>
-                                                </p:animEffect>
-                                              </p:childTnLst>
-                                            </p:cTn>
-                                          </p:par>
-                                        </p:childTnLst>
-                                      </p:cTn>
-                                    </p:par>
-                                  </p:childTnLst>
-                                </p:cTn>
-                              </p:par>
-                            </p:childTnLst>
-                          </p:cTn>
-                        </p:par>
-                      </p:childTnLst>
-                    </p:cTn>
-                  </p:par>
-                  <p:par>
-                    <p:cTn id="54" fill="hold">
-                      <p:stCondLst>
-                        <p:cond delay="indefinite" evt="onClick"/>
-                      </p:stCondLst>
-                      <p:childTnLst>
-                        <p:par>
-                          <p:cTn id="55" fill="hold">
-                            <p:childTnLst>
-                              <p:par>
-                                <p:cTn id="56" presetID="10" presetClass="entr" presetSubtype="0" fill="hold" grpId="0" nodeType="withEffect">
-                                  <p:stCondLst>
-                                    <p:cond delay="0"/>
-                                  </p:stCondLst>
-                                  <p:childTnLst>
-                                    <p:par>
-                                      <p:cTn id="57" fill="hold">
-                                        <p:stCondLst>
-                                          <p:cond delay="0"/>
-                                        </p:stCondLst>
-                                        <p:childTnLst>
-                                          <p:par>
-                                            <p:cTn id="58" presetID="1" presetClass="entr" presetSubtype="0" fill="hold" grpId="0" nodeType="withEffect">
-                                              <p:childTnLst>
-                                                <p:set>
-                                                  <p:cBhvr>
-                                                    <p:cTn id="59" dur="1" fill="hold">
-                                                      <p:stCondLst>
-                                                        <p:cond delay="0"/>
-                                                      </p:stCondLst>
-                                                      <p:childTnLst/>
-                                                    </p:cTn>
-                                                    <p:tgtEl>
-                                                      <p:spTgt spid="13"/>
-                                                    </p:tgtEl>
-                                                    <p:attrNameLst>
-                                                      <p:attrName>style.visibility</p:attrName>
-                                                    </p:attrNameLst>
-                                                  </p:cBhvr>
-                                                  <p:to>
-                                                    <p:strVal val="visible"/>
-                                                  </p:to>
-                                                </p:set>
-                                              </p:childTnLst>
-                                            </p:cTn>
-                                          </p:par>
-                                          <p:par>
-                                            <p:cTn id="60" presetID="10" presetClass="entr" presetSubtype="0" fill="hold" grpId="0" nodeType="withEffect">
-                                              <p:childTnLst>
-                                                <p:animEffect transition="in" filter="fade">
-                                                  <p:cBhvr>
-                                                    <p:cTn id="61" dur="600"/>
-                                                    <p:tgtEl>
-                                                      <p:spTgt spid="13"/>
-                                                    </p:tgtEl>
-                                                  </p:cBhvr>
-                                                </p:animEffect>
-                                              </p:childTnLst>
-                                            </p:cTn>
-                                          </p:par>
-                                        </p:childTnLst>
-                                      </p:cTn>
-                                    </p:par>
-                                  </p:childTnLst>
-                                </p:cTn>
-                              </p:par>
-                              <p:par>
-                                <p:cTn id="62" presetID="10" presetClass="entr" presetSubtype="0" fill="hold" grpId="0" nodeType="withEffect">
-                                  <p:stCondLst>
-                                    <p:cond delay="0"/>
-                                  </p:stCondLst>
-                                  <p:childTnLst>
-                                    <p:par>
-                                      <p:cTn id="63" fill="hold">
-                                        <p:stCondLst>
-                                          <p:cond delay="0"/>
-                                        </p:stCondLst>
-                                        <p:childTnLst>
-                                          <p:par>
-                                            <p:cTn id="64" presetID="1" presetClass="entr" presetSubtype="0" fill="hold" grpId="0" nodeType="withEffect">
-                                              <p:childTnLst>
-                                                <p:set>
-                                                  <p:cBhvr>
-                                                    <p:cTn id="65" dur="1" fill="hold">
-                                                      <p:stCondLst>
-                                                        <p:cond delay="0"/>
-                                                      </p:stCondLst>
-                                                      <p:childTnLst/>
-                                                    </p:cTn>
-                                                    <p:tgtEl>
-                                                      <p:spTgt spid="14"/>
-                                                    </p:tgtEl>
-                                                    <p:attrNameLst>
-                                                      <p:attrName>style.visibility</p:attrName>
-                                                    </p:attrNameLst>
-                                                  </p:cBhvr>
-                                                  <p:to>
-                                                    <p:strVal val="visible"/>
-                                                  </p:to>
-                                                </p:set>
-                                              </p:childTnLst>
-                                            </p:cTn>
-                                          </p:par>
-                                          <p:par>
-                                            <p:cTn id="66" presetID="10" presetClass="entr" presetSubtype="0" fill="hold" grpId="0" nodeType="withEffect">
-                                              <p:childTnLst>
-                                                <p:animEffect transition="in" filter="fade">
-                                                  <p:cBhvr>
-                                                    <p:cTn id="67" dur="600"/>
-                                                    <p:tgtEl>
-                                                      <p:spTgt spid="14"/>
-                                                    </p:tgtEl>
-                                                  </p:cBhvr>
-                                                </p:animEffect>
-                                              </p:childTnLst>
-                                            </p:cTn>
-                                          </p:par>
-                                        </p:childTnLst>
-                                      </p:cTn>
-                                    </p:par>
-                                  </p:childTnLst>
-                                </p:cTn>
-                              </p:par>
-                            </p:childTnLst>
-                          </p:cTn>
-                        </p:par>
-                      </p:childTnLst>
-                    </p:cTn>
-                  </p:par>
-                  <p:par>
-                    <p:cTn id="68" fill="hold">
-                      <p:stCondLst>
-                        <p:cond delay="indefinite" evt="onClick"/>
-                      </p:stCondLst>
-                      <p:childTnLst>
-                        <p:par>
-                          <p:cTn id="69" fill="hold">
-                            <p:childTnLst>
-                              <p:par>
-                                <p:cTn id="70" presetID="10" presetClass="entr" presetSubtype="0" fill="hold" grpId="0" nodeType="withEffect">
-                                  <p:stCondLst>
-                                    <p:cond delay="0"/>
-                                  </p:stCondLst>
-                                  <p:childTnLst>
-                                    <p:par>
-                                      <p:cTn id="71" fill="hold">
-                                        <p:stCondLst>
-                                          <p:cond delay="0"/>
-                                        </p:stCondLst>
-                                        <p:childTnLst>
-                                          <p:par>
-                                            <p:cTn id="72" presetID="1" presetClass="entr" presetSubtype="0" fill="hold" grpId="0" nodeType="withEffect">
-                                              <p:childTnLst>
-                                                <p:set>
-                                                  <p:cBhvr>
-                                                    <p:cTn id="73" dur="1" fill="hold">
-                                                      <p:stCondLst>
-                                                        <p:cond delay="0"/>
-                                                      </p:stCondLst>
-                                                      <p:childTnLst/>
-                                                    </p:cTn>
-                                                    <p:tgtEl>
-                                                      <p:spTgt spid="15"/>
-                                                    </p:tgtEl>
-                                                    <p:attrNameLst>
-                                                      <p:attrName>style.visibility</p:attrName>
-                                                    </p:attrNameLst>
-                                                  </p:cBhvr>
-                                                  <p:to>
-                                                    <p:strVal val="visible"/>
-                                                  </p:to>
-                                                </p:set>
-                                              </p:childTnLst>
-                                            </p:cTn>
-                                          </p:par>
-                                          <p:par>
-                                            <p:cTn id="74" presetID="10" presetClass="entr" presetSubtype="0" fill="hold" grpId="0" nodeType="withEffect">
-                                              <p:childTnLst>
-                                                <p:animEffect transition="in" filter="fade">
-                                                  <p:cBhvr>
-                                                    <p:cTn id="75" dur="600"/>
-                                                    <p:tgtEl>
-                                                      <p:spTgt spid="15"/>
-                                                    </p:tgtEl>
-                                                  </p:cBhvr>
-                                                </p:animEffect>
-                                              </p:childTnLst>
-                                            </p:cTn>
-                                          </p:par>
-                                        </p:childTnLst>
-                                      </p:cTn>
-                                    </p:par>
-                                  </p:childTnLst>
-                                </p:cTn>
-                              </p:par>
-                              <p:par>
-                                <p:cTn id="76" presetID="10" presetClass="entr" presetSubtype="0" fill="hold" grpId="0" nodeType="withEffect">
-                                  <p:stCondLst>
-                                    <p:cond delay="0"/>
-                                  </p:stCondLst>
-                                  <p:childTnLst>
-                                    <p:par>
-                                      <p:cTn id="77" fill="hold">
-                                        <p:stCondLst>
-                                          <p:cond delay="0"/>
-                                        </p:stCondLst>
-                                        <p:childTnLst>
-                                          <p:par>
-                                            <p:cTn id="78" presetID="1" presetClass="entr" presetSubtype="0" fill="hold" grpId="0" nodeType="withEffect">
-                                              <p:childTnLst>
-                                                <p:set>
-                                                  <p:cBhvr>
-                                                    <p:cTn id="79" dur="1" fill="hold">
-                                                      <p:stCondLst>
-                                                        <p:cond delay="0"/>
-                                                      </p:stCondLst>
-                                                      <p:childTnLst/>
-                                                    </p:cTn>
-                                                    <p:tgtEl>
-                                                      <p:spTgt spid="16"/>
-                                                    </p:tgtEl>
-                                                    <p:attrNameLst>
-                                                      <p:attrName>style.visibility</p:attrName>
-                                                    </p:attrNameLst>
-                                                  </p:cBhvr>
-                                                  <p:to>
-                                                    <p:strVal val="visible"/>
-                                                  </p:to>
-                                                </p:set>
-                                              </p:childTnLst>
-                                            </p:cTn>
-                                          </p:par>
-                                          <p:par>
-                                            <p:cTn id="80" presetID="10" presetClass="entr" presetSubtype="0" fill="hold" grpId="0" nodeType="withEffect">
-                                              <p:childTnLst>
-                                                <p:animEffect transition="in" filter="fade">
-                                                  <p:cBhvr>
-                                                    <p:cTn id="81" dur="600"/>
-                                                    <p:tgtEl>
-                                                      <p:spTgt spid="16"/>
-                                                    </p:tgtEl>
-                                                  </p:cBhvr>
-                                                </p:animEffect>
-                                              </p:childTnLst>
-                                            </p:cTn>
-                                          </p:par>
-                                        </p:childTnLst>
-                                      </p:cTn>
-                                    </p:par>
-                                  </p:childTnLst>
-                                </p:cTn>
-                              </p:par>
-                            </p:childTnLst>
-                          </p:cTn>
-                        </p:par>
-                      </p:childTnLst>
-                    </p:cTn>
-                  </p:par>
-                  <p:par>
-                    <p:cTn id="82" fill="hold">
-                      <p:stCondLst>
-                        <p:cond delay="indefinite" evt="onClick"/>
-                      </p:stCondLst>
-                      <p:childTnLst>
-                        <p:par>
-                          <p:cTn id="83" fill="hold">
-                            <p:childTnLst>
-                              <p:par>
-                                <p:cTn id="84" presetID="10" presetClass="entr" presetSubtype="0" fill="hold" grpId="0" nodeType="withEffect">
-                                  <p:stCondLst>
-                                    <p:cond delay="0"/>
-                                  </p:stCondLst>
-                                  <p:childTnLst>
-                                    <p:par>
-                                      <p:cTn id="85" fill="hold">
-                                        <p:stCondLst>
-                                          <p:cond delay="0"/>
-                                        </p:stCondLst>
-                                        <p:childTnLst>
-                                          <p:par>
-                                            <p:cTn id="86" presetID="1" presetClass="entr" presetSubtype="0" fill="hold" grpId="0" nodeType="withEffect">
-                                              <p:childTnLst>
-                                                <p:set>
-                                                  <p:cBhvr>
-                                                    <p:cTn id="87" dur="1" fill="hold">
-                                                      <p:stCondLst>
-                                                        <p:cond delay="0"/>
-                                                      </p:stCondLst>
-                                                      <p:childTnLst/>
-                                                    </p:cTn>
-                                                    <p:tgtEl>
-                                                      <p:spTgt spid="17"/>
-                                                    </p:tgtEl>
-                                                    <p:attrNameLst>
-                                                      <p:attrName>style.visibility</p:attrName>
-                                                    </p:attrNameLst>
-                                                  </p:cBhvr>
-                                                  <p:to>
-                                                    <p:strVal val="visible"/>
-                                                  </p:to>
-                                                </p:set>
-                                              </p:childTnLst>
-                                            </p:cTn>
-                                          </p:par>
-                                          <p:par>
-                                            <p:cTn id="88" presetID="10" presetClass="entr" presetSubtype="0" fill="hold" grpId="0" nodeType="withEffect">
-                                              <p:childTnLst>
-                                                <p:animEffect transition="in" filter="fade">
-                                                  <p:cBhvr>
-                                                    <p:cTn id="89" dur="600"/>
-                                                    <p:tgtEl>
-                                                      <p:spTgt spid="17"/>
-                                                    </p:tgtEl>
-                                                  </p:cBhvr>
-                                                </p:animEffect>
-                                              </p:childTnLst>
-                                            </p:cTn>
-                                          </p:par>
-                                        </p:childTnLst>
-                                      </p:cTn>
-                                    </p:par>
-                                  </p:childTnLst>
-                                </p:cTn>
-                              </p:par>
-                              <p:par>
-                                <p:cTn id="90" presetID="10" presetClass="entr" presetSubtype="0" fill="hold" grpId="0" nodeType="withEffect">
-                                  <p:stCondLst>
-                                    <p:cond delay="0"/>
-                                  </p:stCondLst>
-                                  <p:childTnLst>
-                                    <p:par>
-                                      <p:cTn id="91" fill="hold">
-                                        <p:stCondLst>
-                                          <p:cond delay="0"/>
-                                        </p:stCondLst>
-                                        <p:childTnLst>
-                                          <p:par>
-                                            <p:cTn id="92" presetID="1" presetClass="entr" presetSubtype="0" fill="hold" grpId="0" nodeType="withEffect">
-                                              <p:childTnLst>
-                                                <p:set>
-                                                  <p:cBhvr>
-                                                    <p:cTn id="93" dur="1" fill="hold">
-                                                      <p:stCondLst>
-                                                        <p:cond delay="0"/>
-                                                      </p:stCondLst>
-                                                      <p:childTnLst/>
-                                                    </p:cTn>
-                                                    <p:tgtEl>
-                                                      <p:spTgt spid="18"/>
-                                                    </p:tgtEl>
-                                                    <p:attrNameLst>
-                                                      <p:attrName>style.visibility</p:attrName>
-                                                    </p:attrNameLst>
-                                                  </p:cBhvr>
-                                                  <p:to>
-                                                    <p:strVal val="visible"/>
-                                                  </p:to>
-                                                </p:set>
-                                              </p:childTnLst>
-                                            </p:cTn>
-                                          </p:par>
-                                          <p:par>
-                                            <p:cTn id="94" presetID="10" presetClass="entr" presetSubtype="0" fill="hold" grpId="0" nodeType="withEffect">
-                                              <p:childTnLst>
-                                                <p:animEffect transition="in" filter="fade">
-                                                  <p:cBhvr>
-                                                    <p:cTn id="95" dur="600"/>
-                                                    <p:tgtEl>
-                                                      <p:spTgt spid="18"/>
-                                                    </p:tgtEl>
-                                                  </p:cBhvr>
-                                                </p:animEffect>
-                                              </p:childTnLst>
-                                            </p:cTn>
-                                          </p:par>
-                                        </p:childTnLst>
-                                      </p:cTn>
-                                    </p:par>
-                                  </p:childTnLst>
-                                </p:cTn>
-                              </p:par>
-                            </p:childTnLst>
-                          </p:cTn>
-                        </p:par>
-                      </p:childTnLst>
-                    </p:cTn>
-                  </p:par>
-                </p:childTnLst>
-              </p:cTn>
-              <p:prevCondLst>
-                <p:cond evt="onClick" delay="0">
-                  <p:tgtEl>
-                    <p:sldTgt/>
-                  </p:tgtEl>
-                </p:cond>
-              </p:prevCondLst>
-              <p:nextCondLst>
-                <p:cond evt="onClick" delay="0">
-                  <p:tgtEl>
-                    <p:sldTgt/>
-                  </p:tgtEl>
-                </p:cond>
-              </p:nextCondLst>
-            </p:seq>
-          </p:childTnLst>
-        </p:cTn>
-      </p:par>
-    </p:tnLst>
-    <p:bldLst>
-      <p:bldP spid="6" grpId="0"/>
-      <p:bldP spid="7" grpId="0"/>
-      <p:bldP spid="8" grpId="0"/>
-      <p:bldP spid="9" grpId="0"/>
-      <p:bldP spid="10" grpId="0"/>
-      <p:bldP spid="11" grpId="0"/>
-      <p:bldP spid="12" grpId="0"/>
-      <p:bldP spid="13" grpId="0"/>
-      <p:bldP spid="14" grpId="0"/>
-      <p:bldP spid="15" grpId="0"/>
-      <p:bldP spid="16" grpId="0"/>
-      <p:bldP spid="17" grpId="0"/>
-      <p:bldP spid="18" grpId="0"/>
-    </p:bldLst>
-  </p:timing>
 </p:sld>
 </file>
 
@@ -12022,9 +8010,57 @@
           </a:p>
         </p:txBody>
       </p:sp>
+      <p:sp>
+        <p:nvSpPr>
+          <p:cNvPr id="7" name="Rounded Rectangle 6"/>
+          <p:cNvSpPr/>
+          <p:nvPr/>
+        </p:nvSpPr>
+        <p:spPr>
+          <a:xfrm>
+            <a:off x="969263" y="1947672"/>
+            <a:ext cx="2596896" cy="3419856"/>
+          </a:xfrm>
+          <a:prstGeom prst="roundRect">
+            <a:avLst>
+              <a:gd name="adj" fmla="val 6000"/>
+            </a:avLst>
+          </a:prstGeom>
+          <a:solidFill>
+            <a:srgbClr val="FFFFFF"/>
+          </a:solidFill>
+          <a:ln w="12700">
+            <a:solidFill>
+              <a:srgbClr val="DDCFB8"/>
+            </a:solidFill>
+          </a:ln>
+          <a:effectLst/>
+        </p:spPr>
+        <p:style>
+          <a:lnRef idx="1">
+            <a:schemeClr val="accent1"/>
+          </a:lnRef>
+          <a:fillRef idx="3">
+            <a:schemeClr val="accent1"/>
+          </a:fillRef>
+          <a:effectRef idx="2">
+            <a:schemeClr val="accent1"/>
+          </a:effectRef>
+          <a:fontRef idx="minor">
+            <a:schemeClr val="lt1"/>
+          </a:fontRef>
+        </p:style>
+        <p:txBody>
+          <a:bodyPr rtlCol="0" anchor="ctr"/>
+          <a:lstStyle/>
+          <a:p>
+            <a:pPr algn="ctr"/>
+          </a:p>
+        </p:txBody>
+      </p:sp>
       <p:pic>
         <p:nvPicPr>
-          <p:cNvPr id="7" name="Picture 6" descr="final-1-angle-view.jpg"/>
+          <p:cNvPr id="8" name="Picture 7" descr="final-1-angle-view.jpg"/>
           <p:cNvPicPr>
             <a:picLocks noChangeAspect="1"/>
           </p:cNvPicPr>
@@ -12041,11 +8077,6 @@
             <a:off x="1033271" y="2011680"/>
             <a:ext cx="2468880" cy="3291840"/>
           </a:xfrm>
-          <a:prstGeom prst="roundRect">
-            <a:avLst>
-              <a:gd name="adj" fmla="val 6500"/>
-            </a:avLst>
-          </a:prstGeom>
           <a:prstGeom prst="rect">
             <a:avLst/>
           </a:prstGeom>
@@ -12053,7 +8084,7 @@
       </p:pic>
       <p:sp>
         <p:nvSpPr>
-          <p:cNvPr id="8" name="TextBox 7"/>
+          <p:cNvPr id="9" name="TextBox 8"/>
           <p:cNvSpPr txBox="1"/>
           <p:nvPr/>
         </p:nvSpPr>
@@ -12090,9 +8121,57 @@
           </a:p>
         </p:txBody>
       </p:sp>
+      <p:sp>
+        <p:nvSpPr>
+          <p:cNvPr id="10" name="Rounded Rectangle 9"/>
+          <p:cNvSpPr/>
+          <p:nvPr/>
+        </p:nvSpPr>
+        <p:spPr>
+          <a:xfrm>
+            <a:off x="4791455" y="1947672"/>
+            <a:ext cx="2596896" cy="3419856"/>
+          </a:xfrm>
+          <a:prstGeom prst="roundRect">
+            <a:avLst>
+              <a:gd name="adj" fmla="val 6000"/>
+            </a:avLst>
+          </a:prstGeom>
+          <a:solidFill>
+            <a:srgbClr val="FFFFFF"/>
+          </a:solidFill>
+          <a:ln w="12700">
+            <a:solidFill>
+              <a:srgbClr val="DDCFB8"/>
+            </a:solidFill>
+          </a:ln>
+          <a:effectLst/>
+        </p:spPr>
+        <p:style>
+          <a:lnRef idx="1">
+            <a:schemeClr val="accent1"/>
+          </a:lnRef>
+          <a:fillRef idx="3">
+            <a:schemeClr val="accent1"/>
+          </a:fillRef>
+          <a:effectRef idx="2">
+            <a:schemeClr val="accent1"/>
+          </a:effectRef>
+          <a:fontRef idx="minor">
+            <a:schemeClr val="lt1"/>
+          </a:fontRef>
+        </p:style>
+        <p:txBody>
+          <a:bodyPr rtlCol="0" anchor="ctr"/>
+          <a:lstStyle/>
+          <a:p>
+            <a:pPr algn="ctr"/>
+          </a:p>
+        </p:txBody>
+      </p:sp>
       <p:pic>
         <p:nvPicPr>
-          <p:cNvPr id="9" name="Picture 8" descr="final-2-front-view.jpg"/>
+          <p:cNvPr id="11" name="Picture 10" descr="final-2-front-view.jpg"/>
           <p:cNvPicPr>
             <a:picLocks noChangeAspect="1"/>
           </p:cNvPicPr>
@@ -12109,11 +8188,6 @@
             <a:off x="4855464" y="2011680"/>
             <a:ext cx="2468880" cy="3291840"/>
           </a:xfrm>
-          <a:prstGeom prst="roundRect">
-            <a:avLst>
-              <a:gd name="adj" fmla="val 6500"/>
-            </a:avLst>
-          </a:prstGeom>
           <a:prstGeom prst="rect">
             <a:avLst/>
           </a:prstGeom>
@@ -12121,7 +8195,7 @@
       </p:pic>
       <p:sp>
         <p:nvSpPr>
-          <p:cNvPr id="10" name="TextBox 9"/>
+          <p:cNvPr id="12" name="TextBox 11"/>
           <p:cNvSpPr txBox="1"/>
           <p:nvPr/>
         </p:nvSpPr>
@@ -12158,9 +8232,57 @@
           </a:p>
         </p:txBody>
       </p:sp>
+      <p:sp>
+        <p:nvSpPr>
+          <p:cNvPr id="13" name="Rounded Rectangle 12"/>
+          <p:cNvSpPr/>
+          <p:nvPr/>
+        </p:nvSpPr>
+        <p:spPr>
+          <a:xfrm>
+            <a:off x="8613647" y="1947672"/>
+            <a:ext cx="2596896" cy="3419856"/>
+          </a:xfrm>
+          <a:prstGeom prst="roundRect">
+            <a:avLst>
+              <a:gd name="adj" fmla="val 6000"/>
+            </a:avLst>
+          </a:prstGeom>
+          <a:solidFill>
+            <a:srgbClr val="FFFFFF"/>
+          </a:solidFill>
+          <a:ln w="12700">
+            <a:solidFill>
+              <a:srgbClr val="DDCFB8"/>
+            </a:solidFill>
+          </a:ln>
+          <a:effectLst/>
+        </p:spPr>
+        <p:style>
+          <a:lnRef idx="1">
+            <a:schemeClr val="accent1"/>
+          </a:lnRef>
+          <a:fillRef idx="3">
+            <a:schemeClr val="accent1"/>
+          </a:fillRef>
+          <a:effectRef idx="2">
+            <a:schemeClr val="accent1"/>
+          </a:effectRef>
+          <a:fontRef idx="minor">
+            <a:schemeClr val="lt1"/>
+          </a:fontRef>
+        </p:style>
+        <p:txBody>
+          <a:bodyPr rtlCol="0" anchor="ctr"/>
+          <a:lstStyle/>
+          <a:p>
+            <a:pPr algn="ctr"/>
+          </a:p>
+        </p:txBody>
+      </p:sp>
       <p:pic>
         <p:nvPicPr>
-          <p:cNvPr id="11" name="Picture 10" descr="final-3-side-view.jpg"/>
+          <p:cNvPr id="14" name="Picture 13" descr="final-3-side-view.jpg"/>
           <p:cNvPicPr>
             <a:picLocks noChangeAspect="1"/>
           </p:cNvPicPr>
@@ -12177,11 +8299,6 @@
             <a:off x="8677655" y="2011680"/>
             <a:ext cx="2468880" cy="3291840"/>
           </a:xfrm>
-          <a:prstGeom prst="roundRect">
-            <a:avLst>
-              <a:gd name="adj" fmla="val 6500"/>
-            </a:avLst>
-          </a:prstGeom>
           <a:prstGeom prst="rect">
             <a:avLst/>
           </a:prstGeom>
@@ -12189,7 +8306,7 @@
       </p:pic>
       <p:sp>
         <p:nvSpPr>
-          <p:cNvPr id="12" name="TextBox 11"/>
+          <p:cNvPr id="15" name="TextBox 14"/>
           <p:cNvSpPr txBox="1"/>
           <p:nvPr/>
         </p:nvSpPr>
@@ -12228,7 +8345,7 @@
       </p:sp>
       <p:sp>
         <p:nvSpPr>
-          <p:cNvPr id="13" name="TextBox 12"/>
+          <p:cNvPr id="16" name="TextBox 15"/>
           <p:cNvSpPr txBox="1"/>
           <p:nvPr/>
         </p:nvSpPr>
@@ -12270,504 +8387,6 @@
   <p:clrMapOvr>
     <a:masterClrMapping/>
   </p:clrMapOvr>
-  <p:timing>
-    <p:tnLst>
-      <p:par>
-        <p:cTn id="2" dur="indefinite" restart="never" nodeType="tmRoot">
-          <p:childTnLst>
-            <p:seq concurrent="1" nextAc="seek">
-              <p:cTn id="3" dur="indefinite" nodeType="mainSeq">
-                <p:childTnLst>
-                  <p:par>
-                    <p:cTn id="4" fill="hold">
-                      <p:stCondLst>
-                        <p:cond delay="indefinite" evt="onClick"/>
-                      </p:stCondLst>
-                      <p:childTnLst>
-                        <p:par>
-                          <p:cTn id="5" fill="hold">
-                            <p:childTnLst>
-                              <p:par>
-                                <p:cTn id="6" presetID="10" presetClass="entr" presetSubtype="0" fill="hold" grpId="0" nodeType="withEffect">
-                                  <p:stCondLst>
-                                    <p:cond delay="0"/>
-                                  </p:stCondLst>
-                                  <p:childTnLst>
-                                    <p:par>
-                                      <p:cTn id="7" fill="hold">
-                                        <p:stCondLst>
-                                          <p:cond delay="0"/>
-                                        </p:stCondLst>
-                                        <p:childTnLst>
-                                          <p:par>
-                                            <p:cTn id="8" presetID="1" presetClass="entr" presetSubtype="0" fill="hold" grpId="0" nodeType="withEffect">
-                                              <p:childTnLst>
-                                                <p:set>
-                                                  <p:cBhvr>
-                                                    <p:cTn id="9" dur="1" fill="hold">
-                                                      <p:stCondLst>
-                                                        <p:cond delay="0"/>
-                                                      </p:stCondLst>
-                                                      <p:childTnLst/>
-                                                    </p:cTn>
-                                                    <p:tgtEl>
-                                                      <p:spTgt spid="7"/>
-                                                    </p:tgtEl>
-                                                    <p:attrNameLst>
-                                                      <p:attrName>style.visibility</p:attrName>
-                                                    </p:attrNameLst>
-                                                  </p:cBhvr>
-                                                  <p:to>
-                                                    <p:strVal val="visible"/>
-                                                  </p:to>
-                                                </p:set>
-                                              </p:childTnLst>
-                                            </p:cTn>
-                                          </p:par>
-                                          <p:par>
-                                            <p:cTn id="10" presetID="10" presetClass="entr" presetSubtype="0" fill="hold" grpId="0" nodeType="withEffect">
-                                              <p:childTnLst>
-                                                <p:animEffect transition="in" filter="fade">
-                                                  <p:cBhvr>
-                                                    <p:cTn id="11" dur="600"/>
-                                                    <p:tgtEl>
-                                                      <p:spTgt spid="7"/>
-                                                    </p:tgtEl>
-                                                  </p:cBhvr>
-                                                </p:animEffect>
-                                              </p:childTnLst>
-                                            </p:cTn>
-                                          </p:par>
-                                        </p:childTnLst>
-                                      </p:cTn>
-                                    </p:par>
-                                  </p:childTnLst>
-                                </p:cTn>
-                              </p:par>
-                              <p:par>
-                                <p:cTn id="12" presetID="10" presetClass="entr" presetSubtype="0" fill="hold" grpId="0" nodeType="withEffect">
-                                  <p:stCondLst>
-                                    <p:cond delay="0"/>
-                                  </p:stCondLst>
-                                  <p:childTnLst>
-                                    <p:par>
-                                      <p:cTn id="13" fill="hold">
-                                        <p:stCondLst>
-                                          <p:cond delay="0"/>
-                                        </p:stCondLst>
-                                        <p:childTnLst>
-                                          <p:par>
-                                            <p:cTn id="14" presetID="1" presetClass="entr" presetSubtype="0" fill="hold" grpId="0" nodeType="withEffect">
-                                              <p:childTnLst>
-                                                <p:set>
-                                                  <p:cBhvr>
-                                                    <p:cTn id="15" dur="1" fill="hold">
-                                                      <p:stCondLst>
-                                                        <p:cond delay="0"/>
-                                                      </p:stCondLst>
-                                                      <p:childTnLst/>
-                                                    </p:cTn>
-                                                    <p:tgtEl>
-                                                      <p:spTgt spid="8"/>
-                                                    </p:tgtEl>
-                                                    <p:attrNameLst>
-                                                      <p:attrName>style.visibility</p:attrName>
-                                                    </p:attrNameLst>
-                                                  </p:cBhvr>
-                                                  <p:to>
-                                                    <p:strVal val="visible"/>
-                                                  </p:to>
-                                                </p:set>
-                                              </p:childTnLst>
-                                            </p:cTn>
-                                          </p:par>
-                                          <p:par>
-                                            <p:cTn id="16" presetID="10" presetClass="entr" presetSubtype="0" fill="hold" grpId="0" nodeType="withEffect">
-                                              <p:childTnLst>
-                                                <p:animEffect transition="in" filter="fade">
-                                                  <p:cBhvr>
-                                                    <p:cTn id="17" dur="600"/>
-                                                    <p:tgtEl>
-                                                      <p:spTgt spid="8"/>
-                                                    </p:tgtEl>
-                                                  </p:cBhvr>
-                                                </p:animEffect>
-                                              </p:childTnLst>
-                                            </p:cTn>
-                                          </p:par>
-                                        </p:childTnLst>
-                                      </p:cTn>
-                                    </p:par>
-                                  </p:childTnLst>
-                                </p:cTn>
-                              </p:par>
-                            </p:childTnLst>
-                          </p:cTn>
-                        </p:par>
-                      </p:childTnLst>
-                    </p:cTn>
-                  </p:par>
-                  <p:par>
-                    <p:cTn id="18" fill="hold">
-                      <p:stCondLst>
-                        <p:cond delay="indefinite" evt="onClick"/>
-                      </p:stCondLst>
-                      <p:childTnLst>
-                        <p:par>
-                          <p:cTn id="19" fill="hold">
-                            <p:childTnLst>
-                              <p:par>
-                                <p:cTn id="20" presetID="10" presetClass="entr" presetSubtype="0" fill="hold" grpId="0" nodeType="withEffect">
-                                  <p:stCondLst>
-                                    <p:cond delay="0"/>
-                                  </p:stCondLst>
-                                  <p:childTnLst>
-                                    <p:par>
-                                      <p:cTn id="21" fill="hold">
-                                        <p:stCondLst>
-                                          <p:cond delay="0"/>
-                                        </p:stCondLst>
-                                        <p:childTnLst>
-                                          <p:par>
-                                            <p:cTn id="22" presetID="1" presetClass="entr" presetSubtype="0" fill="hold" grpId="0" nodeType="withEffect">
-                                              <p:childTnLst>
-                                                <p:set>
-                                                  <p:cBhvr>
-                                                    <p:cTn id="23" dur="1" fill="hold">
-                                                      <p:stCondLst>
-                                                        <p:cond delay="0"/>
-                                                      </p:stCondLst>
-                                                      <p:childTnLst/>
-                                                    </p:cTn>
-                                                    <p:tgtEl>
-                                                      <p:spTgt spid="9"/>
-                                                    </p:tgtEl>
-                                                    <p:attrNameLst>
-                                                      <p:attrName>style.visibility</p:attrName>
-                                                    </p:attrNameLst>
-                                                  </p:cBhvr>
-                                                  <p:to>
-                                                    <p:strVal val="visible"/>
-                                                  </p:to>
-                                                </p:set>
-                                              </p:childTnLst>
-                                            </p:cTn>
-                                          </p:par>
-                                          <p:par>
-                                            <p:cTn id="24" presetID="10" presetClass="entr" presetSubtype="0" fill="hold" grpId="0" nodeType="withEffect">
-                                              <p:childTnLst>
-                                                <p:animEffect transition="in" filter="fade">
-                                                  <p:cBhvr>
-                                                    <p:cTn id="25" dur="600"/>
-                                                    <p:tgtEl>
-                                                      <p:spTgt spid="9"/>
-                                                    </p:tgtEl>
-                                                  </p:cBhvr>
-                                                </p:animEffect>
-                                              </p:childTnLst>
-                                            </p:cTn>
-                                          </p:par>
-                                        </p:childTnLst>
-                                      </p:cTn>
-                                    </p:par>
-                                  </p:childTnLst>
-                                </p:cTn>
-                              </p:par>
-                              <p:par>
-                                <p:cTn id="26" presetID="10" presetClass="entr" presetSubtype="0" fill="hold" grpId="0" nodeType="withEffect">
-                                  <p:stCondLst>
-                                    <p:cond delay="0"/>
-                                  </p:stCondLst>
-                                  <p:childTnLst>
-                                    <p:par>
-                                      <p:cTn id="27" fill="hold">
-                                        <p:stCondLst>
-                                          <p:cond delay="0"/>
-                                        </p:stCondLst>
-                                        <p:childTnLst>
-                                          <p:par>
-                                            <p:cTn id="28" presetID="1" presetClass="entr" presetSubtype="0" fill="hold" grpId="0" nodeType="withEffect">
-                                              <p:childTnLst>
-                                                <p:set>
-                                                  <p:cBhvr>
-                                                    <p:cTn id="29" dur="1" fill="hold">
-                                                      <p:stCondLst>
-                                                        <p:cond delay="0"/>
-                                                      </p:stCondLst>
-                                                      <p:childTnLst/>
-                                                    </p:cTn>
-                                                    <p:tgtEl>
-                                                      <p:spTgt spid="10"/>
-                                                    </p:tgtEl>
-                                                    <p:attrNameLst>
-                                                      <p:attrName>style.visibility</p:attrName>
-                                                    </p:attrNameLst>
-                                                  </p:cBhvr>
-                                                  <p:to>
-                                                    <p:strVal val="visible"/>
-                                                  </p:to>
-                                                </p:set>
-                                              </p:childTnLst>
-                                            </p:cTn>
-                                          </p:par>
-                                          <p:par>
-                                            <p:cTn id="30" presetID="10" presetClass="entr" presetSubtype="0" fill="hold" grpId="0" nodeType="withEffect">
-                                              <p:childTnLst>
-                                                <p:animEffect transition="in" filter="fade">
-                                                  <p:cBhvr>
-                                                    <p:cTn id="31" dur="600"/>
-                                                    <p:tgtEl>
-                                                      <p:spTgt spid="10"/>
-                                                    </p:tgtEl>
-                                                  </p:cBhvr>
-                                                </p:animEffect>
-                                              </p:childTnLst>
-                                            </p:cTn>
-                                          </p:par>
-                                        </p:childTnLst>
-                                      </p:cTn>
-                                    </p:par>
-                                  </p:childTnLst>
-                                </p:cTn>
-                              </p:par>
-                            </p:childTnLst>
-                          </p:cTn>
-                        </p:par>
-                      </p:childTnLst>
-                    </p:cTn>
-                  </p:par>
-                  <p:par>
-                    <p:cTn id="32" fill="hold">
-                      <p:stCondLst>
-                        <p:cond delay="indefinite" evt="onClick"/>
-                      </p:stCondLst>
-                      <p:childTnLst>
-                        <p:par>
-                          <p:cTn id="33" fill="hold">
-                            <p:childTnLst>
-                              <p:par>
-                                <p:cTn id="34" presetID="10" presetClass="entr" presetSubtype="0" fill="hold" grpId="0" nodeType="withEffect">
-                                  <p:stCondLst>
-                                    <p:cond delay="0"/>
-                                  </p:stCondLst>
-                                  <p:childTnLst>
-                                    <p:par>
-                                      <p:cTn id="35" fill="hold">
-                                        <p:stCondLst>
-                                          <p:cond delay="0"/>
-                                        </p:stCondLst>
-                                        <p:childTnLst>
-                                          <p:par>
-                                            <p:cTn id="36" presetID="1" presetClass="entr" presetSubtype="0" fill="hold" grpId="0" nodeType="withEffect">
-                                              <p:childTnLst>
-                                                <p:set>
-                                                  <p:cBhvr>
-                                                    <p:cTn id="37" dur="1" fill="hold">
-                                                      <p:stCondLst>
-                                                        <p:cond delay="0"/>
-                                                      </p:stCondLst>
-                                                      <p:childTnLst/>
-                                                    </p:cTn>
-                                                    <p:tgtEl>
-                                                      <p:spTgt spid="11"/>
-                                                    </p:tgtEl>
-                                                    <p:attrNameLst>
-                                                      <p:attrName>style.visibility</p:attrName>
-                                                    </p:attrNameLst>
-                                                  </p:cBhvr>
-                                                  <p:to>
-                                                    <p:strVal val="visible"/>
-                                                  </p:to>
-                                                </p:set>
-                                              </p:childTnLst>
-                                            </p:cTn>
-                                          </p:par>
-                                          <p:par>
-                                            <p:cTn id="38" presetID="10" presetClass="entr" presetSubtype="0" fill="hold" grpId="0" nodeType="withEffect">
-                                              <p:childTnLst>
-                                                <p:animEffect transition="in" filter="fade">
-                                                  <p:cBhvr>
-                                                    <p:cTn id="39" dur="600"/>
-                                                    <p:tgtEl>
-                                                      <p:spTgt spid="11"/>
-                                                    </p:tgtEl>
-                                                  </p:cBhvr>
-                                                </p:animEffect>
-                                              </p:childTnLst>
-                                            </p:cTn>
-                                          </p:par>
-                                        </p:childTnLst>
-                                      </p:cTn>
-                                    </p:par>
-                                  </p:childTnLst>
-                                </p:cTn>
-                              </p:par>
-                              <p:par>
-                                <p:cTn id="40" presetID="10" presetClass="entr" presetSubtype="0" fill="hold" grpId="0" nodeType="withEffect">
-                                  <p:stCondLst>
-                                    <p:cond delay="0"/>
-                                  </p:stCondLst>
-                                  <p:childTnLst>
-                                    <p:par>
-                                      <p:cTn id="41" fill="hold">
-                                        <p:stCondLst>
-                                          <p:cond delay="0"/>
-                                        </p:stCondLst>
-                                        <p:childTnLst>
-                                          <p:par>
-                                            <p:cTn id="42" presetID="1" presetClass="entr" presetSubtype="0" fill="hold" grpId="0" nodeType="withEffect">
-                                              <p:childTnLst>
-                                                <p:set>
-                                                  <p:cBhvr>
-                                                    <p:cTn id="43" dur="1" fill="hold">
-                                                      <p:stCondLst>
-                                                        <p:cond delay="0"/>
-                                                      </p:stCondLst>
-                                                      <p:childTnLst/>
-                                                    </p:cTn>
-                                                    <p:tgtEl>
-                                                      <p:spTgt spid="12"/>
-                                                    </p:tgtEl>
-                                                    <p:attrNameLst>
-                                                      <p:attrName>style.visibility</p:attrName>
-                                                    </p:attrNameLst>
-                                                  </p:cBhvr>
-                                                  <p:to>
-                                                    <p:strVal val="visible"/>
-                                                  </p:to>
-                                                </p:set>
-                                              </p:childTnLst>
-                                            </p:cTn>
-                                          </p:par>
-                                          <p:par>
-                                            <p:cTn id="44" presetID="10" presetClass="entr" presetSubtype="0" fill="hold" grpId="0" nodeType="withEffect">
-                                              <p:childTnLst>
-                                                <p:animEffect transition="in" filter="fade">
-                                                  <p:cBhvr>
-                                                    <p:cTn id="45" dur="600"/>
-                                                    <p:tgtEl>
-                                                      <p:spTgt spid="12"/>
-                                                    </p:tgtEl>
-                                                  </p:cBhvr>
-                                                </p:animEffect>
-                                              </p:childTnLst>
-                                            </p:cTn>
-                                          </p:par>
-                                        </p:childTnLst>
-                                      </p:cTn>
-                                    </p:par>
-                                  </p:childTnLst>
-                                </p:cTn>
-                              </p:par>
-                            </p:childTnLst>
-                          </p:cTn>
-                        </p:par>
-                      </p:childTnLst>
-                    </p:cTn>
-                  </p:par>
-                  <p:par>
-                    <p:cTn id="46" fill="hold">
-                      <p:stCondLst>
-                        <p:cond delay="indefinite" evt="onClick"/>
-                      </p:stCondLst>
-                      <p:childTnLst>
-                        <p:par>
-                          <p:cTn id="47" fill="hold">
-                            <p:childTnLst>
-                              <p:par>
-                                <p:cTn id="48" presetID="10" presetClass="entr" presetSubtype="0" fill="hold" grpId="0" nodeType="withEffect">
-                                  <p:stCondLst>
-                                    <p:cond delay="0"/>
-                                  </p:stCondLst>
-                                  <p:childTnLst>
-                                    <p:par>
-                                      <p:cTn id="49" fill="hold">
-                                        <p:stCondLst>
-                                          <p:cond delay="0"/>
-                                        </p:stCondLst>
-                                        <p:childTnLst>
-                                          <p:par>
-                                            <p:cTn id="50" presetID="1" presetClass="entr" presetSubtype="0" fill="hold" grpId="0" nodeType="withEffect">
-                                              <p:childTnLst>
-                                                <p:set>
-                                                  <p:cBhvr>
-                                                    <p:cTn id="51" dur="1" fill="hold">
-                                                      <p:stCondLst>
-                                                        <p:cond delay="0"/>
-                                                      </p:stCondLst>
-                                                      <p:childTnLst/>
-                                                    </p:cTn>
-                                                    <p:tgtEl>
-                                                      <p:spTgt spid="13"/>
-                                                    </p:tgtEl>
-                                                    <p:attrNameLst>
-                                                      <p:attrName>style.visibility</p:attrName>
-                                                    </p:attrNameLst>
-                                                  </p:cBhvr>
-                                                  <p:to>
-                                                    <p:strVal val="visible"/>
-                                                  </p:to>
-                                                </p:set>
-                                              </p:childTnLst>
-                                            </p:cTn>
-                                          </p:par>
-                                          <p:par>
-                                            <p:cTn id="52" presetID="10" presetClass="entr" presetSubtype="0" fill="hold" grpId="0" nodeType="withEffect">
-                                              <p:childTnLst>
-                                                <p:animEffect transition="in" filter="fade">
-                                                  <p:cBhvr>
-                                                    <p:cTn id="53" dur="600"/>
-                                                    <p:tgtEl>
-                                                      <p:spTgt spid="13"/>
-                                                    </p:tgtEl>
-                                                  </p:cBhvr>
-                                                </p:animEffect>
-                                              </p:childTnLst>
-                                            </p:cTn>
-                                          </p:par>
-                                        </p:childTnLst>
-                                      </p:cTn>
-                                    </p:par>
-                                  </p:childTnLst>
-                                </p:cTn>
-                              </p:par>
-                            </p:childTnLst>
-                          </p:cTn>
-                        </p:par>
-                      </p:childTnLst>
-                    </p:cTn>
-                  </p:par>
-                </p:childTnLst>
-              </p:cTn>
-              <p:prevCondLst>
-                <p:cond evt="onClick" delay="0">
-                  <p:tgtEl>
-                    <p:sldTgt/>
-                  </p:tgtEl>
-                </p:cond>
-              </p:prevCondLst>
-              <p:nextCondLst>
-                <p:cond evt="onClick" delay="0">
-                  <p:tgtEl>
-                    <p:sldTgt/>
-                  </p:tgtEl>
-                </p:cond>
-              </p:nextCondLst>
-            </p:seq>
-          </p:childTnLst>
-        </p:cTn>
-      </p:par>
-    </p:tnLst>
-    <p:bldLst>
-      <p:bldP spid="7" grpId="0"/>
-      <p:bldP spid="8" grpId="0"/>
-      <p:bldP spid="9" grpId="0"/>
-      <p:bldP spid="10" grpId="0"/>
-      <p:bldP spid="11" grpId="0"/>
-      <p:bldP spid="12" grpId="0"/>
-      <p:bldP spid="13" grpId="0"/>
-    </p:bldLst>
-  </p:timing>
 </p:sld>
 </file>
 
@@ -12922,9 +8541,57 @@
           </a:p>
         </p:txBody>
       </p:sp>
+      <p:sp>
+        <p:nvSpPr>
+          <p:cNvPr id="5" name="Rounded Rectangle 4"/>
+          <p:cNvSpPr/>
+          <p:nvPr/>
+        </p:nvSpPr>
+        <p:spPr>
+          <a:xfrm>
+            <a:off x="5075038" y="1261872"/>
+            <a:ext cx="2048018" cy="1700784"/>
+          </a:xfrm>
+          <a:prstGeom prst="roundRect">
+            <a:avLst>
+              <a:gd name="adj" fmla="val 6000"/>
+            </a:avLst>
+          </a:prstGeom>
+          <a:solidFill>
+            <a:srgbClr val="FFFFFF"/>
+          </a:solidFill>
+          <a:ln w="12700">
+            <a:solidFill>
+              <a:srgbClr val="DDCFB8"/>
+            </a:solidFill>
+          </a:ln>
+          <a:effectLst/>
+        </p:spPr>
+        <p:style>
+          <a:lnRef idx="1">
+            <a:schemeClr val="accent1"/>
+          </a:lnRef>
+          <a:fillRef idx="3">
+            <a:schemeClr val="accent1"/>
+          </a:fillRef>
+          <a:effectRef idx="2">
+            <a:schemeClr val="accent1"/>
+          </a:effectRef>
+          <a:fontRef idx="minor">
+            <a:schemeClr val="lt1"/>
+          </a:fontRef>
+        </p:style>
+        <p:txBody>
+          <a:bodyPr rtlCol="0" anchor="ctr"/>
+          <a:lstStyle/>
+          <a:p>
+            <a:pPr algn="ctr"/>
+          </a:p>
+        </p:txBody>
+      </p:sp>
       <p:pic>
         <p:nvPicPr>
-          <p:cNvPr id="5" name="Picture 4" descr="grizzly-bear.png"/>
+          <p:cNvPr id="6" name="Picture 5" descr="grizzly-bear.png"/>
           <p:cNvPicPr>
             <a:picLocks noChangeAspect="1"/>
           </p:cNvPicPr>
@@ -12941,11 +8608,6 @@
             <a:off x="5139046" y="1325880"/>
             <a:ext cx="1920002" cy="1572768"/>
           </a:xfrm>
-          <a:prstGeom prst="roundRect">
-            <a:avLst>
-              <a:gd name="adj" fmla="val 6500"/>
-            </a:avLst>
-          </a:prstGeom>
           <a:prstGeom prst="rect">
             <a:avLst/>
           </a:prstGeom>
@@ -12953,7 +8615,7 @@
       </p:pic>
       <p:sp>
         <p:nvSpPr>
-          <p:cNvPr id="6" name="TextBox 5"/>
+          <p:cNvPr id="7" name="TextBox 6"/>
           <p:cNvSpPr txBox="1"/>
           <p:nvPr/>
         </p:nvSpPr>
@@ -12992,7 +8654,7 @@
       </p:sp>
       <p:sp>
         <p:nvSpPr>
-          <p:cNvPr id="7" name="TextBox 6"/>
+          <p:cNvPr id="8" name="TextBox 7"/>
           <p:cNvSpPr txBox="1"/>
           <p:nvPr/>
         </p:nvSpPr>
@@ -13031,7 +8693,7 @@
       </p:sp>
       <p:sp>
         <p:nvSpPr>
-          <p:cNvPr id="8" name="TextBox 7"/>
+          <p:cNvPr id="9" name="TextBox 8"/>
           <p:cNvSpPr txBox="1"/>
           <p:nvPr/>
         </p:nvSpPr>
@@ -13073,315 +8735,6 @@
   <p:clrMapOvr>
     <a:masterClrMapping/>
   </p:clrMapOvr>
-  <p:timing>
-    <p:tnLst>
-      <p:par>
-        <p:cTn id="2" dur="indefinite" restart="never" nodeType="tmRoot">
-          <p:childTnLst>
-            <p:seq concurrent="1" nextAc="seek">
-              <p:cTn id="3" dur="indefinite" nodeType="mainSeq">
-                <p:childTnLst>
-                  <p:par>
-                    <p:cTn id="4" fill="hold">
-                      <p:stCondLst>
-                        <p:cond delay="indefinite" evt="onClick"/>
-                      </p:stCondLst>
-                      <p:childTnLst>
-                        <p:par>
-                          <p:cTn id="5" fill="hold">
-                            <p:childTnLst>
-                              <p:par>
-                                <p:cTn id="6" presetID="10" presetClass="entr" presetSubtype="0" fill="hold" grpId="0" nodeType="withEffect">
-                                  <p:stCondLst>
-                                    <p:cond delay="0"/>
-                                  </p:stCondLst>
-                                  <p:childTnLst>
-                                    <p:par>
-                                      <p:cTn id="7" fill="hold">
-                                        <p:stCondLst>
-                                          <p:cond delay="0"/>
-                                        </p:stCondLst>
-                                        <p:childTnLst>
-                                          <p:par>
-                                            <p:cTn id="8" presetID="1" presetClass="entr" presetSubtype="0" fill="hold" grpId="0" nodeType="withEffect">
-                                              <p:childTnLst>
-                                                <p:set>
-                                                  <p:cBhvr>
-                                                    <p:cTn id="9" dur="1" fill="hold">
-                                                      <p:stCondLst>
-                                                        <p:cond delay="0"/>
-                                                      </p:stCondLst>
-                                                      <p:childTnLst/>
-                                                    </p:cTn>
-                                                    <p:tgtEl>
-                                                      <p:spTgt spid="5"/>
-                                                    </p:tgtEl>
-                                                    <p:attrNameLst>
-                                                      <p:attrName>style.visibility</p:attrName>
-                                                    </p:attrNameLst>
-                                                  </p:cBhvr>
-                                                  <p:to>
-                                                    <p:strVal val="visible"/>
-                                                  </p:to>
-                                                </p:set>
-                                              </p:childTnLst>
-                                            </p:cTn>
-                                          </p:par>
-                                          <p:par>
-                                            <p:cTn id="10" presetID="10" presetClass="entr" presetSubtype="0" fill="hold" grpId="0" nodeType="withEffect">
-                                              <p:childTnLst>
-                                                <p:animEffect transition="in" filter="fade">
-                                                  <p:cBhvr>
-                                                    <p:cTn id="11" dur="600"/>
-                                                    <p:tgtEl>
-                                                      <p:spTgt spid="5"/>
-                                                    </p:tgtEl>
-                                                  </p:cBhvr>
-                                                </p:animEffect>
-                                              </p:childTnLst>
-                                            </p:cTn>
-                                          </p:par>
-                                        </p:childTnLst>
-                                      </p:cTn>
-                                    </p:par>
-                                  </p:childTnLst>
-                                </p:cTn>
-                              </p:par>
-                            </p:childTnLst>
-                          </p:cTn>
-                        </p:par>
-                      </p:childTnLst>
-                    </p:cTn>
-                  </p:par>
-                  <p:par>
-                    <p:cTn id="12" fill="hold">
-                      <p:stCondLst>
-                        <p:cond delay="indefinite" evt="onClick"/>
-                      </p:stCondLst>
-                      <p:childTnLst>
-                        <p:par>
-                          <p:cTn id="13" fill="hold">
-                            <p:childTnLst>
-                              <p:par>
-                                <p:cTn id="14" presetID="10" presetClass="entr" presetSubtype="0" fill="hold" grpId="0" nodeType="withEffect">
-                                  <p:stCondLst>
-                                    <p:cond delay="0"/>
-                                  </p:stCondLst>
-                                  <p:childTnLst>
-                                    <p:par>
-                                      <p:cTn id="15" fill="hold">
-                                        <p:stCondLst>
-                                          <p:cond delay="0"/>
-                                        </p:stCondLst>
-                                        <p:childTnLst>
-                                          <p:par>
-                                            <p:cTn id="16" presetID="1" presetClass="entr" presetSubtype="0" fill="hold" grpId="0" nodeType="withEffect">
-                                              <p:childTnLst>
-                                                <p:set>
-                                                  <p:cBhvr>
-                                                    <p:cTn id="17" dur="1" fill="hold">
-                                                      <p:stCondLst>
-                                                        <p:cond delay="0"/>
-                                                      </p:stCondLst>
-                                                      <p:childTnLst/>
-                                                    </p:cTn>
-                                                    <p:tgtEl>
-                                                      <p:spTgt spid="6"/>
-                                                    </p:tgtEl>
-                                                    <p:attrNameLst>
-                                                      <p:attrName>style.visibility</p:attrName>
-                                                    </p:attrNameLst>
-                                                  </p:cBhvr>
-                                                  <p:to>
-                                                    <p:strVal val="visible"/>
-                                                  </p:to>
-                                                </p:set>
-                                              </p:childTnLst>
-                                            </p:cTn>
-                                          </p:par>
-                                          <p:par>
-                                            <p:cTn id="18" presetID="10" presetClass="entr" presetSubtype="0" fill="hold" grpId="0" nodeType="withEffect">
-                                              <p:childTnLst>
-                                                <p:animEffect transition="in" filter="fade">
-                                                  <p:cBhvr>
-                                                    <p:cTn id="19" dur="600"/>
-                                                    <p:tgtEl>
-                                                      <p:spTgt spid="6"/>
-                                                    </p:tgtEl>
-                                                  </p:cBhvr>
-                                                </p:animEffect>
-                                              </p:childTnLst>
-                                            </p:cTn>
-                                          </p:par>
-                                        </p:childTnLst>
-                                      </p:cTn>
-                                    </p:par>
-                                  </p:childTnLst>
-                                </p:cTn>
-                              </p:par>
-                              <p:par>
-                                <p:cTn id="20" presetID="10" presetClass="entr" presetSubtype="0" fill="hold" grpId="0" nodeType="withEffect">
-                                  <p:stCondLst>
-                                    <p:cond delay="0"/>
-                                  </p:stCondLst>
-                                  <p:childTnLst>
-                                    <p:par>
-                                      <p:cTn id="21" fill="hold">
-                                        <p:stCondLst>
-                                          <p:cond delay="0"/>
-                                        </p:stCondLst>
-                                        <p:childTnLst>
-                                          <p:par>
-                                            <p:cTn id="22" presetID="1" presetClass="entr" presetSubtype="0" fill="hold" grpId="0" nodeType="withEffect">
-                                              <p:childTnLst>
-                                                <p:set>
-                                                  <p:cBhvr>
-                                                    <p:cTn id="23" dur="1" fill="hold">
-                                                      <p:stCondLst>
-                                                        <p:cond delay="0"/>
-                                                      </p:stCondLst>
-                                                      <p:childTnLst/>
-                                                    </p:cTn>
-                                                    <p:tgtEl>
-                                                      <p:spTgt spid="7"/>
-                                                    </p:tgtEl>
-                                                    <p:attrNameLst>
-                                                      <p:attrName>style.visibility</p:attrName>
-                                                    </p:attrNameLst>
-                                                  </p:cBhvr>
-                                                  <p:to>
-                                                    <p:strVal val="visible"/>
-                                                  </p:to>
-                                                </p:set>
-                                              </p:childTnLst>
-                                            </p:cTn>
-                                          </p:par>
-                                          <p:par>
-                                            <p:cTn id="24" presetID="10" presetClass="entr" presetSubtype="0" fill="hold" grpId="0" nodeType="withEffect">
-                                              <p:childTnLst>
-                                                <p:animEffect transition="in" filter="fade">
-                                                  <p:cBhvr>
-                                                    <p:cTn id="25" dur="600"/>
-                                                    <p:tgtEl>
-                                                      <p:spTgt spid="7"/>
-                                                    </p:tgtEl>
-                                                  </p:cBhvr>
-                                                </p:animEffect>
-                                              </p:childTnLst>
-                                            </p:cTn>
-                                          </p:par>
-                                        </p:childTnLst>
-                                      </p:cTn>
-                                    </p:par>
-                                  </p:childTnLst>
-                                </p:cTn>
-                              </p:par>
-                            </p:childTnLst>
-                          </p:cTn>
-                        </p:par>
-                      </p:childTnLst>
-                    </p:cTn>
-                  </p:par>
-                  <p:par>
-                    <p:cTn id="26" fill="hold">
-                      <p:stCondLst>
-                        <p:cond delay="indefinite" evt="onClick"/>
-                      </p:stCondLst>
-                      <p:childTnLst>
-                        <p:par>
-                          <p:cTn id="27" fill="hold">
-                            <p:childTnLst>
-                              <p:par>
-                                <p:cTn id="28" presetID="10" presetClass="entr" presetSubtype="0" fill="hold" grpId="0" nodeType="withEffect">
-                                  <p:stCondLst>
-                                    <p:cond delay="0"/>
-                                  </p:stCondLst>
-                                  <p:childTnLst>
-                                    <p:par>
-                                      <p:cTn id="29" fill="hold">
-                                        <p:stCondLst>
-                                          <p:cond delay="0"/>
-                                        </p:stCondLst>
-                                        <p:childTnLst>
-                                          <p:par>
-                                            <p:cTn id="30" presetID="1" presetClass="entr" presetSubtype="0" fill="hold" grpId="0" nodeType="withEffect">
-                                              <p:childTnLst>
-                                                <p:set>
-                                                  <p:cBhvr>
-                                                    <p:cTn id="31" dur="1" fill="hold">
-                                                      <p:stCondLst>
-                                                        <p:cond delay="0"/>
-                                                      </p:stCondLst>
-                                                      <p:childTnLst/>
-                                                    </p:cTn>
-                                                    <p:tgtEl>
-                                                      <p:spTgt spid="8"/>
-                                                    </p:tgtEl>
-                                                    <p:attrNameLst>
-                                                      <p:attrName>style.visibility</p:attrName>
-                                                    </p:attrNameLst>
-                                                  </p:cBhvr>
-                                                  <p:to>
-                                                    <p:strVal val="visible"/>
-                                                  </p:to>
-                                                </p:set>
-                                              </p:childTnLst>
-                                            </p:cTn>
-                                          </p:par>
-                                          <p:par>
-                                            <p:cTn id="32" presetID="10" presetClass="entr" presetSubtype="0" fill="hold" grpId="0" nodeType="withEffect">
-                                              <p:childTnLst>
-                                                <p:animEffect transition="in" filter="fade">
-                                                  <p:cBhvr>
-                                                    <p:cTn id="33" dur="600"/>
-                                                    <p:tgtEl>
-                                                      <p:spTgt spid="8"/>
-                                                    </p:tgtEl>
-                                                  </p:cBhvr>
-                                                </p:animEffect>
-                                              </p:childTnLst>
-                                            </p:cTn>
-                                          </p:par>
-                                        </p:childTnLst>
-                                      </p:cTn>
-                                    </p:par>
-                                  </p:childTnLst>
-                                </p:cTn>
-                              </p:par>
-                            </p:childTnLst>
-                          </p:cTn>
-                        </p:par>
-                      </p:childTnLst>
-                    </p:cTn>
-                  </p:par>
-                </p:childTnLst>
-              </p:cTn>
-              <p:prevCondLst>
-                <p:cond evt="onClick" delay="0">
-                  <p:tgtEl>
-                    <p:sldTgt/>
-                  </p:tgtEl>
-                </p:cond>
-              </p:prevCondLst>
-              <p:nextCondLst>
-                <p:cond evt="onClick" delay="0">
-                  <p:tgtEl>
-                    <p:sldTgt/>
-                  </p:tgtEl>
-                </p:cond>
-              </p:nextCondLst>
-            </p:seq>
-          </p:childTnLst>
-        </p:cTn>
-      </p:par>
-    </p:tnLst>
-    <p:bldLst>
-      <p:bldP spid="5" grpId="0"/>
-      <p:bldP spid="6" grpId="0"/>
-      <p:bldP spid="7" grpId="0"/>
-      <p:bldP spid="8" grpId="0"/>
-    </p:bldLst>
-  </p:timing>
 </p:sld>
 </file>
 

--- a/Grizzly-The-Clay-House.pptx
+++ b/Grizzly-The-Clay-House.pptx
@@ -3370,8 +3370,8 @@
         </p:nvSpPr>
         <p:spPr>
           <a:xfrm>
-            <a:off x="7388352" y="1461532"/>
-            <a:ext cx="4105655" cy="3386295"/>
+            <a:off x="7388352" y="1101852"/>
+            <a:ext cx="4105655" cy="4105655"/>
           </a:xfrm>
           <a:prstGeom prst="roundRect">
             <a:avLst>
@@ -3412,7 +3412,7 @@
       </p:sp>
       <p:pic>
         <p:nvPicPr>
-          <p:cNvPr id="9" name="Picture 8" descr="grizzly-bear.png"/>
+          <p:cNvPr id="9" name="Picture 8" descr="bear-clean.png"/>
           <p:cNvPicPr>
             <a:picLocks noChangeAspect="1"/>
           </p:cNvPicPr>
@@ -3426,8 +3426,8 @@
         </p:blipFill>
         <p:spPr>
           <a:xfrm>
-            <a:off x="7452360" y="1525540"/>
-            <a:ext cx="3977639" cy="3258279"/>
+            <a:off x="7452360" y="1165860"/>
+            <a:ext cx="3977639" cy="3977639"/>
           </a:xfrm>
           <a:prstGeom prst="rect">
             <a:avLst/>
@@ -5272,8 +5272,8 @@
         </p:nvSpPr>
         <p:spPr>
           <a:xfrm>
-            <a:off x="609219" y="4251959"/>
-            <a:ext cx="3316986" cy="1609344"/>
+            <a:off x="1478155" y="4251959"/>
+            <a:ext cx="1579112" cy="1609344"/>
           </a:xfrm>
           <a:prstGeom prst="roundRect">
             <a:avLst>
@@ -5314,7 +5314,7 @@
       </p:sp>
       <p:pic>
         <p:nvPicPr>
-          <p:cNvPr id="20" name="Picture 19" descr="sketch-4-combined-form.jpg"/>
+          <p:cNvPr id="20" name="Picture 19" descr="sketch-4-final-form.jpg"/>
           <p:cNvPicPr>
             <a:picLocks noChangeAspect="1"/>
           </p:cNvPicPr>
@@ -5328,8 +5328,8 @@
         </p:blipFill>
         <p:spPr>
           <a:xfrm>
-            <a:off x="673227" y="4315968"/>
-            <a:ext cx="3188970" cy="1481328"/>
+            <a:off x="1542163" y="4315968"/>
+            <a:ext cx="1451096" cy="1481328"/>
           </a:xfrm>
           <a:prstGeom prst="rect">
             <a:avLst/>
@@ -5370,7 +5370,7 @@
                 </a:solidFill>
                 <a:latin typeface="Trebuchet MS"/>
               </a:rPr>
-              <a:t>04  COMBINED FORM</a:t>
+              <a:t>04  THE SHELTER FORM</a:t>
             </a:r>
           </a:p>
         </p:txBody>
@@ -5409,7 +5409,7 @@
                 </a:solidFill>
                 <a:latin typeface="Trebuchet MS"/>
               </a:rPr>
-              <a:t>The two volumes join into one form.</a:t>
+              <a:t>The two volumes join into one shelter.</a:t>
             </a:r>
           </a:p>
         </p:txBody>
@@ -6259,8 +6259,8 @@
         </p:nvSpPr>
         <p:spPr>
           <a:xfrm>
-            <a:off x="8986551" y="1947672"/>
-            <a:ext cx="1851088" cy="3191256"/>
+            <a:off x="8699372" y="1947672"/>
+            <a:ext cx="2425446" cy="3191256"/>
           </a:xfrm>
           <a:prstGeom prst="roundRect">
             <a:avLst>
@@ -6301,7 +6301,7 @@
       </p:sp>
       <p:pic>
         <p:nvPicPr>
-          <p:cNvPr id="16" name="Picture 15" descr="process-3-side-cube-window.jpg"/>
+          <p:cNvPr id="16" name="Picture 15" descr="final-front-clean.jpg"/>
           <p:cNvPicPr>
             <a:picLocks noChangeAspect="1"/>
           </p:cNvPicPr>
@@ -6315,8 +6315,8 @@
         </p:blipFill>
         <p:spPr>
           <a:xfrm>
-            <a:off x="9050559" y="2011680"/>
-            <a:ext cx="1723072" cy="3063240"/>
+            <a:off x="8763380" y="2011680"/>
+            <a:ext cx="2297429" cy="3063240"/>
           </a:xfrm>
           <a:prstGeom prst="rect">
             <a:avLst/>
@@ -6607,8 +6607,8 @@
         </p:nvSpPr>
         <p:spPr>
           <a:xfrm>
-            <a:off x="505532" y="1719072"/>
-            <a:ext cx="3688950" cy="3044952"/>
+            <a:off x="827532" y="1719072"/>
+            <a:ext cx="3044952" cy="3044952"/>
           </a:xfrm>
           <a:prstGeom prst="roundRect">
             <a:avLst>
@@ -6649,7 +6649,7 @@
       </p:sp>
       <p:pic>
         <p:nvPicPr>
-          <p:cNvPr id="7" name="Picture 6" descr="grizzly-bear.png"/>
+          <p:cNvPr id="7" name="Picture 6" descr="bear-clean.png"/>
           <p:cNvPicPr>
             <a:picLocks noChangeAspect="1"/>
           </p:cNvPicPr>
@@ -6663,8 +6663,8 @@
         </p:blipFill>
         <p:spPr>
           <a:xfrm>
-            <a:off x="569540" y="1783080"/>
-            <a:ext cx="3560934" cy="2916936"/>
+            <a:off x="891540" y="1783080"/>
+            <a:ext cx="2916936" cy="2916936"/>
           </a:xfrm>
           <a:prstGeom prst="rect">
             <a:avLst/>
@@ -8549,8 +8549,8 @@
         </p:nvSpPr>
         <p:spPr>
           <a:xfrm>
-            <a:off x="5075038" y="1261872"/>
-            <a:ext cx="2048018" cy="1700784"/>
+            <a:off x="5248656" y="1261872"/>
+            <a:ext cx="1700784" cy="1700784"/>
           </a:xfrm>
           <a:prstGeom prst="roundRect">
             <a:avLst>
@@ -8591,7 +8591,7 @@
       </p:sp>
       <p:pic>
         <p:nvPicPr>
-          <p:cNvPr id="6" name="Picture 5" descr="grizzly-bear.png"/>
+          <p:cNvPr id="6" name="Picture 5" descr="bear-clean.png"/>
           <p:cNvPicPr>
             <a:picLocks noChangeAspect="1"/>
           </p:cNvPicPr>
@@ -8605,8 +8605,8 @@
         </p:blipFill>
         <p:spPr>
           <a:xfrm>
-            <a:off x="5139046" y="1325880"/>
-            <a:ext cx="1920002" cy="1572768"/>
+            <a:off x="5312664" y="1325880"/>
+            <a:ext cx="1572768" cy="1572768"/>
           </a:xfrm>
           <a:prstGeom prst="rect">
             <a:avLst/>
